--- a/docs/Geocaching-Map-Custom-Tile-Layers-Presentation.pptx
+++ b/docs/Geocaching-Map-Custom-Tile-Layers-Presentation.pptx
@@ -122,13 +122,13 @@
   <p:extLst>
     <p:ext uri="{521415D9-36F7-43E2-AB2F-B90AF26B5E84}">
       <p14:sectionLst xmlns:p14="http://schemas.microsoft.com/office/powerpoint/2010/main">
-        <p14:section name="Introduction" id="{b97b88ce-a2e1-0332-7402-de4e0e0a4385}">
+        <p14:section name="Introduction" id="{cc0b82f8-4f63-42e0-bc1e-04d2386e0496}">
           <p14:sldIdLst>
             <p14:sldId id="256"/>
             <p14:sldId id="257"/>
           </p14:sldIdLst>
         </p14:section>
-        <p14:section name="Features" id="{a3aba695-625c-224c-6bd4-eec193e68a61}">
+        <p14:section name="Features" id="{923811d6-4271-da02-e608-b8a9c4d81a72}">
           <p14:sldIdLst>
             <p14:sldId id="258"/>
             <p14:sldId id="259"/>
@@ -142,14 +142,14 @@
             <p14:sldId id="267"/>
           </p14:sldIdLst>
         </p14:section>
-        <p14:section name="Technical" id="{fdb1aaef-a699-5010-ef9f-5e719c3f1dff}">
+        <p14:section name="Technical" id="{df0ae72e-1a2a-ebd5-d7fd-9ca81d1fddb3}">
           <p14:sldIdLst>
             <p14:sldId id="268"/>
             <p14:sldId id="269"/>
             <p14:sldId id="270"/>
           </p14:sldIdLst>
         </p14:section>
-        <p14:section name="Wrap-up" id="{c942bd60-3908-fc15-8865-4fdf7a87a744}">
+        <p14:section name="Wrap-up" id="{0ebb1161-fe1a-d441-8d62-3d7b585a4f5e}">
           <p14:sldIdLst>
             <p14:sldId id="271"/>
           </p14:sldIdLst>
@@ -8071,7 +8071,7 @@
       </p:sp>
       <p:sp>
         <p:nvSpPr>
-          <p:cNvPr id="12023" name="Kort Nyhet: ruter til GPS-en"/>
+          <p:cNvPr id="12023" name="Kort Nyhet: ruter til GPS'en"/>
           <p:cNvSpPr/>
           <p:nvPr/>
         </p:nvSpPr>

--- a/docs/Geocaching-Map-Custom-Tile-Layers-Presentation.pptx
+++ b/docs/Geocaching-Map-Custom-Tile-Layers-Presentation.pptx
@@ -122,13 +122,13 @@
   <p:extLst>
     <p:ext uri="{521415D9-36F7-43E2-AB2F-B90AF26B5E84}">
       <p14:sectionLst xmlns:p14="http://schemas.microsoft.com/office/powerpoint/2010/main">
-        <p14:section name="Introduction" id="{cc0b82f8-4f63-42e0-bc1e-04d2386e0496}">
+        <p14:section name="Introduction" id="{ce6b812b-acaf-113f-24ad-7a419274845b}">
           <p14:sldIdLst>
             <p14:sldId id="256"/>
             <p14:sldId id="257"/>
           </p14:sldIdLst>
         </p14:section>
-        <p14:section name="Features" id="{923811d6-4271-da02-e608-b8a9c4d81a72}">
+        <p14:section name="Features" id="{3743858a-4bb4-c939-6804-160e307438d9}">
           <p14:sldIdLst>
             <p14:sldId id="258"/>
             <p14:sldId id="259"/>
@@ -142,14 +142,14 @@
             <p14:sldId id="267"/>
           </p14:sldIdLst>
         </p14:section>
-        <p14:section name="Technical" id="{df0ae72e-1a2a-ebd5-d7fd-9ca81d1fddb3}">
+        <p14:section name="Technical" id="{f8c5d5f8-8e3f-c649-5a8c-29c17fe17a44}">
           <p14:sldIdLst>
             <p14:sldId id="268"/>
             <p14:sldId id="269"/>
             <p14:sldId id="270"/>
           </p14:sldIdLst>
         </p14:section>
-        <p14:section name="Wrap-up" id="{0ebb1161-fe1a-d441-8d62-3d7b585a4f5e}">
+        <p14:section name="Wrap-up" id="{afed6d62-b64d-a125-86f6-a06338bad58f}">
           <p14:sldIdLst>
             <p14:sldId id="271"/>
           </p14:sldIdLst>
@@ -2153,7 +2153,7 @@
                   <a:schemeClr val="accent4"/>
                 </a:solidFill>
               </a:rPr>
-              <a:t>Geocaching Map – Custom Tile Layers · v1.51.0</a:t>
+              <a:t>Geocaching Map – Custom Tile Layers · v1.51.9</a:t>
             </a:r>
             <a:endParaRPr lang="en-US" sz="1000" dirty="0"/>
           </a:p>
@@ -2673,7 +2673,7 @@
                   <a:schemeClr val="accent5"/>
                 </a:solidFill>
               </a:rPr>
-              <a:t>Userscript · version 1.51.0 · English and Norwegian</a:t>
+              <a:t>Userscript · version 1.51.9 · English and Norwegian</a:t>
             </a:r>
             <a:endParaRPr lang="en-US" sz="1400" dirty="0"/>
           </a:p>
@@ -8647,7 +8647,7 @@
       </p:sp>
       <p:sp>
         <p:nvSpPr>
-          <p:cNvPr id="13014" name="Ikon circles sirkel"/>
+          <p:cNvPr id="13014" name="Ikon route sirkel"/>
           <p:cNvSpPr/>
           <p:nvPr/>
         </p:nvSpPr>
@@ -8667,7 +8667,7 @@
       </p:sp>
       <p:pic>
         <p:nvPicPr>
-          <p:cNvPr id="13015" name="Ikon circles" descr="circles">    </p:cNvPr>
+          <p:cNvPr id="13015" name="Ikon route" descr="route">    </p:cNvPr>
           <p:cNvPicPr>
             <a:picLocks noChangeAspect="1"/>
           </p:cNvPicPr>
@@ -8722,7 +8722,7 @@
                   <a:schemeClr val="tx1"/>
                 </a:solidFill>
               </a:rPr>
-              <a:t>161 m circles</a:t>
+              <a:t>Route</a:t>
             </a:r>
             <a:endParaRPr lang="en-US" sz="1700" dirty="0"/>
           </a:p>
@@ -8739,7 +8739,7 @@
                   <a:schemeClr val="accent4"/>
                 </a:solidFill>
               </a:rPr>
-              <a:t>Where something is placed – from zoom 15</a:t>
+              <a:t>Build a route and download it as GPX</a:t>
             </a:r>
             <a:endParaRPr lang="en-US" sz="1700" dirty="0"/>
           </a:p>
@@ -8747,7 +8747,7 @@
       </p:sp>
       <p:sp>
         <p:nvSpPr>
-          <p:cNvPr id="13017" name="Ikon solved sirkel"/>
+          <p:cNvPr id="13017" name="Ikon circles sirkel"/>
           <p:cNvSpPr/>
           <p:nvPr/>
         </p:nvSpPr>
@@ -8767,7 +8767,7 @@
       </p:sp>
       <p:pic>
         <p:nvPicPr>
-          <p:cNvPr id="13018" name="Ikon solved" descr="solved">    </p:cNvPr>
+          <p:cNvPr id="13018" name="Ikon circles" descr="circles">    </p:cNvPr>
           <p:cNvPicPr>
             <a:picLocks noChangeAspect="1"/>
           </p:cNvPicPr>
@@ -8822,7 +8822,7 @@
                   <a:schemeClr val="tx1"/>
                 </a:solidFill>
               </a:rPr>
-              <a:t>Marks</a:t>
+              <a:t>161 m circles</a:t>
             </a:r>
             <a:endParaRPr lang="en-US" sz="1700" dirty="0"/>
           </a:p>
@@ -8839,7 +8839,7 @@
                   <a:schemeClr val="accent4"/>
                 </a:solidFill>
               </a:rPr>
-              <a:t>Solved caches, also without circles</a:t>
+              <a:t>Where something is placed – from zoom 15</a:t>
             </a:r>
             <a:endParaRPr lang="en-US" sz="1700" dirty="0"/>
           </a:p>
@@ -8847,7 +8847,7 @@
       </p:sp>
       <p:sp>
         <p:nvSpPr>
-          <p:cNvPr id="13020" name="Ikon dt sirkel"/>
+          <p:cNvPr id="13020" name="Ikon solved sirkel"/>
           <p:cNvSpPr/>
           <p:nvPr/>
         </p:nvSpPr>
@@ -8867,7 +8867,7 @@
       </p:sp>
       <p:pic>
         <p:nvPicPr>
-          <p:cNvPr id="13021" name="Ikon dt" descr="dt">    </p:cNvPr>
+          <p:cNvPr id="13021" name="Ikon solved" descr="solved">    </p:cNvPr>
           <p:cNvPicPr>
             <a:picLocks noChangeAspect="1"/>
           </p:cNvPicPr>
@@ -8922,7 +8922,7 @@
                   <a:schemeClr val="tx1"/>
                 </a:solidFill>
               </a:rPr>
-              <a:t>D/T</a:t>
+              <a:t>Marks</a:t>
             </a:r>
             <a:endParaRPr lang="en-US" sz="1700" dirty="0"/>
           </a:p>
@@ -8939,7 +8939,7 @@
                   <a:schemeClr val="accent4"/>
                 </a:solidFill>
               </a:rPr>
-              <a:t>Difficulty/terrain below the caches – on/off</a:t>
+              <a:t>Solved caches, also without circles</a:t>
             </a:r>
             <a:endParaRPr lang="en-US" sz="1700" dirty="0"/>
           </a:p>
@@ -8947,7 +8947,7 @@
       </p:sp>
       <p:sp>
         <p:nvSpPr>
-          <p:cNvPr id="13023" name="Ikon locate sirkel"/>
+          <p:cNvPr id="13023" name="Ikon heart sirkel"/>
           <p:cNvSpPr/>
           <p:nvPr/>
         </p:nvSpPr>
@@ -8967,7 +8967,7 @@
       </p:sp>
       <p:pic>
         <p:nvPicPr>
-          <p:cNvPr id="13024" name="Ikon locate" descr="locate">    </p:cNvPr>
+          <p:cNvPr id="13024" name="Ikon heart" descr="heart">    </p:cNvPr>
           <p:cNvPicPr>
             <a:picLocks noChangeAspect="1"/>
           </p:cNvPicPr>
@@ -9022,7 +9022,7 @@
                   <a:schemeClr val="tx1"/>
                 </a:solidFill>
               </a:rPr>
-              <a:t>My location</a:t>
+              <a:t>Favourite points</a:t>
             </a:r>
             <a:endParaRPr lang="en-US" sz="1700" dirty="0"/>
           </a:p>
@@ -9039,7 +9039,7 @@
                   <a:schemeClr val="accent4"/>
                 </a:solidFill>
               </a:rPr>
-              <a:t>With an accuracy circle</a:t>
+              <a:t>♥ and the count above the caches – on/off</a:t>
             </a:r>
             <a:endParaRPr lang="en-US" sz="1700" dirty="0"/>
           </a:p>
@@ -9047,7 +9047,7 @@
       </p:sp>
       <p:sp>
         <p:nvSpPr>
-          <p:cNvPr id="13026" name="Ikon home sirkel"/>
+          <p:cNvPr id="13026" name="Ikon dt sirkel"/>
           <p:cNvSpPr/>
           <p:nvPr/>
         </p:nvSpPr>
@@ -9067,7 +9067,7 @@
       </p:sp>
       <p:pic>
         <p:nvPicPr>
-          <p:cNvPr id="13027" name="Ikon home" descr="home">    </p:cNvPr>
+          <p:cNvPr id="13027" name="Ikon dt" descr="dt">    </p:cNvPr>
           <p:cNvPicPr>
             <a:picLocks noChangeAspect="1"/>
           </p:cNvPicPr>
@@ -9122,7 +9122,7 @@
                   <a:schemeClr val="tx1"/>
                 </a:solidFill>
               </a:rPr>
-              <a:t>Home</a:t>
+              <a:t>D/T</a:t>
             </a:r>
             <a:endParaRPr lang="en-US" sz="1700" dirty="0"/>
           </a:p>
@@ -9139,7 +9139,7 @@
                   <a:schemeClr val="accent4"/>
                 </a:solidFill>
               </a:rPr>
-              <a:t>Right-click to change the address</a:t>
+              <a:t>Difficulty/terrain below the caches – on/off</a:t>
             </a:r>
             <a:endParaRPr lang="en-US" sz="1700" dirty="0"/>
           </a:p>
@@ -9147,7 +9147,7 @@
       </p:sp>
       <p:sp>
         <p:nvSpPr>
-          <p:cNvPr id="13029" name="Ikon expand sirkel"/>
+          <p:cNvPr id="13029" name="Ikon eyeoff sirkel"/>
           <p:cNvSpPr/>
           <p:nvPr/>
         </p:nvSpPr>
@@ -9167,7 +9167,7 @@
       </p:sp>
       <p:pic>
         <p:nvPicPr>
-          <p:cNvPr id="13030" name="Ikon expand" descr="expand">    </p:cNvPr>
+          <p:cNvPr id="13030" name="Ikon eyeoff" descr="eyeoff">    </p:cNvPr>
           <p:cNvPicPr>
             <a:picLocks noChangeAspect="1"/>
           </p:cNvPicPr>
@@ -9222,7 +9222,7 @@
                   <a:schemeClr val="tx1"/>
                 </a:solidFill>
               </a:rPr>
-              <a:t>Fullscreen</a:t>
+              <a:t>Hide geocaches</a:t>
             </a:r>
             <a:endParaRPr lang="en-US" sz="1700" dirty="0"/>
           </a:p>
@@ -9239,7 +9239,7 @@
                   <a:schemeClr val="accent4"/>
                 </a:solidFill>
               </a:rPr>
-              <a:t>The map fills the whole screen</a:t>
+              <a:t>A clean map – click again to show them</a:t>
             </a:r>
             <a:endParaRPr lang="en-US" sz="1700" dirty="0"/>
           </a:p>
@@ -9247,7 +9247,7 @@
       </p:sp>
       <p:sp>
         <p:nvSpPr>
-          <p:cNvPr id="13032" name="Ikon eraser sirkel"/>
+          <p:cNvPr id="13032" name="Ikon locate sirkel"/>
           <p:cNvSpPr/>
           <p:nvPr/>
         </p:nvSpPr>
@@ -9267,7 +9267,7 @@
       </p:sp>
       <p:pic>
         <p:nvPicPr>
-          <p:cNvPr id="13033" name="Ikon eraser" descr="eraser">    </p:cNvPr>
+          <p:cNvPr id="13033" name="Ikon locate" descr="locate">    </p:cNvPr>
           <p:cNvPicPr>
             <a:picLocks noChangeAspect="1"/>
           </p:cNvPicPr>
@@ -9322,7 +9322,7 @@
                   <a:schemeClr val="tx1"/>
                 </a:solidFill>
               </a:rPr>
-              <a:t>Clear drawings</a:t>
+              <a:t>My location</a:t>
             </a:r>
             <a:endParaRPr lang="en-US" sz="1700" dirty="0"/>
           </a:p>
@@ -9339,7 +9339,7 @@
                   <a:schemeClr val="accent4"/>
                 </a:solidFill>
               </a:rPr>
-              <a:t>Marks, measurements and circles</a:t>
+              <a:t>With an accuracy circle</a:t>
             </a:r>
             <a:endParaRPr lang="en-US" sz="1700" dirty="0"/>
           </a:p>
@@ -9347,7 +9347,7 @@
       </p:sp>
       <p:sp>
         <p:nvSpPr>
-          <p:cNvPr id="13035" name="Ikon eyeoff sirkel"/>
+          <p:cNvPr id="13035" name="Ikon home sirkel"/>
           <p:cNvSpPr/>
           <p:nvPr/>
         </p:nvSpPr>
@@ -9367,7 +9367,7 @@
       </p:sp>
       <p:pic>
         <p:nvPicPr>
-          <p:cNvPr id="13036" name="Ikon eyeoff" descr="eyeoff">    </p:cNvPr>
+          <p:cNvPr id="13036" name="Ikon home" descr="home">    </p:cNvPr>
           <p:cNvPicPr>
             <a:picLocks noChangeAspect="1"/>
           </p:cNvPicPr>
@@ -9422,7 +9422,7 @@
                   <a:schemeClr val="tx1"/>
                 </a:solidFill>
               </a:rPr>
-              <a:t>Hide geocaches</a:t>
+              <a:t>Home</a:t>
             </a:r>
             <a:endParaRPr lang="en-US" sz="1700" dirty="0"/>
           </a:p>
@@ -9439,7 +9439,7 @@
                   <a:schemeClr val="accent4"/>
                 </a:solidFill>
               </a:rPr>
-              <a:t>A clean map – click again to show them</a:t>
+              <a:t>Right-click to change the address</a:t>
             </a:r>
             <a:endParaRPr lang="en-US" sz="1700" dirty="0"/>
           </a:p>
@@ -9447,7 +9447,7 @@
       </p:sp>
       <p:sp>
         <p:nvSpPr>
-          <p:cNvPr id="13038" name="Ikon heart sirkel"/>
+          <p:cNvPr id="13038" name="Ikon expand sirkel"/>
           <p:cNvSpPr/>
           <p:nvPr/>
         </p:nvSpPr>
@@ -9467,7 +9467,7 @@
       </p:sp>
       <p:pic>
         <p:nvPicPr>
-          <p:cNvPr id="13039" name="Ikon heart" descr="heart">    </p:cNvPr>
+          <p:cNvPr id="13039" name="Ikon expand" descr="expand">    </p:cNvPr>
           <p:cNvPicPr>
             <a:picLocks noChangeAspect="1"/>
           </p:cNvPicPr>
@@ -9522,7 +9522,7 @@
                   <a:schemeClr val="tx1"/>
                 </a:solidFill>
               </a:rPr>
-              <a:t>Favourite points</a:t>
+              <a:t>Fullscreen</a:t>
             </a:r>
             <a:endParaRPr lang="en-US" sz="1700" dirty="0"/>
           </a:p>
@@ -9539,7 +9539,7 @@
                   <a:schemeClr val="accent4"/>
                 </a:solidFill>
               </a:rPr>
-              <a:t>♥ and the count above the caches – on/off</a:t>
+              <a:t>The map fills the whole screen</a:t>
             </a:r>
             <a:endParaRPr lang="en-US" sz="1700" dirty="0"/>
           </a:p>
@@ -9547,7 +9547,7 @@
       </p:sp>
       <p:sp>
         <p:nvSpPr>
-          <p:cNvPr id="13041" name="Ikon gear sirkel"/>
+          <p:cNvPr id="13041" name="Ikon eraser sirkel"/>
           <p:cNvSpPr/>
           <p:nvPr/>
         </p:nvSpPr>
@@ -9567,7 +9567,7 @@
       </p:sp>
       <p:pic>
         <p:nvPicPr>
-          <p:cNvPr id="13042" name="Ikon gear" descr="gear">    </p:cNvPr>
+          <p:cNvPr id="13042" name="Ikon eraser" descr="eraser">    </p:cNvPr>
           <p:cNvPicPr>
             <a:picLocks noChangeAspect="1"/>
           </p:cNvPicPr>
@@ -9622,7 +9622,7 @@
                   <a:schemeClr val="tx1"/>
                 </a:solidFill>
               </a:rPr>
-              <a:t>Settings</a:t>
+              <a:t>Clear drawings</a:t>
             </a:r>
             <a:endParaRPr lang="en-US" sz="1700" dirty="0"/>
           </a:p>
@@ -9639,6 +9639,106 @@
                   <a:schemeClr val="accent4"/>
                 </a:solidFill>
               </a:rPr>
+              <a:t>Marks, measurements and circles</a:t>
+            </a:r>
+            <a:endParaRPr lang="en-US" sz="1700" dirty="0"/>
+          </a:p>
+        </p:txBody>
+      </p:sp>
+      <p:sp>
+        <p:nvSpPr>
+          <p:cNvPr id="13044" name="Ikon gear sirkel"/>
+          <p:cNvSpPr/>
+          <p:nvPr/>
+        </p:nvSpPr>
+        <p:spPr>
+          <a:xfrm>
+            <a:off x="7086600" y="5733288"/>
+            <a:ext cx="512064" cy="512064"/>
+          </a:xfrm>
+          <a:prstGeom prst="ellipse">
+            <a:avLst/>
+          </a:prstGeom>
+          <a:solidFill>
+            <a:schemeClr val="accent1"/>
+          </a:solidFill>
+          <a:ln/>
+        </p:spPr>
+      </p:sp>
+      <p:pic>
+        <p:nvPicPr>
+          <p:cNvPr id="13045" name="Ikon gear" descr="gear">    </p:cNvPr>
+          <p:cNvPicPr>
+            <a:picLocks noChangeAspect="1"/>
+          </p:cNvPicPr>
+          <p:nvPr/>
+        </p:nvPicPr>
+        <p:blipFill>
+          <a:blip r:embed="rId15"/>
+          <a:stretch>
+            <a:fillRect/>
+          </a:stretch>
+        </p:blipFill>
+        <p:spPr>
+          <a:xfrm>
+            <a:off x="7199254" y="5845942"/>
+            <a:ext cx="286756" cy="286756"/>
+          </a:xfrm>
+          <a:prstGeom prst="rect">
+            <a:avLst/>
+          </a:prstGeom>
+        </p:spPr>
+      </p:pic>
+      <p:sp>
+        <p:nvSpPr>
+          <p:cNvPr id="13046" name="Text 29"/>
+          <p:cNvSpPr txBox="1"/>
+          <p:nvPr/>
+        </p:nvSpPr>
+        <p:spPr>
+          <a:xfrm>
+            <a:off x="7799832" y="5660136"/>
+            <a:ext cx="3767328" cy="667512"/>
+          </a:xfrm>
+          <a:prstGeom prst="rect">
+            <a:avLst/>
+          </a:prstGeom>
+          <a:noFill/>
+          <a:ln/>
+        </p:spPr>
+        <p:txBody>
+          <a:bodyPr wrap="square" lIns="0" tIns="0" rIns="0" bIns="0" rtlCol="0" anchor="t"/>
+          <a:lstStyle/>
+          <a:p>
+            <a:pPr indent="0" marL="0">
+              <a:spcAft>
+                <a:spcPts val="200"/>
+              </a:spcAft>
+              <a:buNone/>
+            </a:pPr>
+            <a:r>
+              <a:rPr lang="en-US" sz="1700" b="1" dirty="0">
+                <a:solidFill>
+                  <a:schemeClr val="tx1"/>
+                </a:solidFill>
+              </a:rPr>
+              <a:t>Settings</a:t>
+            </a:r>
+            <a:endParaRPr lang="en-US" sz="1700" dirty="0"/>
+          </a:p>
+          <a:p>
+            <a:pPr indent="0" marL="0">
+              <a:spcAft>
+                <a:spcPts val="200"/>
+              </a:spcAft>
+              <a:buNone/>
+            </a:pPr>
+            <a:r>
+              <a:rPr lang="en-US" sz="1400" dirty="0">
+                <a:solidFill>
+                  <a:schemeClr val="accent4"/>
+                </a:solidFill>
+              </a:rPr>
               <a:t>Position, language and the site's buttons</a:t>
             </a:r>
             <a:endParaRPr lang="en-US" sz="1700" dirty="0"/>
@@ -9647,7 +9747,7 @@
       </p:sp>
       <p:sp>
         <p:nvSpPr>
-          <p:cNvPr id="13044" name="Slide Number Placeholder 0"/>
+          <p:cNvPr id="13047" name="Slide Number Placeholder 0"/>
           <p:cNvSpPr>
             <a:spLocks noGrp="1"/>
           </p:cNvSpPr>

--- a/docs/Geocaching-Map-Custom-Tile-Layers-Presentation.pptx
+++ b/docs/Geocaching-Map-Custom-Tile-Layers-Presentation.pptx
@@ -21,9 +21,10 @@
     <p:sldId id="269" r:id="rId15"/>
     <p:sldId id="270" r:id="rId16"/>
     <p:sldId id="271" r:id="rId17"/>
+    <p:sldId id="272" r:id="rId18"/>
   </p:sldIdLst>
   <p:notesMasterIdLst>
-    <p:notesMasterId r:id="rId18"/>
+    <p:notesMasterId r:id="rId19"/>
   </p:notesMasterIdLst>
   <p:sldSz cx="12192000" cy="6858000"/>
   <p:notesSz cx="6858000" cy="12192000"/>
@@ -122,13 +123,13 @@
   <p:extLst>
     <p:ext uri="{521415D9-36F7-43E2-AB2F-B90AF26B5E84}">
       <p14:sectionLst xmlns:p14="http://schemas.microsoft.com/office/powerpoint/2010/main">
-        <p14:section name="Introduction" id="{ce6b812b-acaf-113f-24ad-7a419274845b}">
+        <p14:section name="Introduction" id="{c703c21a-5ec2-d8d1-6b35-488ecb1e7cfe}">
           <p14:sldIdLst>
             <p14:sldId id="256"/>
             <p14:sldId id="257"/>
           </p14:sldIdLst>
         </p14:section>
-        <p14:section name="Features" id="{3743858a-4bb4-c939-6804-160e307438d9}">
+        <p14:section name="Features" id="{8774f726-00a5-0fdb-391c-b05d5342a077}">
           <p14:sldIdLst>
             <p14:sldId id="258"/>
             <p14:sldId id="259"/>
@@ -140,18 +141,19 @@
             <p14:sldId id="265"/>
             <p14:sldId id="266"/>
             <p14:sldId id="267"/>
+            <p14:sldId id="268"/>
           </p14:sldIdLst>
         </p14:section>
-        <p14:section name="Technical" id="{f8c5d5f8-8e3f-c649-5a8c-29c17fe17a44}">
+        <p14:section name="Technical" id="{9dcee35f-c4aa-f21b-859d-86e88d9ccf80}">
           <p14:sldIdLst>
-            <p14:sldId id="268"/>
             <p14:sldId id="269"/>
             <p14:sldId id="270"/>
+            <p14:sldId id="271"/>
           </p14:sldIdLst>
         </p14:section>
-        <p14:section name="Wrap-up" id="{afed6d62-b64d-a125-86f6-a06338bad58f}">
+        <p14:section name="Wrap-up" id="{99335f9a-9c57-1e65-4cf5-b1ed72eccaf4}">
           <p14:sldIdLst>
-            <p14:sldId id="271"/>
+            <p14:sldId id="272"/>
           </p14:sldIdLst>
         </p14:section>
       </p14:sectionLst>
@@ -734,7 +736,7 @@
           <a:p>
             <a:r>
               <a:rPr lang="en-US" dirty="0"/>
-              <a:t>The circles show from zoom level 15. The cache types, the exact coordinates and your solved coordinates come from geocaching.com's own cache search. Physical stages are read from the list of additional waypoints on the cache page – only those the owner has made visible. Blue mark with a question mark and a green tick: a solved cache you have found. Small blue dot: physical stage. Small green dot: final location. Your own caches, which the cache search leaves out, are read from the cache pages; there the site's icon and popup are kept, but the hover text becomes “Final location”.</a:t>
+              <a:t>The cache list is on the old map (/map); the new map has a list of its own. The list and the route window sit at the top right or left of the map (Settings), clear of the site's side panel, and the two buttons switch between them.</a:t>
             </a:r>
             <a:endParaRPr lang="en-US" dirty="0"/>
           </a:p>
@@ -822,7 +824,7 @@
           <a:p>
             <a:r>
               <a:rPr lang="en-US" dirty="0"/>
-              <a:t>161 m is the minimum distance between caches in the guidelines. On the old map the script finds the positions from a hidden grid the site loads; on the new maps the exact positions are used.</a:t>
+              <a:t>The circles show from zoom level 15. The cache types, the exact coordinates and your solved coordinates come from geocaching.com's own cache search. Physical stages are read from the list of additional waypoints on the cache page – only those the owner has made visible. Blue mark with a question mark and a green tick: a solved cache you have found. Small blue dot: physical stage. Small green dot: final location. Your own caches, which the cache search leaves out, are read from the cache pages; there the site's icon and popup are kept, but the hover text becomes “Final location”.</a:t>
             </a:r>
             <a:endParaRPr lang="en-US" dirty="0"/>
           </a:p>
@@ -910,7 +912,7 @@
           <a:p>
             <a:r>
               <a:rPr lang="en-US" dirty="0"/>
-              <a:t>The browser draws Leaflet's controls on top, then the popups, markers and drawings, and the map tiles at the bottom. Among the tiles the script sorts by z-index: the site's background at the bottom, then your background map, the overlays and the preview, and on top the site's other tiles – on the old map those are the cache icons. The site's background is found from the site's layer switcher, otherwise as the lowest tile layer. The dialogs sit outside the map, attached to the page, so the side panel doesn't cover them.</a:t>
+              <a:t>161 m is the minimum distance between caches in the guidelines. On the old map the script finds the positions from a hidden grid the site loads; on the new maps the exact positions are used.</a:t>
             </a:r>
             <a:endParaRPr lang="en-US" dirty="0"/>
           </a:p>
@@ -998,7 +1000,7 @@
           <a:p>
             <a:r>
               <a:rPr lang="en-US" dirty="0"/>
-              <a:t>The script starts before the page and catches Leaflet the moment the page defines it. Its own errors never reach the site's code.</a:t>
+              <a:t>The browser draws Leaflet's controls on top, then the popups, markers and drawings, and the map tiles at the bottom. Among the tiles the script sorts by z-index: the site's background at the bottom, then your background map, the overlays and the preview, and on top the site's other tiles – on the old map those are the cache icons. The site's background is found from the site's layer switcher, otherwise as the lowest tile layer. The dialogs sit outside the map, attached to the page, so the side panel doesn't cover them.</a:t>
             </a:r>
             <a:endParaRPr lang="en-US" dirty="0"/>
           </a:p>
@@ -1086,7 +1088,7 @@
           <a:p>
             <a:r>
               <a:rPr lang="en-US" dirty="0"/>
-              <a:t>The script needs no special permissions (@grant none). The settings are shared between the map pages and the cache pages.</a:t>
+              <a:t>The script starts before the page and catches Leaflet the moment the page defines it. Its own errors never reach the site's code.</a:t>
             </a:r>
             <a:endParaRPr lang="en-US" dirty="0"/>
           </a:p>
@@ -1174,7 +1176,7 @@
           <a:p>
             <a:r>
               <a:rPr lang="en-US" dirty="0"/>
-              <a:t>Thank you for your attention. Questions?</a:t>
+              <a:t>The script needs no special permissions (@grant none). The settings are shared between the map pages and the cache pages.</a:t>
             </a:r>
             <a:endParaRPr lang="en-US" dirty="0"/>
           </a:p>
@@ -1198,6 +1200,94 @@
             <a:fld id="{F7021451-1387-4CA6-816F-3879F97B5CBC}" type="slidenum">
               <a:rPr lang="en-US"/>
               <a:t>16</a:t>
+            </a:fld>
+            <a:endParaRPr lang="en-US"/>
+          </a:p>
+        </p:txBody>
+      </p:sp>
+    </p:spTree>
+    <p:extLst>
+      <p:ext uri="{BB962C8B-B14F-4D97-AF65-F5344CB8AC3E}">
+        <p14:creationId xmlns:p14="http://schemas.microsoft.com/office/powerpoint/2010/main" val="1024086991"/>
+      </p:ext>
+    </p:extLst>
+  </p:cSld>
+  <p:clrMapOvr>
+    <a:masterClrMapping/>
+  </p:clrMapOvr>
+</p:notes>
+</file>
+
+<file path=ppt/notesSlides/notesSlide17.xml><?xml version="1.0" encoding="utf-8"?>
+<p:notes xmlns:a="http://schemas.openxmlformats.org/drawingml/2006/main" xmlns:r="http://schemas.openxmlformats.org/officeDocument/2006/relationships" xmlns:p="http://schemas.openxmlformats.org/presentationml/2006/main">
+  <p:cSld>
+    <p:spTree>
+      <p:nvGrpSpPr>
+        <p:cNvPr id="417001" name=""/>
+        <p:cNvGrpSpPr/>
+        <p:nvPr/>
+      </p:nvGrpSpPr>
+      <p:grpSpPr>
+        <a:xfrm>
+          <a:off x="0" y="0"/>
+          <a:ext cx="0" cy="0"/>
+          <a:chOff x="0" y="0"/>
+          <a:chExt cx="0" cy="0"/>
+        </a:xfrm>
+      </p:grpSpPr>
+      <p:sp>
+        <p:nvSpPr>
+          <p:cNvPr id="417002" name="Slide Image Placeholder 1"/>
+          <p:cNvSpPr>
+            <a:spLocks noGrp="1" noRot="1" noChangeAspect="1"/>
+          </p:cNvSpPr>
+          <p:nvPr>
+            <p:ph type="sldImg"/>
+          </p:nvPr>
+        </p:nvSpPr>
+        <p:spPr/>
+      </p:sp>
+      <p:sp>
+        <p:nvSpPr>
+          <p:cNvPr id="417003" name="Notes Placeholder 2"/>
+          <p:cNvSpPr>
+            <a:spLocks noGrp="1"/>
+          </p:cNvSpPr>
+          <p:nvPr>
+            <p:ph type="body" idx="1"/>
+          </p:nvPr>
+        </p:nvSpPr>
+        <p:spPr/>
+        <p:txBody>
+          <a:bodyPr/>
+          <a:lstStyle/>
+          <a:p>
+            <a:r>
+              <a:rPr lang="en-US" dirty="0"/>
+              <a:t>Thank you for your attention. Questions?</a:t>
+            </a:r>
+            <a:endParaRPr lang="en-US" dirty="0"/>
+          </a:p>
+        </p:txBody>
+      </p:sp>
+      <p:sp>
+        <p:nvSpPr>
+          <p:cNvPr id="417004" name="Slide Number Placeholder 3"/>
+          <p:cNvSpPr>
+            <a:spLocks noGrp="1"/>
+          </p:cNvSpPr>
+          <p:nvPr>
+            <p:ph type="sldNum" sz="quarter" idx="10"/>
+          </p:nvPr>
+        </p:nvSpPr>
+        <p:spPr/>
+        <p:txBody>
+          <a:bodyPr/>
+          <a:lstStyle/>
+          <a:p>
+            <a:fld id="{F7021451-1387-4CA6-816F-3879F97B5CBC}" type="slidenum">
+              <a:rPr lang="en-US"/>
+              <a:t>17</a:t>
             </a:fld>
             <a:endParaRPr lang="en-US"/>
           </a:p>
@@ -2153,7 +2243,7 @@
                   <a:schemeClr val="accent4"/>
                 </a:solidFill>
               </a:rPr>
-              <a:t>Geocaching Map – Custom Tile Layers · v1.51.9</a:t>
+              <a:t>Geocaching Map – Custom Tile Layers · v1.53.0</a:t>
             </a:r>
             <a:endParaRPr lang="en-US" sz="1000" dirty="0"/>
           </a:p>
@@ -2673,7 +2763,7 @@
                   <a:schemeClr val="accent5"/>
                 </a:solidFill>
               </a:rPr>
-              <a:t>Userscript · version 1.51.9 · English and Norwegian</a:t>
+              <a:t>Userscript · version 1.53.0 · English and Norwegian</a:t>
             </a:r>
             <a:endParaRPr lang="en-US" sz="1400" dirty="0"/>
           </a:p>
@@ -2695,8 +2785,8 @@
         </p:blipFill>
         <p:spPr>
           <a:xfrm>
-            <a:off x="8682150" y="548640"/>
-            <a:ext cx="2595145" cy="5760720"/>
+            <a:off x="8742823" y="548640"/>
+            <a:ext cx="2534472" cy="5760720"/>
           </a:xfrm>
           <a:prstGeom prst="rect">
             <a:avLst/>
@@ -2811,8 +2901,8 @@
         </p:blipFill>
         <p:spPr>
           <a:xfrm>
-            <a:off x="7448245" y="1527048"/>
-            <a:ext cx="3817620" cy="4581144"/>
+            <a:off x="8084515" y="1527048"/>
+            <a:ext cx="2545080" cy="4581144"/>
           </a:xfrm>
           <a:prstGeom prst="rect">
             <a:avLst/>
@@ -3321,7 +3411,7 @@
                   <a:schemeClr val="tx2"/>
                 </a:solidFill>
               </a:rPr>
-              <a:t>161 m circles where something is placed</a:t>
+              <a:t>New: the geocaches on the map in a list</a:t>
             </a:r>
             <a:endParaRPr lang="en-US" sz="3600" dirty="0"/>
           </a:p>
@@ -3329,27 +3419,29 @@
       </p:sp>
       <p:sp>
         <p:nvSpPr>
-          <p:cNvPr id="21003" name="Ikon circles sirkel"/>
+          <p:cNvPr id="21003" name="Cachelisten bakgrunn"/>
           <p:cNvSpPr/>
           <p:nvPr/>
         </p:nvSpPr>
         <p:spPr>
           <a:xfrm>
-            <a:off x="548640" y="1499616"/>
-            <a:ext cx="512064" cy="512064"/>
-          </a:xfrm>
-          <a:prstGeom prst="ellipse">
-            <a:avLst/>
+            <a:off x="7619695" y="1325880"/>
+            <a:ext cx="4023360" cy="4983480"/>
+          </a:xfrm>
+          <a:prstGeom prst="roundRect">
+            <a:avLst>
+              <a:gd name="adj" fmla="val 2727"/>
+            </a:avLst>
           </a:prstGeom>
           <a:solidFill>
-            <a:schemeClr val="accent1"/>
+            <a:schemeClr val="bg2"/>
           </a:solidFill>
           <a:ln/>
         </p:spPr>
       </p:sp>
       <p:pic>
         <p:nvPicPr>
-          <p:cNvPr id="21004" name="Ikon circles" descr="circles">    </p:cNvPr>
+          <p:cNvPr id="21004" name="Cachelisten" descr="The cache list">    </p:cNvPr>
           <p:cNvPicPr>
             <a:picLocks noChangeAspect="1"/>
           </p:cNvPicPr>
@@ -3363,8 +3455,8 @@
         </p:blipFill>
         <p:spPr>
           <a:xfrm>
-            <a:off x="661294" y="1612270"/>
-            <a:ext cx="286756" cy="286756"/>
+            <a:off x="7934655" y="1527048"/>
+            <a:ext cx="3393440" cy="4581144"/>
           </a:xfrm>
           <a:prstGeom prst="rect">
             <a:avLst/>
@@ -3373,69 +3465,13 @@
       </p:pic>
       <p:sp>
         <p:nvSpPr>
-          <p:cNvPr id="21005" name="Text 2"/>
-          <p:cNvSpPr txBox="1"/>
-          <p:nvPr/>
-        </p:nvSpPr>
-        <p:spPr>
-          <a:xfrm>
-            <a:off x="1261872" y="1426464"/>
-            <a:ext cx="6053328" cy="1097280"/>
-          </a:xfrm>
-          <a:prstGeom prst="rect">
-            <a:avLst/>
-          </a:prstGeom>
-          <a:noFill/>
-          <a:ln/>
-        </p:spPr>
-        <p:txBody>
-          <a:bodyPr wrap="square" lIns="0" tIns="0" rIns="0" bIns="0" rtlCol="0" anchor="t"/>
-          <a:lstStyle/>
-          <a:p>
-            <a:pPr indent="0" marL="0">
-              <a:spcAft>
-                <a:spcPts val="200"/>
-              </a:spcAft>
-              <a:buNone/>
-            </a:pPr>
-            <a:r>
-              <a:rPr lang="en-US" sz="1700" b="1" dirty="0">
-                <a:solidFill>
-                  <a:schemeClr val="tx1"/>
-                </a:solidFill>
-              </a:rPr>
-              <a:t>Traditional caches</a:t>
-            </a:r>
-            <a:endParaRPr lang="en-US" sz="1700" dirty="0"/>
-          </a:p>
-          <a:p>
-            <a:pPr indent="0" marL="0">
-              <a:spcAft>
-                <a:spcPts val="200"/>
-              </a:spcAft>
-              <a:buNone/>
-            </a:pPr>
-            <a:r>
-              <a:rPr lang="en-US" sz="1400" dirty="0">
-                <a:solidFill>
-                  <a:schemeClr val="accent4"/>
-                </a:solidFill>
-              </a:rPr>
-              <a:t>At their exact posted coordinates</a:t>
-            </a:r>
-            <a:endParaRPr lang="en-US" sz="1700" dirty="0"/>
-          </a:p>
-        </p:txBody>
-      </p:sp>
-      <p:sp>
-        <p:nvSpPr>
-          <p:cNvPr id="21006" name="Ikon check sirkel"/>
+          <p:cNvPr id="21005" name="Ikon list sirkel"/>
           <p:cNvSpPr/>
           <p:nvPr/>
         </p:nvSpPr>
         <p:spPr>
           <a:xfrm>
-            <a:off x="548640" y="2642616"/>
+            <a:off x="548640" y="1499616"/>
             <a:ext cx="512064" cy="512064"/>
           </a:xfrm>
           <a:prstGeom prst="ellipse">
@@ -3449,7 +3485,7 @@
       </p:sp>
       <p:pic>
         <p:nvPicPr>
-          <p:cNvPr id="21007" name="Ikon check" descr="check">    </p:cNvPr>
+          <p:cNvPr id="21006" name="Ikon list" descr="list">    </p:cNvPr>
           <p:cNvPicPr>
             <a:picLocks noChangeAspect="1"/>
           </p:cNvPicPr>
@@ -3463,7 +3499,7 @@
         </p:blipFill>
         <p:spPr>
           <a:xfrm>
-            <a:off x="661294" y="2755270"/>
+            <a:off x="661294" y="1612270"/>
             <a:ext cx="286756" cy="286756"/>
           </a:xfrm>
           <a:prstGeom prst="rect">
@@ -3473,14 +3509,14 @@
       </p:pic>
       <p:sp>
         <p:nvSpPr>
-          <p:cNvPr id="21008" name="Text 4"/>
+          <p:cNvPr id="21007" name="Text 3"/>
           <p:cNvSpPr txBox="1"/>
           <p:nvPr/>
         </p:nvSpPr>
         <p:spPr>
           <a:xfrm>
-            <a:off x="1261872" y="2569464"/>
-            <a:ext cx="6053328" cy="1097280"/>
+            <a:off x="1261872" y="1426464"/>
+            <a:ext cx="6053328" cy="1143000"/>
           </a:xfrm>
           <a:prstGeom prst="rect">
             <a:avLst/>
@@ -3504,7 +3540,7 @@
                   <a:schemeClr val="tx1"/>
                 </a:solidFill>
               </a:rPr>
-              <a:t>Solved caches</a:t>
+              <a:t>Follows the map</a:t>
             </a:r>
             <a:endParaRPr lang="en-US" sz="1700" dirty="0"/>
           </a:p>
@@ -3521,7 +3557,7 @@
                   <a:schemeClr val="accent4"/>
                 </a:solidFill>
               </a:rPr>
-              <a:t>At your corrected coordinates – also when the icon has moved back after a find</a:t>
+              <a:t>The geocaches on the map you see, nearest the middle first – with Solved, Found, Owned, D/T and ♥</a:t>
             </a:r>
             <a:endParaRPr lang="en-US" sz="1700" dirty="0"/>
           </a:p>
@@ -3529,13 +3565,13 @@
       </p:sp>
       <p:sp>
         <p:nvSpPr>
-          <p:cNvPr id="21009" name="Ikon pin sirkel"/>
+          <p:cNvPr id="21008" name="Ikon search sirkel"/>
           <p:cNvSpPr/>
           <p:nvPr/>
         </p:nvSpPr>
         <p:spPr>
           <a:xfrm>
-            <a:off x="548640" y="3785616"/>
+            <a:off x="548640" y="2688336"/>
             <a:ext cx="512064" cy="512064"/>
           </a:xfrm>
           <a:prstGeom prst="ellipse">
@@ -3549,7 +3585,7 @@
       </p:sp>
       <p:pic>
         <p:nvPicPr>
-          <p:cNvPr id="21010" name="Ikon pin" descr="pin">    </p:cNvPr>
+          <p:cNvPr id="21009" name="Ikon search" descr="search">    </p:cNvPr>
           <p:cNvPicPr>
             <a:picLocks noChangeAspect="1"/>
           </p:cNvPicPr>
@@ -3563,7 +3599,7 @@
         </p:blipFill>
         <p:spPr>
           <a:xfrm>
-            <a:off x="661294" y="3898270"/>
+            <a:off x="661294" y="2800990"/>
             <a:ext cx="286756" cy="286756"/>
           </a:xfrm>
           <a:prstGeom prst="rect">
@@ -3573,14 +3609,14 @@
       </p:pic>
       <p:sp>
         <p:nvSpPr>
-          <p:cNvPr id="21011" name="Text 6"/>
+          <p:cNvPr id="21010" name="Text 5"/>
           <p:cNvSpPr txBox="1"/>
           <p:nvPr/>
         </p:nvSpPr>
         <p:spPr>
           <a:xfrm>
-            <a:off x="1261872" y="3712464"/>
-            <a:ext cx="6053328" cy="1097280"/>
+            <a:off x="1261872" y="2615184"/>
+            <a:ext cx="6053328" cy="1143000"/>
           </a:xfrm>
           <a:prstGeom prst="rect">
             <a:avLst/>
@@ -3604,7 +3640,7 @@
                   <a:schemeClr val="tx1"/>
                 </a:solidFill>
               </a:rPr>
-              <a:t>Physical stages and finals</a:t>
+              <a:t>Point and find</a:t>
             </a:r>
             <a:endParaRPr lang="en-US" sz="1700" dirty="0"/>
           </a:p>
@@ -3621,7 +3657,7 @@
                   <a:schemeClr val="accent4"/>
                 </a:solidFill>
               </a:rPr>
-              <a:t>Visible stages of multis, mysteries, Wherigos and letterboxes, read from the cache page</a:t>
+              <a:t>Point at a cache on the map and it is highlighted in the list. Filter by code or name</a:t>
             </a:r>
             <a:endParaRPr lang="en-US" sz="1700" dirty="0"/>
           </a:p>
@@ -3629,13 +3665,13 @@
       </p:sp>
       <p:sp>
         <p:nvSpPr>
-          <p:cNvPr id="21012" name="Ikon ring sirkel"/>
+          <p:cNvPr id="21011" name="Ikon locate sirkel"/>
           <p:cNvSpPr/>
           <p:nvPr/>
         </p:nvSpPr>
         <p:spPr>
           <a:xfrm>
-            <a:off x="548640" y="4928616"/>
+            <a:off x="548640" y="3877056"/>
             <a:ext cx="512064" cy="512064"/>
           </a:xfrm>
           <a:prstGeom prst="ellipse">
@@ -3649,7 +3685,7 @@
       </p:sp>
       <p:pic>
         <p:nvPicPr>
-          <p:cNvPr id="21013" name="Ikon ring" descr="ring">    </p:cNvPr>
+          <p:cNvPr id="21012" name="Ikon locate" descr="locate">    </p:cNvPr>
           <p:cNvPicPr>
             <a:picLocks noChangeAspect="1"/>
           </p:cNvPicPr>
@@ -3663,7 +3699,7 @@
         </p:blipFill>
         <p:spPr>
           <a:xfrm>
-            <a:off x="661294" y="5041270"/>
+            <a:off x="661294" y="3989710"/>
             <a:ext cx="286756" cy="286756"/>
           </a:xfrm>
           <a:prstGeom prst="rect">
@@ -3673,14 +3709,14 @@
       </p:pic>
       <p:sp>
         <p:nvSpPr>
-          <p:cNvPr id="21014" name="Text 8"/>
+          <p:cNvPr id="21013" name="Text 7"/>
           <p:cNvSpPr txBox="1"/>
           <p:nvPr/>
         </p:nvSpPr>
         <p:spPr>
           <a:xfrm>
-            <a:off x="1261872" y="4855464"/>
-            <a:ext cx="6053328" cy="1097280"/>
+            <a:off x="1261872" y="3803904"/>
+            <a:ext cx="6053328" cy="1143000"/>
           </a:xfrm>
           <a:prstGeom prst="rect">
             <a:avLst/>
@@ -3704,7 +3740,7 @@
                   <a:schemeClr val="tx1"/>
                 </a:solidFill>
               </a:rPr>
-              <a:t>Single circle</a:t>
+              <a:t>Zoom with a glow</a:t>
             </a:r>
             <a:endParaRPr lang="en-US" sz="1700" dirty="0"/>
           </a:p>
@@ -3721,7 +3757,7 @@
                   <a:schemeClr val="accent4"/>
                 </a:solidFill>
               </a:rPr>
-              <a:t>Right-click anywhere and choose 161 m circle</a:t>
+              <a:t>Click to zoom all the way in – the cache glows on the map. Click again to go back</a:t>
             </a:r>
             <a:endParaRPr lang="en-US" sz="1700" dirty="0"/>
           </a:p>
@@ -3729,29 +3765,27 @@
       </p:sp>
       <p:sp>
         <p:nvSpPr>
-          <p:cNvPr id="21015" name="Merke ved en løst cache bakgrunn"/>
+          <p:cNvPr id="21014" name="Ikon external sirkel"/>
           <p:cNvSpPr/>
           <p:nvPr/>
         </p:nvSpPr>
         <p:spPr>
           <a:xfrm>
-            <a:off x="7802575" y="1463040"/>
-            <a:ext cx="3840480" cy="2834640"/>
-          </a:xfrm>
-          <a:prstGeom prst="roundRect">
-            <a:avLst>
-              <a:gd name="adj" fmla="val 3871"/>
-            </a:avLst>
+            <a:off x="548640" y="5065776"/>
+            <a:ext cx="512064" cy="512064"/>
+          </a:xfrm>
+          <a:prstGeom prst="ellipse">
+            <a:avLst/>
           </a:prstGeom>
           <a:solidFill>
-            <a:schemeClr val="bg2"/>
+            <a:schemeClr val="accent1"/>
           </a:solidFill>
           <a:ln/>
         </p:spPr>
       </p:sp>
       <p:pic>
         <p:nvPicPr>
-          <p:cNvPr id="21016" name="Merke ved en løst cache" descr="Mark at a solved cache">    </p:cNvPr>
+          <p:cNvPr id="21015" name="Ikon external" descr="external">    </p:cNvPr>
           <p:cNvPicPr>
             <a:picLocks noChangeAspect="1"/>
           </p:cNvPicPr>
@@ -3765,8 +3799,8 @@
         </p:blipFill>
         <p:spPr>
           <a:xfrm>
-            <a:off x="8058607" y="1664208"/>
-            <a:ext cx="3328416" cy="2432304"/>
+            <a:off x="661294" y="5178430"/>
+            <a:ext cx="286756" cy="286756"/>
           </a:xfrm>
           <a:prstGeom prst="rect">
             <a:avLst/>
@@ -3775,14 +3809,14 @@
       </p:pic>
       <p:sp>
         <p:nvSpPr>
-          <p:cNvPr id="21017" name="Text 10"/>
+          <p:cNvPr id="21016" name="Text 9"/>
           <p:cNvSpPr txBox="1"/>
           <p:nvPr/>
         </p:nvSpPr>
         <p:spPr>
           <a:xfrm>
-            <a:off x="7802575" y="4526280"/>
-            <a:ext cx="3840480" cy="1280160"/>
+            <a:off x="1261872" y="4992624"/>
+            <a:ext cx="6053328" cy="1143000"/>
           </a:xfrm>
           <a:prstGeom prst="rect">
             <a:avLst/>
@@ -3795,23 +3829,43 @@
           <a:lstStyle/>
           <a:p>
             <a:pPr indent="0" marL="0">
-              <a:buNone/>
-            </a:pPr>
-            <a:r>
-              <a:rPr lang="en-US" sz="1500" dirty="0">
+              <a:spcAft>
+                <a:spcPts val="200"/>
+              </a:spcAft>
+              <a:buNone/>
+            </a:pPr>
+            <a:r>
+              <a:rPr lang="en-US" sz="1700" b="1" dirty="0">
+                <a:solidFill>
+                  <a:schemeClr val="tx1"/>
+                </a:solidFill>
+              </a:rPr>
+              <a:t>The cache page</a:t>
+            </a:r>
+            <a:endParaRPr lang="en-US" sz="1700" dirty="0"/>
+          </a:p>
+          <a:p>
+            <a:pPr indent="0" marL="0">
+              <a:spcAft>
+                <a:spcPts val="200"/>
+              </a:spcAft>
+              <a:buNone/>
+            </a:pPr>
+            <a:r>
+              <a:rPr lang="en-US" sz="1400" dirty="0">
                 <a:solidFill>
                   <a:schemeClr val="accent4"/>
                 </a:solidFill>
               </a:rPr>
-              <a:t>Where no cache icon shows the spot, a clickable mark sits in the middle of the circle. Hovering over a solved cache shows “Final location”; right-click gives the exact coordinates.</a:t>
-            </a:r>
-            <a:endParaRPr lang="en-US" sz="1500" dirty="0"/>
-          </a:p>
-        </p:txBody>
-      </p:sp>
-      <p:sp>
-        <p:nvSpPr>
-          <p:cNvPr id="21018" name="Slide Number Placeholder 0"/>
+              <a:t>The button on the line opens the cache page in a new tab</a:t>
+            </a:r>
+            <a:endParaRPr lang="en-US" sz="1700" dirty="0"/>
+          </a:p>
+        </p:txBody>
+      </p:sp>
+      <p:sp>
+        <p:nvSpPr>
+          <p:cNvPr id="21017" name="Slide Number Placeholder 0"/>
           <p:cNvSpPr>
             <a:spLocks noGrp="1"/>
           </p:cNvSpPr>
@@ -3911,7 +3965,7 @@
                   <a:schemeClr val="tx2"/>
                 </a:solidFill>
               </a:rPr>
-              <a:t>161 m circles, cache pages and home</a:t>
+              <a:t>161 m circles where something is placed</a:t>
             </a:r>
             <a:endParaRPr lang="en-US" sz="3600" dirty="0"/>
           </a:p>
@@ -3919,36 +3973,14 @@
       </p:sp>
       <p:sp>
         <p:nvSpPr>
-          <p:cNvPr id="22003" name="Kort 161 m-sirkler"/>
+          <p:cNvPr id="22003" name="Ikon circles sirkel"/>
           <p:cNvSpPr/>
           <p:nvPr/>
         </p:nvSpPr>
         <p:spPr>
           <a:xfrm>
-            <a:off x="548640" y="1508760"/>
-            <a:ext cx="3484778" cy="4206240"/>
-          </a:xfrm>
-          <a:prstGeom prst="roundRect">
-            <a:avLst>
-              <a:gd name="adj" fmla="val 3149"/>
-            </a:avLst>
-          </a:prstGeom>
-          <a:solidFill>
-            <a:schemeClr val="bg2"/>
-          </a:solidFill>
-          <a:ln/>
-        </p:spPr>
-      </p:sp>
-      <p:sp>
-        <p:nvSpPr>
-          <p:cNvPr id="22004" name="Ikon circles sirkel"/>
-          <p:cNvSpPr/>
-          <p:nvPr/>
-        </p:nvSpPr>
-        <p:spPr>
-          <a:xfrm>
-            <a:off x="914400" y="1920240"/>
-            <a:ext cx="822960" cy="822960"/>
+            <a:off x="548640" y="1499616"/>
+            <a:ext cx="512064" cy="512064"/>
           </a:xfrm>
           <a:prstGeom prst="ellipse">
             <a:avLst/>
@@ -3961,7 +3993,7 @@
       </p:sp>
       <p:pic>
         <p:nvPicPr>
-          <p:cNvPr id="22005" name="Ikon circles" descr="circles">    </p:cNvPr>
+          <p:cNvPr id="22004" name="Ikon circles" descr="circles">    </p:cNvPr>
           <p:cNvPicPr>
             <a:picLocks noChangeAspect="1"/>
           </p:cNvPicPr>
@@ -3975,8 +4007,8 @@
         </p:blipFill>
         <p:spPr>
           <a:xfrm>
-            <a:off x="1095451" y="2101291"/>
-            <a:ext cx="460858" cy="460858"/>
+            <a:off x="661294" y="1612270"/>
+            <a:ext cx="286756" cy="286756"/>
           </a:xfrm>
           <a:prstGeom prst="rect">
             <a:avLst/>
@@ -3985,14 +4017,14 @@
       </p:pic>
       <p:sp>
         <p:nvSpPr>
-          <p:cNvPr id="22006" name="Text 3"/>
+          <p:cNvPr id="22005" name="Text 2"/>
           <p:cNvSpPr txBox="1"/>
           <p:nvPr/>
         </p:nvSpPr>
         <p:spPr>
           <a:xfrm>
-            <a:off x="914400" y="2971800"/>
-            <a:ext cx="2753258" cy="502920"/>
+            <a:off x="1261872" y="1426464"/>
+            <a:ext cx="6053328" cy="1097280"/>
           </a:xfrm>
           <a:prstGeom prst="rect">
             <a:avLst/>
@@ -4001,150 +4033,54 @@
           <a:ln/>
         </p:spPr>
         <p:txBody>
-          <a:bodyPr wrap="square" lIns="0" tIns="0" rIns="0" bIns="0" rtlCol="0" anchor="ctr"/>
-          <a:lstStyle/>
-          <a:p>
-            <a:pPr indent="0" marL="0">
-              <a:buNone/>
-            </a:pPr>
-            <a:r>
-              <a:rPr lang="en-US" sz="2200" b="1" dirty="0">
+          <a:bodyPr wrap="square" lIns="0" tIns="0" rIns="0" bIns="0" rtlCol="0" anchor="t"/>
+          <a:lstStyle/>
+          <a:p>
+            <a:pPr indent="0" marL="0">
+              <a:spcAft>
+                <a:spcPts val="200"/>
+              </a:spcAft>
+              <a:buNone/>
+            </a:pPr>
+            <a:r>
+              <a:rPr lang="en-US" sz="1700" b="1" dirty="0">
                 <a:solidFill>
                   <a:schemeClr val="tx1"/>
                 </a:solidFill>
               </a:rPr>
-              <a:t>161 m circles</a:t>
-            </a:r>
-            <a:endParaRPr lang="en-US" sz="2200" dirty="0"/>
-          </a:p>
-        </p:txBody>
-      </p:sp>
-      <p:sp>
-        <p:nvSpPr>
-          <p:cNvPr id="22007" name="Text 4"/>
-          <p:cNvSpPr txBox="1"/>
-          <p:nvPr/>
-        </p:nvSpPr>
-        <p:spPr>
-          <a:xfrm>
-            <a:off x="914400" y="3611880"/>
-            <a:ext cx="2753258" cy="1828800"/>
-          </a:xfrm>
-          <a:prstGeom prst="rect">
-            <a:avLst/>
-          </a:prstGeom>
-          <a:noFill/>
-          <a:ln/>
-        </p:spPr>
-        <p:txBody>
-          <a:bodyPr wrap="square" lIns="0" tIns="0" rIns="0" bIns="0" rtlCol="0" anchor="t"/>
-          <a:lstStyle/>
-          <a:p>
-            <a:pPr marL="228600" indent="-228600">
+              <a:t>Traditional caches</a:t>
+            </a:r>
+            <a:endParaRPr lang="en-US" sz="1700" dirty="0"/>
+          </a:p>
+          <a:p>
+            <a:pPr indent="0" marL="0">
               <a:spcAft>
-                <a:spcPts val="800"/>
+                <a:spcPts val="200"/>
               </a:spcAft>
-              <a:buSzPct val="100000"/>
-              <a:buChar char="•"/>
-            </a:pPr>
-            <a:r>
-              <a:rPr lang="en-US" sz="1700" dirty="0">
-                <a:solidFill>
-                  <a:schemeClr val="tx1"/>
-                </a:solidFill>
-              </a:rPr>
-              <a:t>Where something is placed – see the previous slide</a:t>
+              <a:buNone/>
+            </a:pPr>
+            <a:r>
+              <a:rPr lang="en-US" sz="1400" dirty="0">
+                <a:solidFill>
+                  <a:schemeClr val="accent4"/>
+                </a:solidFill>
+              </a:rPr>
+              <a:t>At their exact posted coordinates</a:t>
             </a:r>
             <a:endParaRPr lang="en-US" sz="1700" dirty="0"/>
           </a:p>
-          <a:p>
-            <a:pPr marL="228600" indent="-228600">
-              <a:spcAft>
-                <a:spcPts val="800"/>
-              </a:spcAft>
-              <a:buSzPct val="100000"/>
-              <a:buChar char="•"/>
-            </a:pPr>
-            <a:r>
-              <a:rPr lang="en-US" sz="1700" dirty="0">
-                <a:solidFill>
-                  <a:schemeClr val="tx1"/>
-                </a:solidFill>
-              </a:rPr>
-              <a:t>Shown from zoom level 15</a:t>
-            </a:r>
-            <a:endParaRPr lang="en-US" sz="1700" dirty="0"/>
-          </a:p>
-          <a:p>
-            <a:pPr marL="228600" indent="-228600">
-              <a:spcAft>
-                <a:spcPts val="800"/>
-              </a:spcAft>
-              <a:buSzPct val="100000"/>
-              <a:buChar char="•"/>
-            </a:pPr>
-            <a:r>
-              <a:rPr lang="en-US" sz="1700" dirty="0">
-                <a:solidFill>
-                  <a:schemeClr val="tx1"/>
-                </a:solidFill>
-              </a:rPr>
-              <a:t>Follow the map and never block clicks</a:t>
-            </a:r>
-            <a:endParaRPr lang="en-US" sz="1700" dirty="0"/>
-          </a:p>
-          <a:p>
-            <a:pPr marL="228600" indent="-228600">
-              <a:spcAft>
-                <a:spcPts val="800"/>
-              </a:spcAft>
-              <a:buSzPct val="100000"/>
-              <a:buChar char="•"/>
-            </a:pPr>
-            <a:r>
-              <a:rPr lang="en-US" sz="1700" dirty="0">
-                <a:solidFill>
-                  <a:schemeClr val="tx1"/>
-                </a:solidFill>
-              </a:rPr>
-              <a:t>Single circle: right-click</a:t>
-            </a:r>
-            <a:endParaRPr lang="en-US" sz="1700" dirty="0"/>
-          </a:p>
-        </p:txBody>
-      </p:sp>
-      <p:sp>
-        <p:nvSpPr>
-          <p:cNvPr id="22008" name="Kort Cachesider"/>
+        </p:txBody>
+      </p:sp>
+      <p:sp>
+        <p:nvSpPr>
+          <p:cNvPr id="22006" name="Ikon check sirkel"/>
           <p:cNvSpPr/>
           <p:nvPr/>
         </p:nvSpPr>
         <p:spPr>
           <a:xfrm>
-            <a:off x="4353458" y="1508760"/>
-            <a:ext cx="3484778" cy="4206240"/>
-          </a:xfrm>
-          <a:prstGeom prst="roundRect">
-            <a:avLst>
-              <a:gd name="adj" fmla="val 3149"/>
-            </a:avLst>
-          </a:prstGeom>
-          <a:solidFill>
-            <a:schemeClr val="bg2"/>
-          </a:solidFill>
-          <a:ln/>
-        </p:spPr>
-      </p:sp>
-      <p:sp>
-        <p:nvSpPr>
-          <p:cNvPr id="22009" name="Ikon layers sirkel"/>
-          <p:cNvSpPr/>
-          <p:nvPr/>
-        </p:nvSpPr>
-        <p:spPr>
-          <a:xfrm>
-            <a:off x="4719218" y="1920240"/>
-            <a:ext cx="822960" cy="822960"/>
+            <a:off x="548640" y="2642616"/>
+            <a:ext cx="512064" cy="512064"/>
           </a:xfrm>
           <a:prstGeom prst="ellipse">
             <a:avLst/>
@@ -4157,7 +4093,7 @@
       </p:sp>
       <p:pic>
         <p:nvPicPr>
-          <p:cNvPr id="22010" name="Ikon layers" descr="layers">    </p:cNvPr>
+          <p:cNvPr id="22007" name="Ikon check" descr="check">    </p:cNvPr>
           <p:cNvPicPr>
             <a:picLocks noChangeAspect="1"/>
           </p:cNvPicPr>
@@ -4171,8 +4107,8 @@
         </p:blipFill>
         <p:spPr>
           <a:xfrm>
-            <a:off x="4900270" y="2101291"/>
-            <a:ext cx="460858" cy="460858"/>
+            <a:off x="661294" y="2755270"/>
+            <a:ext cx="286756" cy="286756"/>
           </a:xfrm>
           <a:prstGeom prst="rect">
             <a:avLst/>
@@ -4181,14 +4117,14 @@
       </p:pic>
       <p:sp>
         <p:nvSpPr>
-          <p:cNvPr id="22011" name="Text 7"/>
+          <p:cNvPr id="22008" name="Text 4"/>
           <p:cNvSpPr txBox="1"/>
           <p:nvPr/>
         </p:nvSpPr>
         <p:spPr>
           <a:xfrm>
-            <a:off x="4719218" y="2971800"/>
-            <a:ext cx="2753258" cy="502920"/>
+            <a:off x="1261872" y="2569464"/>
+            <a:ext cx="6053328" cy="1097280"/>
           </a:xfrm>
           <a:prstGeom prst="rect">
             <a:avLst/>
@@ -4197,150 +4133,54 @@
           <a:ln/>
         </p:spPr>
         <p:txBody>
-          <a:bodyPr wrap="square" lIns="0" tIns="0" rIns="0" bIns="0" rtlCol="0" anchor="ctr"/>
-          <a:lstStyle/>
-          <a:p>
-            <a:pPr indent="0" marL="0">
-              <a:buNone/>
-            </a:pPr>
-            <a:r>
-              <a:rPr lang="en-US" sz="2200" b="1" dirty="0">
+          <a:bodyPr wrap="square" lIns="0" tIns="0" rIns="0" bIns="0" rtlCol="0" anchor="t"/>
+          <a:lstStyle/>
+          <a:p>
+            <a:pPr indent="0" marL="0">
+              <a:spcAft>
+                <a:spcPts val="200"/>
+              </a:spcAft>
+              <a:buNone/>
+            </a:pPr>
+            <a:r>
+              <a:rPr lang="en-US" sz="1700" b="1" dirty="0">
                 <a:solidFill>
                   <a:schemeClr val="tx1"/>
                 </a:solidFill>
               </a:rPr>
-              <a:t>Cache pages</a:t>
-            </a:r>
-            <a:endParaRPr lang="en-US" sz="2200" dirty="0"/>
-          </a:p>
-        </p:txBody>
-      </p:sp>
-      <p:sp>
-        <p:nvSpPr>
-          <p:cNvPr id="22012" name="Text 8"/>
-          <p:cNvSpPr txBox="1"/>
-          <p:nvPr/>
-        </p:nvSpPr>
-        <p:spPr>
-          <a:xfrm>
-            <a:off x="4719218" y="3611880"/>
-            <a:ext cx="2753258" cy="1828800"/>
-          </a:xfrm>
-          <a:prstGeom prst="rect">
-            <a:avLst/>
-          </a:prstGeom>
-          <a:noFill/>
-          <a:ln/>
-        </p:spPr>
-        <p:txBody>
-          <a:bodyPr wrap="square" lIns="0" tIns="0" rIns="0" bIns="0" rtlCol="0" anchor="t"/>
-          <a:lstStyle/>
-          <a:p>
-            <a:pPr marL="228600" indent="-228600">
+              <a:t>Solved caches</a:t>
+            </a:r>
+            <a:endParaRPr lang="en-US" sz="1700" dirty="0"/>
+          </a:p>
+          <a:p>
+            <a:pPr indent="0" marL="0">
               <a:spcAft>
-                <a:spcPts val="800"/>
+                <a:spcPts val="200"/>
               </a:spcAft>
-              <a:buSzPct val="100000"/>
-              <a:buChar char="•"/>
-            </a:pPr>
-            <a:r>
-              <a:rPr lang="en-US" sz="1700" dirty="0">
-                <a:solidFill>
-                  <a:schemeClr val="tx1"/>
-                </a:solidFill>
-              </a:rPr>
-              <a:t>The small map shows your chosen map</a:t>
+              <a:buNone/>
+            </a:pPr>
+            <a:r>
+              <a:rPr lang="en-US" sz="1400" dirty="0">
+                <a:solidFill>
+                  <a:schemeClr val="accent4"/>
+                </a:solidFill>
+              </a:rPr>
+              <a:t>At your corrected coordinates – also when the icon has moved back after a find</a:t>
             </a:r>
             <a:endParaRPr lang="en-US" sz="1700" dirty="0"/>
           </a:p>
-          <a:p>
-            <a:pPr marL="228600" indent="-228600">
-              <a:spcAft>
-                <a:spcPts val="800"/>
-              </a:spcAft>
-              <a:buSzPct val="100000"/>
-              <a:buChar char="•"/>
-            </a:pPr>
-            <a:r>
-              <a:rPr lang="en-US" sz="1700" dirty="0">
-                <a:solidFill>
-                  <a:schemeClr val="tx1"/>
-                </a:solidFill>
-              </a:rPr>
-              <a:t>Same fading and overlays</a:t>
-            </a:r>
-            <a:endParaRPr lang="en-US" sz="1700" dirty="0"/>
-          </a:p>
-          <a:p>
-            <a:pPr marL="228600" indent="-228600">
-              <a:spcAft>
-                <a:spcPts val="800"/>
-              </a:spcAft>
-              <a:buSzPct val="100000"/>
-              <a:buChar char="•"/>
-            </a:pPr>
-            <a:r>
-              <a:rPr lang="en-US" sz="1700" dirty="0">
-                <a:solidFill>
-                  <a:schemeClr val="tx1"/>
-                </a:solidFill>
-              </a:rPr>
-              <a:t>Keeps the site's view</a:t>
-            </a:r>
-            <a:endParaRPr lang="en-US" sz="1700" dirty="0"/>
-          </a:p>
-          <a:p>
-            <a:pPr marL="228600" indent="-228600">
-              <a:spcAft>
-                <a:spcPts val="800"/>
-              </a:spcAft>
-              <a:buSzPct val="100000"/>
-              <a:buChar char="•"/>
-            </a:pPr>
-            <a:r>
-              <a:rPr lang="en-US" sz="1700" dirty="0">
-                <a:solidFill>
-                  <a:schemeClr val="tx1"/>
-                </a:solidFill>
-              </a:rPr>
-              <a:t>Never changes your choice</a:t>
-            </a:r>
-            <a:endParaRPr lang="en-US" sz="1700" dirty="0"/>
-          </a:p>
-        </p:txBody>
-      </p:sp>
-      <p:sp>
-        <p:nvSpPr>
-          <p:cNvPr id="22013" name="Kort Hjem"/>
+        </p:txBody>
+      </p:sp>
+      <p:sp>
+        <p:nvSpPr>
+          <p:cNvPr id="22009" name="Ikon pin sirkel"/>
           <p:cNvSpPr/>
           <p:nvPr/>
         </p:nvSpPr>
         <p:spPr>
           <a:xfrm>
-            <a:off x="8158277" y="1508760"/>
-            <a:ext cx="3484778" cy="4206240"/>
-          </a:xfrm>
-          <a:prstGeom prst="roundRect">
-            <a:avLst>
-              <a:gd name="adj" fmla="val 3149"/>
-            </a:avLst>
-          </a:prstGeom>
-          <a:solidFill>
-            <a:schemeClr val="bg2"/>
-          </a:solidFill>
-          <a:ln/>
-        </p:spPr>
-      </p:sp>
-      <p:sp>
-        <p:nvSpPr>
-          <p:cNvPr id="22014" name="Ikon home sirkel"/>
-          <p:cNvSpPr/>
-          <p:nvPr/>
-        </p:nvSpPr>
-        <p:spPr>
-          <a:xfrm>
-            <a:off x="8524037" y="1920240"/>
-            <a:ext cx="822960" cy="822960"/>
+            <a:off x="548640" y="3785616"/>
+            <a:ext cx="512064" cy="512064"/>
           </a:xfrm>
           <a:prstGeom prst="ellipse">
             <a:avLst/>
@@ -4353,7 +4193,7 @@
       </p:sp>
       <p:pic>
         <p:nvPicPr>
-          <p:cNvPr id="22015" name="Ikon home" descr="home">    </p:cNvPr>
+          <p:cNvPr id="22010" name="Ikon pin" descr="pin">    </p:cNvPr>
           <p:cNvPicPr>
             <a:picLocks noChangeAspect="1"/>
           </p:cNvPicPr>
@@ -4367,8 +4207,8 @@
         </p:blipFill>
         <p:spPr>
           <a:xfrm>
-            <a:off x="8705088" y="2101291"/>
-            <a:ext cx="460858" cy="460858"/>
+            <a:off x="661294" y="3898270"/>
+            <a:ext cx="286756" cy="286756"/>
           </a:xfrm>
           <a:prstGeom prst="rect">
             <a:avLst/>
@@ -4377,14 +4217,14 @@
       </p:pic>
       <p:sp>
         <p:nvSpPr>
-          <p:cNvPr id="22016" name="Text 11"/>
+          <p:cNvPr id="22011" name="Text 6"/>
           <p:cNvSpPr txBox="1"/>
           <p:nvPr/>
         </p:nvSpPr>
         <p:spPr>
           <a:xfrm>
-            <a:off x="8524037" y="2971800"/>
-            <a:ext cx="2753258" cy="502920"/>
+            <a:off x="1261872" y="3712464"/>
+            <a:ext cx="6053328" cy="1097280"/>
           </a:xfrm>
           <a:prstGeom prst="rect">
             <a:avLst/>
@@ -4393,34 +4233,98 @@
           <a:ln/>
         </p:spPr>
         <p:txBody>
-          <a:bodyPr wrap="square" lIns="0" tIns="0" rIns="0" bIns="0" rtlCol="0" anchor="ctr"/>
-          <a:lstStyle/>
-          <a:p>
-            <a:pPr indent="0" marL="0">
-              <a:buNone/>
-            </a:pPr>
-            <a:r>
-              <a:rPr lang="en-US" sz="2200" b="1" dirty="0">
+          <a:bodyPr wrap="square" lIns="0" tIns="0" rIns="0" bIns="0" rtlCol="0" anchor="t"/>
+          <a:lstStyle/>
+          <a:p>
+            <a:pPr indent="0" marL="0">
+              <a:spcAft>
+                <a:spcPts val="200"/>
+              </a:spcAft>
+              <a:buNone/>
+            </a:pPr>
+            <a:r>
+              <a:rPr lang="en-US" sz="1700" b="1" dirty="0">
                 <a:solidFill>
                   <a:schemeClr val="tx1"/>
                 </a:solidFill>
               </a:rPr>
-              <a:t>Home</a:t>
-            </a:r>
-            <a:endParaRPr lang="en-US" sz="2200" dirty="0"/>
-          </a:p>
-        </p:txBody>
-      </p:sp>
-      <p:sp>
-        <p:nvSpPr>
-          <p:cNvPr id="22017" name="Text 12"/>
+              <a:t>Physical stages and finals</a:t>
+            </a:r>
+            <a:endParaRPr lang="en-US" sz="1700" dirty="0"/>
+          </a:p>
+          <a:p>
+            <a:pPr indent="0" marL="0">
+              <a:spcAft>
+                <a:spcPts val="200"/>
+              </a:spcAft>
+              <a:buNone/>
+            </a:pPr>
+            <a:r>
+              <a:rPr lang="en-US" sz="1400" dirty="0">
+                <a:solidFill>
+                  <a:schemeClr val="accent4"/>
+                </a:solidFill>
+              </a:rPr>
+              <a:t>Visible stages of multis, mysteries, Wherigos and letterboxes, read from the cache page</a:t>
+            </a:r>
+            <a:endParaRPr lang="en-US" sz="1700" dirty="0"/>
+          </a:p>
+        </p:txBody>
+      </p:sp>
+      <p:sp>
+        <p:nvSpPr>
+          <p:cNvPr id="22012" name="Ikon ring sirkel"/>
+          <p:cNvSpPr/>
+          <p:nvPr/>
+        </p:nvSpPr>
+        <p:spPr>
+          <a:xfrm>
+            <a:off x="548640" y="4928616"/>
+            <a:ext cx="512064" cy="512064"/>
+          </a:xfrm>
+          <a:prstGeom prst="ellipse">
+            <a:avLst/>
+          </a:prstGeom>
+          <a:solidFill>
+            <a:schemeClr val="accent1"/>
+          </a:solidFill>
+          <a:ln/>
+        </p:spPr>
+      </p:sp>
+      <p:pic>
+        <p:nvPicPr>
+          <p:cNvPr id="22013" name="Ikon ring" descr="ring">    </p:cNvPr>
+          <p:cNvPicPr>
+            <a:picLocks noChangeAspect="1"/>
+          </p:cNvPicPr>
+          <p:nvPr/>
+        </p:nvPicPr>
+        <p:blipFill>
+          <a:blip r:embed="rId4"/>
+          <a:stretch>
+            <a:fillRect/>
+          </a:stretch>
+        </p:blipFill>
+        <p:spPr>
+          <a:xfrm>
+            <a:off x="661294" y="5041270"/>
+            <a:ext cx="286756" cy="286756"/>
+          </a:xfrm>
+          <a:prstGeom prst="rect">
+            <a:avLst/>
+          </a:prstGeom>
+        </p:spPr>
+      </p:pic>
+      <p:sp>
+        <p:nvSpPr>
+          <p:cNvPr id="22014" name="Text 8"/>
           <p:cNvSpPr txBox="1"/>
           <p:nvPr/>
         </p:nvSpPr>
         <p:spPr>
           <a:xfrm>
-            <a:off x="8524037" y="3611880"/>
-            <a:ext cx="2753258" cy="1828800"/>
+            <a:off x="1261872" y="4855464"/>
+            <a:ext cx="6053328" cy="1097280"/>
           </a:xfrm>
           <a:prstGeom prst="rect">
             <a:avLst/>
@@ -4432,58 +4336,120 @@
           <a:bodyPr wrap="square" lIns="0" tIns="0" rIns="0" bIns="0" rtlCol="0" anchor="t"/>
           <a:lstStyle/>
           <a:p>
-            <a:pPr marL="228600" indent="-228600">
+            <a:pPr indent="0" marL="0">
               <a:spcAft>
-                <a:spcPts val="800"/>
+                <a:spcPts val="200"/>
               </a:spcAft>
-              <a:buSzPct val="100000"/>
-              <a:buChar char="•"/>
-            </a:pPr>
-            <a:r>
-              <a:rPr lang="en-US" sz="1700" dirty="0">
+              <a:buNone/>
+            </a:pPr>
+            <a:r>
+              <a:rPr lang="en-US" sz="1700" b="1" dirty="0">
                 <a:solidFill>
                   <a:schemeClr val="tx1"/>
                 </a:solidFill>
               </a:rPr>
-              <a:t>One click takes you home</a:t>
+              <a:t>Single circle</a:t>
             </a:r>
             <a:endParaRPr lang="en-US" sz="1700" dirty="0"/>
           </a:p>
           <a:p>
-            <a:pPr marL="228600" indent="-228600">
+            <a:pPr indent="0" marL="0">
               <a:spcAft>
-                <a:spcPts val="800"/>
+                <a:spcPts val="200"/>
               </a:spcAft>
-              <a:buSzPct val="100000"/>
-              <a:buChar char="•"/>
-            </a:pPr>
-            <a:r>
-              <a:rPr lang="en-US" sz="1700" dirty="0">
-                <a:solidFill>
-                  <a:schemeClr val="tx1"/>
-                </a:solidFill>
-              </a:rPr>
-              <a:t>The first time you look up the address</a:t>
+              <a:buNone/>
+            </a:pPr>
+            <a:r>
+              <a:rPr lang="en-US" sz="1400" dirty="0">
+                <a:solidFill>
+                  <a:schemeClr val="accent4"/>
+                </a:solidFill>
+              </a:rPr>
+              <a:t>Right-click anywhere and choose 161 m circle</a:t>
             </a:r>
             <a:endParaRPr lang="en-US" sz="1700" dirty="0"/>
           </a:p>
-          <a:p>
-            <a:pPr marL="228600" indent="-228600">
-              <a:spcAft>
-                <a:spcPts val="800"/>
-              </a:spcAft>
-              <a:buSzPct val="100000"/>
-              <a:buChar char="•"/>
-            </a:pPr>
-            <a:r>
-              <a:rPr lang="en-US" sz="1700" dirty="0">
-                <a:solidFill>
-                  <a:schemeClr val="tx1"/>
-                </a:solidFill>
-              </a:rPr>
-              <a:t>Stored only in your browser</a:t>
-            </a:r>
-            <a:endParaRPr lang="en-US" sz="1700" dirty="0"/>
+        </p:txBody>
+      </p:sp>
+      <p:sp>
+        <p:nvSpPr>
+          <p:cNvPr id="22015" name="Merke ved en løst cache bakgrunn"/>
+          <p:cNvSpPr/>
+          <p:nvPr/>
+        </p:nvSpPr>
+        <p:spPr>
+          <a:xfrm>
+            <a:off x="7802575" y="1463040"/>
+            <a:ext cx="3840480" cy="2834640"/>
+          </a:xfrm>
+          <a:prstGeom prst="roundRect">
+            <a:avLst>
+              <a:gd name="adj" fmla="val 3871"/>
+            </a:avLst>
+          </a:prstGeom>
+          <a:solidFill>
+            <a:schemeClr val="bg2"/>
+          </a:solidFill>
+          <a:ln/>
+        </p:spPr>
+      </p:sp>
+      <p:pic>
+        <p:nvPicPr>
+          <p:cNvPr id="22016" name="Merke ved en løst cache" descr="Mark at a solved cache">    </p:cNvPr>
+          <p:cNvPicPr>
+            <a:picLocks noChangeAspect="1"/>
+          </p:cNvPicPr>
+          <p:nvPr/>
+        </p:nvPicPr>
+        <p:blipFill>
+          <a:blip r:embed="rId5"/>
+          <a:stretch>
+            <a:fillRect/>
+          </a:stretch>
+        </p:blipFill>
+        <p:spPr>
+          <a:xfrm>
+            <a:off x="8058607" y="1664208"/>
+            <a:ext cx="3328416" cy="2432304"/>
+          </a:xfrm>
+          <a:prstGeom prst="rect">
+            <a:avLst/>
+          </a:prstGeom>
+        </p:spPr>
+      </p:pic>
+      <p:sp>
+        <p:nvSpPr>
+          <p:cNvPr id="22017" name="Text 10"/>
+          <p:cNvSpPr txBox="1"/>
+          <p:nvPr/>
+        </p:nvSpPr>
+        <p:spPr>
+          <a:xfrm>
+            <a:off x="7802575" y="4526280"/>
+            <a:ext cx="3840480" cy="1280160"/>
+          </a:xfrm>
+          <a:prstGeom prst="rect">
+            <a:avLst/>
+          </a:prstGeom>
+          <a:noFill/>
+          <a:ln/>
+        </p:spPr>
+        <p:txBody>
+          <a:bodyPr wrap="square" lIns="0" tIns="0" rIns="0" bIns="0" rtlCol="0" anchor="t"/>
+          <a:lstStyle/>
+          <a:p>
+            <a:pPr indent="0" marL="0">
+              <a:buNone/>
+            </a:pPr>
+            <a:r>
+              <a:rPr lang="en-US" sz="1500" dirty="0">
+                <a:solidFill>
+                  <a:schemeClr val="accent4"/>
+                </a:solidFill>
+              </a:rPr>
+              <a:t>Where no cache icon shows the spot, a clickable mark sits in the middle of the circle. Hovering over a solved cache shows “Final location”; right-click gives the exact coordinates.</a:t>
+            </a:r>
+            <a:endParaRPr lang="en-US" sz="1500" dirty="0"/>
           </a:p>
         </p:txBody>
       </p:sp>
@@ -4589,7 +4555,7 @@
                   <a:schemeClr val="tx2"/>
                 </a:solidFill>
               </a:rPr>
-              <a:t>How the map layers are stacked</a:t>
+              <a:t>161 m circles, cache pages and home</a:t>
             </a:r>
             <a:endParaRPr lang="en-US" sz="3600" dirty="0"/>
           </a:p>
@@ -4597,54 +4563,18 @@
       </p:sp>
       <p:sp>
         <p:nvSpPr>
-          <p:cNvPr id="23003" name="Text 1"/>
-          <p:cNvSpPr txBox="1"/>
-          <p:nvPr/>
-        </p:nvSpPr>
-        <p:spPr>
-          <a:xfrm>
-            <a:off x="548640" y="1207008"/>
-            <a:ext cx="11094415" cy="274320"/>
-          </a:xfrm>
-          <a:prstGeom prst="rect">
-            <a:avLst/>
-          </a:prstGeom>
-          <a:noFill/>
-          <a:ln/>
-        </p:spPr>
-        <p:txBody>
-          <a:bodyPr wrap="square" lIns="0" tIns="0" rIns="0" bIns="0" rtlCol="0" anchor="ctr"/>
-          <a:lstStyle/>
-          <a:p>
-            <a:pPr indent="0" marL="0">
-              <a:buNone/>
-            </a:pPr>
-            <a:r>
-              <a:rPr lang="en-US" sz="1100" b="1" spc="100" kern="0" dirty="0">
-                <a:solidFill>
-                  <a:schemeClr val="accent4"/>
-                </a:solidFill>
-              </a:rPr>
-              <a:t>ABOVE THE MAP TILES</a:t>
-            </a:r>
-            <a:endParaRPr lang="en-US" sz="1100" dirty="0"/>
-          </a:p>
-        </p:txBody>
-      </p:sp>
-      <p:sp>
-        <p:nvSpPr>
-          <p:cNvPr id="23004" name="Lag Kontroller"/>
+          <p:cNvPr id="23003" name="Kort 161 m-sirkler"/>
           <p:cNvSpPr/>
           <p:nvPr/>
         </p:nvSpPr>
         <p:spPr>
           <a:xfrm>
-            <a:off x="548640" y="1517904"/>
-            <a:ext cx="11094415" cy="384048"/>
+            <a:off x="548640" y="1508760"/>
+            <a:ext cx="3484778" cy="4206240"/>
           </a:xfrm>
           <a:prstGeom prst="roundRect">
             <a:avLst>
-              <a:gd name="adj" fmla="val 16667"/>
+              <a:gd name="adj" fmla="val 3149"/>
             </a:avLst>
           </a:prstGeom>
           <a:solidFill>
@@ -4655,14 +4585,58 @@
       </p:sp>
       <p:sp>
         <p:nvSpPr>
-          <p:cNvPr id="23005" name="Text 3"/>
+          <p:cNvPr id="23004" name="Ikon circles sirkel"/>
+          <p:cNvSpPr/>
+          <p:nvPr/>
+        </p:nvSpPr>
+        <p:spPr>
+          <a:xfrm>
+            <a:off x="914400" y="1920240"/>
+            <a:ext cx="822960" cy="822960"/>
+          </a:xfrm>
+          <a:prstGeom prst="ellipse">
+            <a:avLst/>
+          </a:prstGeom>
+          <a:solidFill>
+            <a:schemeClr val="accent1"/>
+          </a:solidFill>
+          <a:ln/>
+        </p:spPr>
+      </p:sp>
+      <p:pic>
+        <p:nvPicPr>
+          <p:cNvPr id="23005" name="Ikon circles" descr="circles">    </p:cNvPr>
+          <p:cNvPicPr>
+            <a:picLocks noChangeAspect="1"/>
+          </p:cNvPicPr>
+          <p:nvPr/>
+        </p:nvPicPr>
+        <p:blipFill>
+          <a:blip r:embed="rId1"/>
+          <a:stretch>
+            <a:fillRect/>
+          </a:stretch>
+        </p:blipFill>
+        <p:spPr>
+          <a:xfrm>
+            <a:off x="1095451" y="2101291"/>
+            <a:ext cx="460858" cy="460858"/>
+          </a:xfrm>
+          <a:prstGeom prst="rect">
+            <a:avLst/>
+          </a:prstGeom>
+        </p:spPr>
+      </p:pic>
+      <p:sp>
+        <p:nvSpPr>
+          <p:cNvPr id="23006" name="Text 3"/>
           <p:cNvSpPr txBox="1"/>
           <p:nvPr/>
         </p:nvSpPr>
         <p:spPr>
           <a:xfrm>
-            <a:off x="749808" y="1517904"/>
-            <a:ext cx="2240280" cy="384048"/>
+            <a:off x="914400" y="2971800"/>
+            <a:ext cx="2753258" cy="502920"/>
           </a:xfrm>
           <a:prstGeom prst="rect">
             <a:avLst/>
@@ -4678,27 +4652,27 @@
               <a:buNone/>
             </a:pPr>
             <a:r>
-              <a:rPr lang="en-US" sz="1400" b="1" dirty="0">
+              <a:rPr lang="en-US" sz="2200" b="1" dirty="0">
                 <a:solidFill>
                   <a:schemeClr val="tx1"/>
                 </a:solidFill>
               </a:rPr>
-              <a:t>Controls</a:t>
-            </a:r>
-            <a:endParaRPr lang="en-US" sz="1400" dirty="0"/>
-          </a:p>
-        </p:txBody>
-      </p:sp>
-      <p:sp>
-        <p:nvSpPr>
-          <p:cNvPr id="23006" name="Text 4"/>
+              <a:t>161 m circles</a:t>
+            </a:r>
+            <a:endParaRPr lang="en-US" sz="2200" dirty="0"/>
+          </a:p>
+        </p:txBody>
+      </p:sp>
+      <p:sp>
+        <p:nvSpPr>
+          <p:cNvPr id="23007" name="Text 4"/>
           <p:cNvSpPr txBox="1"/>
           <p:nvPr/>
         </p:nvSpPr>
         <p:spPr>
           <a:xfrm>
-            <a:off x="3264408" y="1517904"/>
-            <a:ext cx="1783080" cy="384048"/>
+            <a:off x="914400" y="3611880"/>
+            <a:ext cx="2753258" cy="1828800"/>
           </a:xfrm>
           <a:prstGeom prst="rect">
             <a:avLst/>
@@ -4707,77 +4681,96 @@
           <a:ln/>
         </p:spPr>
         <p:txBody>
-          <a:bodyPr wrap="square" lIns="0" tIns="0" rIns="0" bIns="0" rtlCol="0" anchor="ctr"/>
-          <a:lstStyle/>
-          <a:p>
-            <a:pPr indent="0" marL="0">
-              <a:buNone/>
-            </a:pPr>
-            <a:r>
-              <a:rPr lang="en-US" sz="1200" dirty="0">
+          <a:bodyPr wrap="square" lIns="0" tIns="0" rIns="0" bIns="0" rtlCol="0" anchor="t"/>
+          <a:lstStyle/>
+          <a:p>
+            <a:pPr marL="228600" indent="-228600">
+              <a:spcAft>
+                <a:spcPts val="800"/>
+              </a:spcAft>
+              <a:buSzPct val="100000"/>
+              <a:buChar char="•"/>
+            </a:pPr>
+            <a:r>
+              <a:rPr lang="en-US" sz="1700" dirty="0">
                 <a:solidFill>
                   <a:schemeClr val="tx1"/>
                 </a:solidFill>
-                <a:latin typeface="Courier New" pitchFamily="34" charset="0"/>
-                <a:ea typeface="Courier New" pitchFamily="34" charset="-122"/>
-                <a:cs typeface="Courier New" pitchFamily="34" charset="-120"/>
-              </a:rPr>
-              <a:t>controls · 1000</a:t>
-            </a:r>
-            <a:endParaRPr lang="en-US" sz="1200" dirty="0"/>
-          </a:p>
-        </p:txBody>
-      </p:sp>
-      <p:sp>
-        <p:nvSpPr>
-          <p:cNvPr id="23007" name="Text 5"/>
-          <p:cNvSpPr txBox="1"/>
-          <p:nvPr/>
-        </p:nvSpPr>
-        <p:spPr>
-          <a:xfrm>
-            <a:off x="5138928" y="1517904"/>
-            <a:ext cx="6302959" cy="384048"/>
-          </a:xfrm>
-          <a:prstGeom prst="rect">
-            <a:avLst/>
-          </a:prstGeom>
-          <a:noFill/>
-          <a:ln/>
-        </p:spPr>
-        <p:txBody>
-          <a:bodyPr wrap="square" lIns="0" tIns="0" rIns="0" bIns="0" rtlCol="0" anchor="ctr"/>
-          <a:lstStyle/>
-          <a:p>
-            <a:pPr indent="0" marL="0">
-              <a:buNone/>
-            </a:pPr>
-            <a:r>
-              <a:rPr lang="en-US" sz="1300" dirty="0">
+              </a:rPr>
+              <a:t>Where something is placed – see the previous slide</a:t>
+            </a:r>
+            <a:endParaRPr lang="en-US" sz="1700" dirty="0"/>
+          </a:p>
+          <a:p>
+            <a:pPr marL="228600" indent="-228600">
+              <a:spcAft>
+                <a:spcPts val="800"/>
+              </a:spcAft>
+              <a:buSzPct val="100000"/>
+              <a:buChar char="•"/>
+            </a:pPr>
+            <a:r>
+              <a:rPr lang="en-US" sz="1700" dirty="0">
                 <a:solidFill>
                   <a:schemeClr val="tx1"/>
                 </a:solidFill>
               </a:rPr>
-              <a:t>the toolbar, the layer panel, the coordinate display and the credits</a:t>
-            </a:r>
-            <a:endParaRPr lang="en-US" sz="1300" dirty="0"/>
-          </a:p>
-        </p:txBody>
-      </p:sp>
-      <p:sp>
-        <p:nvSpPr>
-          <p:cNvPr id="23008" name="Lag Bobler"/>
+              <a:t>Shown from zoom level 15</a:t>
+            </a:r>
+            <a:endParaRPr lang="en-US" sz="1700" dirty="0"/>
+          </a:p>
+          <a:p>
+            <a:pPr marL="228600" indent="-228600">
+              <a:spcAft>
+                <a:spcPts val="800"/>
+              </a:spcAft>
+              <a:buSzPct val="100000"/>
+              <a:buChar char="•"/>
+            </a:pPr>
+            <a:r>
+              <a:rPr lang="en-US" sz="1700" dirty="0">
+                <a:solidFill>
+                  <a:schemeClr val="tx1"/>
+                </a:solidFill>
+              </a:rPr>
+              <a:t>Follow the map and never block clicks</a:t>
+            </a:r>
+            <a:endParaRPr lang="en-US" sz="1700" dirty="0"/>
+          </a:p>
+          <a:p>
+            <a:pPr marL="228600" indent="-228600">
+              <a:spcAft>
+                <a:spcPts val="800"/>
+              </a:spcAft>
+              <a:buSzPct val="100000"/>
+              <a:buChar char="•"/>
+            </a:pPr>
+            <a:r>
+              <a:rPr lang="en-US" sz="1700" dirty="0">
+                <a:solidFill>
+                  <a:schemeClr val="tx1"/>
+                </a:solidFill>
+              </a:rPr>
+              <a:t>Single circle: right-click</a:t>
+            </a:r>
+            <a:endParaRPr lang="en-US" sz="1700" dirty="0"/>
+          </a:p>
+        </p:txBody>
+      </p:sp>
+      <p:sp>
+        <p:nvSpPr>
+          <p:cNvPr id="23008" name="Kort Cachesider"/>
           <p:cNvSpPr/>
           <p:nvPr/>
         </p:nvSpPr>
         <p:spPr>
           <a:xfrm>
-            <a:off x="548640" y="1947672"/>
-            <a:ext cx="11094415" cy="384048"/>
+            <a:off x="4353458" y="1508760"/>
+            <a:ext cx="3484778" cy="4206240"/>
           </a:xfrm>
           <a:prstGeom prst="roundRect">
             <a:avLst>
-              <a:gd name="adj" fmla="val 16667"/>
+              <a:gd name="adj" fmla="val 3149"/>
             </a:avLst>
           </a:prstGeom>
           <a:solidFill>
@@ -4788,14 +4781,58 @@
       </p:sp>
       <p:sp>
         <p:nvSpPr>
-          <p:cNvPr id="23009" name="Text 7"/>
+          <p:cNvPr id="23009" name="Ikon layers sirkel"/>
+          <p:cNvSpPr/>
+          <p:nvPr/>
+        </p:nvSpPr>
+        <p:spPr>
+          <a:xfrm>
+            <a:off x="4719218" y="1920240"/>
+            <a:ext cx="822960" cy="822960"/>
+          </a:xfrm>
+          <a:prstGeom prst="ellipse">
+            <a:avLst/>
+          </a:prstGeom>
+          <a:solidFill>
+            <a:schemeClr val="accent1"/>
+          </a:solidFill>
+          <a:ln/>
+        </p:spPr>
+      </p:sp>
+      <p:pic>
+        <p:nvPicPr>
+          <p:cNvPr id="23010" name="Ikon layers" descr="layers">    </p:cNvPr>
+          <p:cNvPicPr>
+            <a:picLocks noChangeAspect="1"/>
+          </p:cNvPicPr>
+          <p:nvPr/>
+        </p:nvPicPr>
+        <p:blipFill>
+          <a:blip r:embed="rId2"/>
+          <a:stretch>
+            <a:fillRect/>
+          </a:stretch>
+        </p:blipFill>
+        <p:spPr>
+          <a:xfrm>
+            <a:off x="4900270" y="2101291"/>
+            <a:ext cx="460858" cy="460858"/>
+          </a:xfrm>
+          <a:prstGeom prst="rect">
+            <a:avLst/>
+          </a:prstGeom>
+        </p:spPr>
+      </p:pic>
+      <p:sp>
+        <p:nvSpPr>
+          <p:cNvPr id="23011" name="Text 7"/>
           <p:cNvSpPr txBox="1"/>
           <p:nvPr/>
         </p:nvSpPr>
         <p:spPr>
           <a:xfrm>
-            <a:off x="749808" y="1947672"/>
-            <a:ext cx="2240280" cy="384048"/>
+            <a:off x="4719218" y="2971800"/>
+            <a:ext cx="2753258" cy="502920"/>
           </a:xfrm>
           <a:prstGeom prst="rect">
             <a:avLst/>
@@ -4811,27 +4848,27 @@
               <a:buNone/>
             </a:pPr>
             <a:r>
-              <a:rPr lang="en-US" sz="1400" b="1" dirty="0">
+              <a:rPr lang="en-US" sz="2200" b="1" dirty="0">
                 <a:solidFill>
                   <a:schemeClr val="tx1"/>
                 </a:solidFill>
               </a:rPr>
-              <a:t>Popups</a:t>
-            </a:r>
-            <a:endParaRPr lang="en-US" sz="1400" dirty="0"/>
-          </a:p>
-        </p:txBody>
-      </p:sp>
-      <p:sp>
-        <p:nvSpPr>
-          <p:cNvPr id="23010" name="Text 8"/>
+              <a:t>Cache pages</a:t>
+            </a:r>
+            <a:endParaRPr lang="en-US" sz="2200" dirty="0"/>
+          </a:p>
+        </p:txBody>
+      </p:sp>
+      <p:sp>
+        <p:nvSpPr>
+          <p:cNvPr id="23012" name="Text 8"/>
           <p:cNvSpPr txBox="1"/>
           <p:nvPr/>
         </p:nvSpPr>
         <p:spPr>
           <a:xfrm>
-            <a:off x="3264408" y="1947672"/>
-            <a:ext cx="1783080" cy="384048"/>
+            <a:off x="4719218" y="3611880"/>
+            <a:ext cx="2753258" cy="1828800"/>
           </a:xfrm>
           <a:prstGeom prst="rect">
             <a:avLst/>
@@ -4840,77 +4877,96 @@
           <a:ln/>
         </p:spPr>
         <p:txBody>
-          <a:bodyPr wrap="square" lIns="0" tIns="0" rIns="0" bIns="0" rtlCol="0" anchor="ctr"/>
-          <a:lstStyle/>
-          <a:p>
-            <a:pPr indent="0" marL="0">
-              <a:buNone/>
-            </a:pPr>
-            <a:r>
-              <a:rPr lang="en-US" sz="1200" dirty="0">
+          <a:bodyPr wrap="square" lIns="0" tIns="0" rIns="0" bIns="0" rtlCol="0" anchor="t"/>
+          <a:lstStyle/>
+          <a:p>
+            <a:pPr marL="228600" indent="-228600">
+              <a:spcAft>
+                <a:spcPts val="800"/>
+              </a:spcAft>
+              <a:buSzPct val="100000"/>
+              <a:buChar char="•"/>
+            </a:pPr>
+            <a:r>
+              <a:rPr lang="en-US" sz="1700" dirty="0">
                 <a:solidFill>
                   <a:schemeClr val="tx1"/>
                 </a:solidFill>
-                <a:latin typeface="Courier New" pitchFamily="34" charset="0"/>
-                <a:ea typeface="Courier New" pitchFamily="34" charset="-122"/>
-                <a:cs typeface="Courier New" pitchFamily="34" charset="-120"/>
-              </a:rPr>
-              <a:t>popupPane · 700</a:t>
-            </a:r>
-            <a:endParaRPr lang="en-US" sz="1200" dirty="0"/>
-          </a:p>
-        </p:txBody>
-      </p:sp>
-      <p:sp>
-        <p:nvSpPr>
-          <p:cNvPr id="23011" name="Text 9"/>
-          <p:cNvSpPr txBox="1"/>
-          <p:nvPr/>
-        </p:nvSpPr>
-        <p:spPr>
-          <a:xfrm>
-            <a:off x="5138928" y="1947672"/>
-            <a:ext cx="6302959" cy="384048"/>
-          </a:xfrm>
-          <a:prstGeom prst="rect">
-            <a:avLst/>
-          </a:prstGeom>
-          <a:noFill/>
-          <a:ln/>
-        </p:spPr>
-        <p:txBody>
-          <a:bodyPr wrap="square" lIns="0" tIns="0" rIns="0" bIns="0" rtlCol="0" anchor="ctr"/>
-          <a:lstStyle/>
-          <a:p>
-            <a:pPr indent="0" marL="0">
-              <a:buNone/>
-            </a:pPr>
-            <a:r>
-              <a:rPr lang="en-US" sz="1300" dirty="0">
+              </a:rPr>
+              <a:t>The small map shows your chosen map</a:t>
+            </a:r>
+            <a:endParaRPr lang="en-US" sz="1700" dirty="0"/>
+          </a:p>
+          <a:p>
+            <a:pPr marL="228600" indent="-228600">
+              <a:spcAft>
+                <a:spcPts val="800"/>
+              </a:spcAft>
+              <a:buSzPct val="100000"/>
+              <a:buChar char="•"/>
+            </a:pPr>
+            <a:r>
+              <a:rPr lang="en-US" sz="1700" dirty="0">
                 <a:solidFill>
                   <a:schemeClr val="tx1"/>
                 </a:solidFill>
               </a:rPr>
-              <a:t>the right-click popup and other map popups</a:t>
-            </a:r>
-            <a:endParaRPr lang="en-US" sz="1300" dirty="0"/>
-          </a:p>
-        </p:txBody>
-      </p:sp>
-      <p:sp>
-        <p:nvSpPr>
-          <p:cNvPr id="23012" name="Lag Markører"/>
+              <a:t>Same fading and overlays</a:t>
+            </a:r>
+            <a:endParaRPr lang="en-US" sz="1700" dirty="0"/>
+          </a:p>
+          <a:p>
+            <a:pPr marL="228600" indent="-228600">
+              <a:spcAft>
+                <a:spcPts val="800"/>
+              </a:spcAft>
+              <a:buSzPct val="100000"/>
+              <a:buChar char="•"/>
+            </a:pPr>
+            <a:r>
+              <a:rPr lang="en-US" sz="1700" dirty="0">
+                <a:solidFill>
+                  <a:schemeClr val="tx1"/>
+                </a:solidFill>
+              </a:rPr>
+              <a:t>Keeps the site's view</a:t>
+            </a:r>
+            <a:endParaRPr lang="en-US" sz="1700" dirty="0"/>
+          </a:p>
+          <a:p>
+            <a:pPr marL="228600" indent="-228600">
+              <a:spcAft>
+                <a:spcPts val="800"/>
+              </a:spcAft>
+              <a:buSzPct val="100000"/>
+              <a:buChar char="•"/>
+            </a:pPr>
+            <a:r>
+              <a:rPr lang="en-US" sz="1700" dirty="0">
+                <a:solidFill>
+                  <a:schemeClr val="tx1"/>
+                </a:solidFill>
+              </a:rPr>
+              <a:t>Never changes your choice</a:t>
+            </a:r>
+            <a:endParaRPr lang="en-US" sz="1700" dirty="0"/>
+          </a:p>
+        </p:txBody>
+      </p:sp>
+      <p:sp>
+        <p:nvSpPr>
+          <p:cNvPr id="23013" name="Kort Hjem"/>
           <p:cNvSpPr/>
           <p:nvPr/>
         </p:nvSpPr>
         <p:spPr>
           <a:xfrm>
-            <a:off x="548640" y="2377440"/>
-            <a:ext cx="11094415" cy="384048"/>
+            <a:off x="8158277" y="1508760"/>
+            <a:ext cx="3484778" cy="4206240"/>
           </a:xfrm>
           <a:prstGeom prst="roundRect">
             <a:avLst>
-              <a:gd name="adj" fmla="val 16667"/>
+              <a:gd name="adj" fmla="val 3149"/>
             </a:avLst>
           </a:prstGeom>
           <a:solidFill>
@@ -4921,565 +4977,17 @@
       </p:sp>
       <p:sp>
         <p:nvSpPr>
-          <p:cNvPr id="23013" name="Text 11"/>
-          <p:cNvSpPr txBox="1"/>
-          <p:nvPr/>
-        </p:nvSpPr>
-        <p:spPr>
-          <a:xfrm>
-            <a:off x="749808" y="2377440"/>
-            <a:ext cx="2240280" cy="384048"/>
-          </a:xfrm>
-          <a:prstGeom prst="rect">
-            <a:avLst/>
-          </a:prstGeom>
-          <a:noFill/>
-          <a:ln/>
-        </p:spPr>
-        <p:txBody>
-          <a:bodyPr wrap="square" lIns="0" tIns="0" rIns="0" bIns="0" rtlCol="0" anchor="ctr"/>
-          <a:lstStyle/>
-          <a:p>
-            <a:pPr indent="0" marL="0">
-              <a:buNone/>
-            </a:pPr>
-            <a:r>
-              <a:rPr lang="en-US" sz="1400" b="1" dirty="0">
-                <a:solidFill>
-                  <a:schemeClr val="tx1"/>
-                </a:solidFill>
-              </a:rPr>
-              <a:t>Markers</a:t>
-            </a:r>
-            <a:endParaRPr lang="en-US" sz="1400" dirty="0"/>
-          </a:p>
-        </p:txBody>
-      </p:sp>
-      <p:sp>
-        <p:nvSpPr>
-          <p:cNvPr id="23014" name="Text 12"/>
-          <p:cNvSpPr txBox="1"/>
-          <p:nvPr/>
-        </p:nvSpPr>
-        <p:spPr>
-          <a:xfrm>
-            <a:off x="3264408" y="2377440"/>
-            <a:ext cx="1783080" cy="384048"/>
-          </a:xfrm>
-          <a:prstGeom prst="rect">
-            <a:avLst/>
-          </a:prstGeom>
-          <a:noFill/>
-          <a:ln/>
-        </p:spPr>
-        <p:txBody>
-          <a:bodyPr wrap="square" lIns="0" tIns="0" rIns="0" bIns="0" rtlCol="0" anchor="ctr"/>
-          <a:lstStyle/>
-          <a:p>
-            <a:pPr indent="0" marL="0">
-              <a:buNone/>
-            </a:pPr>
-            <a:r>
-              <a:rPr lang="en-US" sz="1200" dirty="0">
-                <a:solidFill>
-                  <a:schemeClr val="tx1"/>
-                </a:solidFill>
-                <a:latin typeface="Courier New" pitchFamily="34" charset="0"/>
-                <a:ea typeface="Courier New" pitchFamily="34" charset="-122"/>
-                <a:cs typeface="Courier New" pitchFamily="34" charset="-120"/>
-              </a:rPr>
-              <a:t>markerPane · 600</a:t>
-            </a:r>
-            <a:endParaRPr lang="en-US" sz="1200" dirty="0"/>
-          </a:p>
-        </p:txBody>
-      </p:sp>
-      <p:sp>
-        <p:nvSpPr>
-          <p:cNvPr id="23015" name="Text 13"/>
-          <p:cNvSpPr txBox="1"/>
-          <p:nvPr/>
-        </p:nvSpPr>
-        <p:spPr>
-          <a:xfrm>
-            <a:off x="5138928" y="2377440"/>
-            <a:ext cx="6302959" cy="384048"/>
-          </a:xfrm>
-          <a:prstGeom prst="rect">
-            <a:avLst/>
-          </a:prstGeom>
-          <a:noFill/>
-          <a:ln/>
-        </p:spPr>
-        <p:txBody>
-          <a:bodyPr wrap="square" lIns="0" tIns="0" rIns="0" bIns="0" rtlCol="0" anchor="ctr"/>
-          <a:lstStyle/>
-          <a:p>
-            <a:pPr indent="0" marL="0">
-              <a:buNone/>
-            </a:pPr>
-            <a:r>
-              <a:rPr lang="en-US" sz="1300" dirty="0">
-                <a:solidFill>
-                  <a:schemeClr val="tx1"/>
-                </a:solidFill>
-              </a:rPr>
-              <a:t>the cache icons on /play/map, pins, labels and your location</a:t>
-            </a:r>
-            <a:endParaRPr lang="en-US" sz="1300" dirty="0"/>
-          </a:p>
-        </p:txBody>
-      </p:sp>
-      <p:sp>
-        <p:nvSpPr>
-          <p:cNvPr id="23016" name="Lag Tegninger"/>
+          <p:cNvPr id="23014" name="Ikon home sirkel"/>
           <p:cNvSpPr/>
           <p:nvPr/>
         </p:nvSpPr>
         <p:spPr>
           <a:xfrm>
-            <a:off x="548640" y="2807208"/>
-            <a:ext cx="11094415" cy="384048"/>
-          </a:xfrm>
-          <a:prstGeom prst="roundRect">
-            <a:avLst>
-              <a:gd name="adj" fmla="val 16667"/>
-            </a:avLst>
-          </a:prstGeom>
-          <a:solidFill>
-            <a:schemeClr val="bg2"/>
-          </a:solidFill>
-          <a:ln/>
-        </p:spPr>
-      </p:sp>
-      <p:sp>
-        <p:nvSpPr>
-          <p:cNvPr id="23017" name="Text 15"/>
-          <p:cNvSpPr txBox="1"/>
-          <p:nvPr/>
-        </p:nvSpPr>
-        <p:spPr>
-          <a:xfrm>
-            <a:off x="749808" y="2807208"/>
-            <a:ext cx="2240280" cy="384048"/>
-          </a:xfrm>
-          <a:prstGeom prst="rect">
-            <a:avLst/>
-          </a:prstGeom>
-          <a:noFill/>
-          <a:ln/>
-        </p:spPr>
-        <p:txBody>
-          <a:bodyPr wrap="square" lIns="0" tIns="0" rIns="0" bIns="0" rtlCol="0" anchor="ctr"/>
-          <a:lstStyle/>
-          <a:p>
-            <a:pPr indent="0" marL="0">
-              <a:buNone/>
-            </a:pPr>
-            <a:r>
-              <a:rPr lang="en-US" sz="1400" b="1" dirty="0">
-                <a:solidFill>
-                  <a:schemeClr val="tx1"/>
-                </a:solidFill>
-              </a:rPr>
-              <a:t>Drawings</a:t>
-            </a:r>
-            <a:endParaRPr lang="en-US" sz="1400" dirty="0"/>
-          </a:p>
-        </p:txBody>
-      </p:sp>
-      <p:sp>
-        <p:nvSpPr>
-          <p:cNvPr id="23018" name="Text 16"/>
-          <p:cNvSpPr txBox="1"/>
-          <p:nvPr/>
-        </p:nvSpPr>
-        <p:spPr>
-          <a:xfrm>
-            <a:off x="3264408" y="2807208"/>
-            <a:ext cx="1783080" cy="384048"/>
-          </a:xfrm>
-          <a:prstGeom prst="rect">
-            <a:avLst/>
-          </a:prstGeom>
-          <a:noFill/>
-          <a:ln/>
-        </p:spPr>
-        <p:txBody>
-          <a:bodyPr wrap="square" lIns="0" tIns="0" rIns="0" bIns="0" rtlCol="0" anchor="ctr"/>
-          <a:lstStyle/>
-          <a:p>
-            <a:pPr indent="0" marL="0">
-              <a:buNone/>
-            </a:pPr>
-            <a:r>
-              <a:rPr lang="en-US" sz="1200" dirty="0">
-                <a:solidFill>
-                  <a:schemeClr val="tx1"/>
-                </a:solidFill>
-                <a:latin typeface="Courier New" pitchFamily="34" charset="0"/>
-                <a:ea typeface="Courier New" pitchFamily="34" charset="-122"/>
-                <a:cs typeface="Courier New" pitchFamily="34" charset="-120"/>
-              </a:rPr>
-              <a:t>overlayPane · 400</a:t>
-            </a:r>
-            <a:endParaRPr lang="en-US" sz="1200" dirty="0"/>
-          </a:p>
-        </p:txBody>
-      </p:sp>
-      <p:sp>
-        <p:nvSpPr>
-          <p:cNvPr id="23019" name="Text 17"/>
-          <p:cNvSpPr txBox="1"/>
-          <p:nvPr/>
-        </p:nvSpPr>
-        <p:spPr>
-          <a:xfrm>
-            <a:off x="5138928" y="2807208"/>
-            <a:ext cx="6302959" cy="384048"/>
-          </a:xfrm>
-          <a:prstGeom prst="rect">
-            <a:avLst/>
-          </a:prstGeom>
-          <a:noFill/>
-          <a:ln/>
-        </p:spPr>
-        <p:txBody>
-          <a:bodyPr wrap="square" lIns="0" tIns="0" rIns="0" bIns="0" rtlCol="0" anchor="ctr"/>
-          <a:lstStyle/>
-          <a:p>
-            <a:pPr indent="0" marL="0">
-              <a:buNone/>
-            </a:pPr>
-            <a:r>
-              <a:rPr lang="en-US" sz="1300" dirty="0">
-                <a:solidFill>
-                  <a:schemeClr val="tx1"/>
-                </a:solidFill>
-              </a:rPr>
-              <a:t>161 m circles, measuring lines, projection lines and the accuracy circle</a:t>
-            </a:r>
-            <a:endParaRPr lang="en-US" sz="1300" dirty="0"/>
-          </a:p>
-        </p:txBody>
-      </p:sp>
-      <p:sp>
-        <p:nvSpPr>
-          <p:cNvPr id="23020" name="Text 18"/>
-          <p:cNvSpPr txBox="1"/>
-          <p:nvPr/>
-        </p:nvSpPr>
-        <p:spPr>
-          <a:xfrm>
-            <a:off x="548640" y="3328416"/>
-            <a:ext cx="11094415" cy="274320"/>
-          </a:xfrm>
-          <a:prstGeom prst="rect">
-            <a:avLst/>
-          </a:prstGeom>
-          <a:noFill/>
-          <a:ln/>
-        </p:spPr>
-        <p:txBody>
-          <a:bodyPr wrap="square" lIns="0" tIns="0" rIns="0" bIns="0" rtlCol="0" anchor="ctr"/>
-          <a:lstStyle/>
-          <a:p>
-            <a:pPr indent="0" marL="0">
-              <a:buNone/>
-            </a:pPr>
-            <a:r>
-              <a:rPr lang="en-US" sz="1100" b="1" spc="100" kern="0" dirty="0">
-                <a:solidFill>
-                  <a:schemeClr val="accent4"/>
-                </a:solidFill>
-              </a:rPr>
-              <a:t>THE MAP TILES (TILEPANE · 200) – SORTED BY Z-INDEX</a:t>
-            </a:r>
-            <a:endParaRPr lang="en-US" sz="1100" dirty="0"/>
-          </a:p>
-        </p:txBody>
-      </p:sp>
-      <p:sp>
-        <p:nvSpPr>
-          <p:cNvPr id="23021" name="Lag Nettstedets øvrige fliser"/>
-          <p:cNvSpPr/>
-          <p:nvPr/>
-        </p:nvSpPr>
-        <p:spPr>
-          <a:xfrm>
-            <a:off x="548640" y="3639312"/>
-            <a:ext cx="11094415" cy="384048"/>
-          </a:xfrm>
-          <a:prstGeom prst="roundRect">
-            <a:avLst>
-              <a:gd name="adj" fmla="val 16667"/>
-            </a:avLst>
-          </a:prstGeom>
-          <a:solidFill>
-            <a:schemeClr val="accent2"/>
-          </a:solidFill>
-          <a:ln/>
-        </p:spPr>
-      </p:sp>
-      <p:sp>
-        <p:nvSpPr>
-          <p:cNvPr id="23022" name="Text 20"/>
-          <p:cNvSpPr txBox="1"/>
-          <p:nvPr/>
-        </p:nvSpPr>
-        <p:spPr>
-          <a:xfrm>
-            <a:off x="749808" y="3639312"/>
-            <a:ext cx="2240280" cy="384048"/>
-          </a:xfrm>
-          <a:prstGeom prst="rect">
-            <a:avLst/>
-          </a:prstGeom>
-          <a:noFill/>
-          <a:ln/>
-        </p:spPr>
-        <p:txBody>
-          <a:bodyPr wrap="square" lIns="0" tIns="0" rIns="0" bIns="0" rtlCol="0" anchor="ctr"/>
-          <a:lstStyle/>
-          <a:p>
-            <a:pPr indent="0" marL="0">
-              <a:buNone/>
-            </a:pPr>
-            <a:r>
-              <a:rPr lang="en-US" sz="1400" b="1" dirty="0">
-                <a:solidFill>
-                  <a:schemeClr val="bg1"/>
-                </a:solidFill>
-              </a:rPr>
-              <a:t>The site's other tiles</a:t>
-            </a:r>
-            <a:endParaRPr lang="en-US" sz="1400" dirty="0"/>
-          </a:p>
-        </p:txBody>
-      </p:sp>
-      <p:sp>
-        <p:nvSpPr>
-          <p:cNvPr id="23023" name="Text 21"/>
-          <p:cNvSpPr txBox="1"/>
-          <p:nvPr/>
-        </p:nvSpPr>
-        <p:spPr>
-          <a:xfrm>
-            <a:off x="3264408" y="3639312"/>
-            <a:ext cx="1783080" cy="384048"/>
-          </a:xfrm>
-          <a:prstGeom prst="rect">
-            <a:avLst/>
-          </a:prstGeom>
-          <a:noFill/>
-          <a:ln/>
-        </p:spPr>
-        <p:txBody>
-          <a:bodyPr wrap="square" lIns="0" tIns="0" rIns="0" bIns="0" rtlCol="0" anchor="ctr"/>
-          <a:lstStyle/>
-          <a:p>
-            <a:pPr indent="0" marL="0">
-              <a:buNone/>
-            </a:pPr>
-            <a:r>
-              <a:rPr lang="en-US" sz="1200" dirty="0">
-                <a:solidFill>
-                  <a:schemeClr val="bg1"/>
-                </a:solidFill>
-                <a:latin typeface="Courier New" pitchFamily="34" charset="0"/>
-                <a:ea typeface="Courier New" pitchFamily="34" charset="-122"/>
-                <a:cs typeface="Courier New" pitchFamily="34" charset="-120"/>
-              </a:rPr>
-              <a:t>z = bz + 10</a:t>
-            </a:r>
-            <a:endParaRPr lang="en-US" sz="1200" dirty="0"/>
-          </a:p>
-        </p:txBody>
-      </p:sp>
-      <p:sp>
-        <p:nvSpPr>
-          <p:cNvPr id="23024" name="Text 22"/>
-          <p:cNvSpPr txBox="1"/>
-          <p:nvPr/>
-        </p:nvSpPr>
-        <p:spPr>
-          <a:xfrm>
-            <a:off x="5138928" y="3639312"/>
-            <a:ext cx="6302959" cy="384048"/>
-          </a:xfrm>
-          <a:prstGeom prst="rect">
-            <a:avLst/>
-          </a:prstGeom>
-          <a:noFill/>
-          <a:ln/>
-        </p:spPr>
-        <p:txBody>
-          <a:bodyPr wrap="square" lIns="0" tIns="0" rIns="0" bIns="0" rtlCol="0" anchor="ctr"/>
-          <a:lstStyle/>
-          <a:p>
-            <a:pPr indent="0" marL="0">
-              <a:buNone/>
-            </a:pPr>
-            <a:r>
-              <a:rPr lang="en-US" sz="1300" dirty="0">
-                <a:solidFill>
-                  <a:schemeClr val="bg1"/>
-                </a:solidFill>
-              </a:rPr>
-              <a:t>the cache icons on /map – always lifted above your layers</a:t>
-            </a:r>
-            <a:endParaRPr lang="en-US" sz="1300" dirty="0"/>
-          </a:p>
-        </p:txBody>
-      </p:sp>
-      <p:sp>
-        <p:nvSpPr>
-          <p:cNvPr id="23025" name="Lag Forhåndsvisning"/>
-          <p:cNvSpPr/>
-          <p:nvPr/>
-        </p:nvSpPr>
-        <p:spPr>
-          <a:xfrm>
-            <a:off x="548640" y="4069080"/>
-            <a:ext cx="11094415" cy="384048"/>
-          </a:xfrm>
-          <a:prstGeom prst="roundRect">
-            <a:avLst>
-              <a:gd name="adj" fmla="val 16667"/>
-            </a:avLst>
-          </a:prstGeom>
-          <a:solidFill>
-            <a:schemeClr val="accent3"/>
-          </a:solidFill>
-          <a:ln/>
-        </p:spPr>
-      </p:sp>
-      <p:sp>
-        <p:nvSpPr>
-          <p:cNvPr id="23026" name="Text 24"/>
-          <p:cNvSpPr txBox="1"/>
-          <p:nvPr/>
-        </p:nvSpPr>
-        <p:spPr>
-          <a:xfrm>
-            <a:off x="749808" y="4069080"/>
-            <a:ext cx="2240280" cy="384048"/>
-          </a:xfrm>
-          <a:prstGeom prst="rect">
-            <a:avLst/>
-          </a:prstGeom>
-          <a:noFill/>
-          <a:ln/>
-        </p:spPr>
-        <p:txBody>
-          <a:bodyPr wrap="square" lIns="0" tIns="0" rIns="0" bIns="0" rtlCol="0" anchor="ctr"/>
-          <a:lstStyle/>
-          <a:p>
-            <a:pPr indent="0" marL="0">
-              <a:buNone/>
-            </a:pPr>
-            <a:r>
-              <a:rPr lang="en-US" sz="1400" b="1" dirty="0">
-                <a:solidFill>
-                  <a:schemeClr val="bg1"/>
-                </a:solidFill>
-              </a:rPr>
-              <a:t>Preview</a:t>
-            </a:r>
-            <a:endParaRPr lang="en-US" sz="1400" dirty="0"/>
-          </a:p>
-        </p:txBody>
-      </p:sp>
-      <p:sp>
-        <p:nvSpPr>
-          <p:cNvPr id="23027" name="Text 25"/>
-          <p:cNvSpPr txBox="1"/>
-          <p:nvPr/>
-        </p:nvSpPr>
-        <p:spPr>
-          <a:xfrm>
-            <a:off x="3264408" y="4069080"/>
-            <a:ext cx="1783080" cy="384048"/>
-          </a:xfrm>
-          <a:prstGeom prst="rect">
-            <a:avLst/>
-          </a:prstGeom>
-          <a:noFill/>
-          <a:ln/>
-        </p:spPr>
-        <p:txBody>
-          <a:bodyPr wrap="square" lIns="0" tIns="0" rIns="0" bIns="0" rtlCol="0" anchor="ctr"/>
-          <a:lstStyle/>
-          <a:p>
-            <a:pPr indent="0" marL="0">
-              <a:buNone/>
-            </a:pPr>
-            <a:r>
-              <a:rPr lang="en-US" sz="1200" dirty="0">
-                <a:solidFill>
-                  <a:schemeClr val="bg1"/>
-                </a:solidFill>
-                <a:latin typeface="Courier New" pitchFamily="34" charset="0"/>
-                <a:ea typeface="Courier New" pitchFamily="34" charset="-122"/>
-                <a:cs typeface="Courier New" pitchFamily="34" charset="-120"/>
-              </a:rPr>
-              <a:t>z = bz + 3</a:t>
-            </a:r>
-            <a:endParaRPr lang="en-US" sz="1200" dirty="0"/>
-          </a:p>
-        </p:txBody>
-      </p:sp>
-      <p:sp>
-        <p:nvSpPr>
-          <p:cNvPr id="23028" name="Text 26"/>
-          <p:cNvSpPr txBox="1"/>
-          <p:nvPr/>
-        </p:nvSpPr>
-        <p:spPr>
-          <a:xfrm>
-            <a:off x="5138928" y="4069080"/>
-            <a:ext cx="6302959" cy="384048"/>
-          </a:xfrm>
-          <a:prstGeom prst="rect">
-            <a:avLst/>
-          </a:prstGeom>
-          <a:noFill/>
-          <a:ln/>
-        </p:spPr>
-        <p:txBody>
-          <a:bodyPr wrap="square" lIns="0" tIns="0" rIns="0" bIns="0" rtlCol="0" anchor="ctr"/>
-          <a:lstStyle/>
-          <a:p>
-            <a:pPr indent="0" marL="0">
-              <a:buNone/>
-            </a:pPr>
-            <a:r>
-              <a:rPr lang="en-US" sz="1300" dirty="0">
-                <a:solidFill>
-                  <a:schemeClr val="bg1"/>
-                </a:solidFill>
-              </a:rPr>
-              <a:t>the layer you are trying in the layer editor</a:t>
-            </a:r>
-            <a:endParaRPr lang="en-US" sz="1300" dirty="0"/>
-          </a:p>
-        </p:txBody>
-      </p:sp>
-      <p:sp>
-        <p:nvSpPr>
-          <p:cNvPr id="23029" name="Lag Dine overlegg"/>
-          <p:cNvSpPr/>
-          <p:nvPr/>
-        </p:nvSpPr>
-        <p:spPr>
-          <a:xfrm>
-            <a:off x="548640" y="4498848"/>
-            <a:ext cx="11094415" cy="384048"/>
-          </a:xfrm>
-          <a:prstGeom prst="roundRect">
-            <a:avLst>
-              <a:gd name="adj" fmla="val 16667"/>
-            </a:avLst>
+            <a:off x="8524037" y="1920240"/>
+            <a:ext cx="822960" cy="822960"/>
+          </a:xfrm>
+          <a:prstGeom prst="ellipse">
+            <a:avLst/>
           </a:prstGeom>
           <a:solidFill>
             <a:schemeClr val="accent1"/>
@@ -5487,16 +4995,40 @@
           <a:ln/>
         </p:spPr>
       </p:sp>
-      <p:sp>
-        <p:nvSpPr>
-          <p:cNvPr id="23030" name="Text 28"/>
+      <p:pic>
+        <p:nvPicPr>
+          <p:cNvPr id="23015" name="Ikon home" descr="home">    </p:cNvPr>
+          <p:cNvPicPr>
+            <a:picLocks noChangeAspect="1"/>
+          </p:cNvPicPr>
+          <p:nvPr/>
+        </p:nvPicPr>
+        <p:blipFill>
+          <a:blip r:embed="rId3"/>
+          <a:stretch>
+            <a:fillRect/>
+          </a:stretch>
+        </p:blipFill>
+        <p:spPr>
+          <a:xfrm>
+            <a:off x="8705088" y="2101291"/>
+            <a:ext cx="460858" cy="460858"/>
+          </a:xfrm>
+          <a:prstGeom prst="rect">
+            <a:avLst/>
+          </a:prstGeom>
+        </p:spPr>
+      </p:pic>
+      <p:sp>
+        <p:nvSpPr>
+          <p:cNvPr id="23016" name="Text 11"/>
           <p:cNvSpPr txBox="1"/>
           <p:nvPr/>
         </p:nvSpPr>
         <p:spPr>
           <a:xfrm>
-            <a:off x="749808" y="4498848"/>
-            <a:ext cx="2240280" cy="384048"/>
+            <a:off x="8524037" y="2971800"/>
+            <a:ext cx="2753258" cy="502920"/>
           </a:xfrm>
           <a:prstGeom prst="rect">
             <a:avLst/>
@@ -5512,27 +5044,27 @@
               <a:buNone/>
             </a:pPr>
             <a:r>
-              <a:rPr lang="en-US" sz="1400" b="1" dirty="0">
-                <a:solidFill>
-                  <a:schemeClr val="bg1"/>
-                </a:solidFill>
-              </a:rPr>
-              <a:t>Your overlays</a:t>
-            </a:r>
-            <a:endParaRPr lang="en-US" sz="1400" dirty="0"/>
-          </a:p>
-        </p:txBody>
-      </p:sp>
-      <p:sp>
-        <p:nvSpPr>
-          <p:cNvPr id="23031" name="Text 29"/>
+              <a:rPr lang="en-US" sz="2200" b="1" dirty="0">
+                <a:solidFill>
+                  <a:schemeClr val="tx1"/>
+                </a:solidFill>
+              </a:rPr>
+              <a:t>Home</a:t>
+            </a:r>
+            <a:endParaRPr lang="en-US" sz="2200" dirty="0"/>
+          </a:p>
+        </p:txBody>
+      </p:sp>
+      <p:sp>
+        <p:nvSpPr>
+          <p:cNvPr id="23017" name="Text 12"/>
           <p:cNvSpPr txBox="1"/>
           <p:nvPr/>
         </p:nvSpPr>
         <p:spPr>
           <a:xfrm>
-            <a:off x="3264408" y="4498848"/>
-            <a:ext cx="1783080" cy="384048"/>
+            <a:off x="8524037" y="3611880"/>
+            <a:ext cx="2753258" cy="1828800"/>
           </a:xfrm>
           <a:prstGeom prst="rect">
             <a:avLst/>
@@ -5541,368 +5073,67 @@
           <a:ln/>
         </p:spPr>
         <p:txBody>
-          <a:bodyPr wrap="square" lIns="0" tIns="0" rIns="0" bIns="0" rtlCol="0" anchor="ctr"/>
-          <a:lstStyle/>
-          <a:p>
-            <a:pPr indent="0" marL="0">
-              <a:buNone/>
-            </a:pPr>
-            <a:r>
-              <a:rPr lang="en-US" sz="1200" dirty="0">
-                <a:solidFill>
-                  <a:schemeClr val="bg1"/>
-                </a:solidFill>
-                <a:latin typeface="Courier New" pitchFamily="34" charset="0"/>
-                <a:ea typeface="Courier New" pitchFamily="34" charset="-122"/>
-                <a:cs typeface="Courier New" pitchFamily="34" charset="-120"/>
-              </a:rPr>
-              <a:t>z = bz + 2</a:t>
-            </a:r>
-            <a:endParaRPr lang="en-US" sz="1200" dirty="0"/>
-          </a:p>
-        </p:txBody>
-      </p:sp>
-      <p:sp>
-        <p:nvSpPr>
-          <p:cNvPr id="23032" name="Text 30"/>
-          <p:cNvSpPr txBox="1"/>
-          <p:nvPr/>
-        </p:nvSpPr>
-        <p:spPr>
-          <a:xfrm>
-            <a:off x="5138928" y="4498848"/>
-            <a:ext cx="6302959" cy="384048"/>
-          </a:xfrm>
-          <a:prstGeom prst="rect">
-            <a:avLst/>
-          </a:prstGeom>
-          <a:noFill/>
-          <a:ln/>
-        </p:spPr>
-        <p:txBody>
-          <a:bodyPr wrap="square" lIns="0" tIns="0" rIns="0" bIns="0" rtlCol="0" anchor="ctr"/>
-          <a:lstStyle/>
-          <a:p>
-            <a:pPr indent="0" marL="0">
-              <a:buNone/>
-            </a:pPr>
-            <a:r>
-              <a:rPr lang="en-US" sz="1300" dirty="0">
-                <a:solidFill>
-                  <a:schemeClr val="bg1"/>
-                </a:solidFill>
-              </a:rPr>
-              <a:t>hiking routes, property boundaries, hillshade – their own opacity slider</a:t>
-            </a:r>
-            <a:endParaRPr lang="en-US" sz="1300" dirty="0"/>
-          </a:p>
-        </p:txBody>
-      </p:sp>
-      <p:sp>
-        <p:nvSpPr>
-          <p:cNvPr id="23033" name="Lag Ditt bakgrunnskart"/>
-          <p:cNvSpPr/>
-          <p:nvPr/>
-        </p:nvSpPr>
-        <p:spPr>
-          <a:xfrm>
-            <a:off x="548640" y="4928616"/>
-            <a:ext cx="11094415" cy="384048"/>
-          </a:xfrm>
-          <a:prstGeom prst="roundRect">
-            <a:avLst>
-              <a:gd name="adj" fmla="val 16667"/>
-            </a:avLst>
-          </a:prstGeom>
-          <a:solidFill>
-            <a:schemeClr val="tx2"/>
-          </a:solidFill>
-          <a:ln/>
-        </p:spPr>
-      </p:sp>
-      <p:sp>
-        <p:nvSpPr>
-          <p:cNvPr id="23034" name="Text 32"/>
-          <p:cNvSpPr txBox="1"/>
-          <p:nvPr/>
-        </p:nvSpPr>
-        <p:spPr>
-          <a:xfrm>
-            <a:off x="749808" y="4928616"/>
-            <a:ext cx="2240280" cy="384048"/>
-          </a:xfrm>
-          <a:prstGeom prst="rect">
-            <a:avLst/>
-          </a:prstGeom>
-          <a:noFill/>
-          <a:ln/>
-        </p:spPr>
-        <p:txBody>
-          <a:bodyPr wrap="square" lIns="0" tIns="0" rIns="0" bIns="0" rtlCol="0" anchor="ctr"/>
-          <a:lstStyle/>
-          <a:p>
-            <a:pPr indent="0" marL="0">
-              <a:buNone/>
-            </a:pPr>
-            <a:r>
-              <a:rPr lang="en-US" sz="1400" b="1" dirty="0">
-                <a:solidFill>
-                  <a:schemeClr val="bg1"/>
-                </a:solidFill>
-              </a:rPr>
-              <a:t>Your background map</a:t>
-            </a:r>
-            <a:endParaRPr lang="en-US" sz="1400" dirty="0"/>
-          </a:p>
-        </p:txBody>
-      </p:sp>
-      <p:sp>
-        <p:nvSpPr>
-          <p:cNvPr id="23035" name="Text 33"/>
-          <p:cNvSpPr txBox="1"/>
-          <p:nvPr/>
-        </p:nvSpPr>
-        <p:spPr>
-          <a:xfrm>
-            <a:off x="3264408" y="4928616"/>
-            <a:ext cx="1783080" cy="384048"/>
-          </a:xfrm>
-          <a:prstGeom prst="rect">
-            <a:avLst/>
-          </a:prstGeom>
-          <a:noFill/>
-          <a:ln/>
-        </p:spPr>
-        <p:txBody>
-          <a:bodyPr wrap="square" lIns="0" tIns="0" rIns="0" bIns="0" rtlCol="0" anchor="ctr"/>
-          <a:lstStyle/>
-          <a:p>
-            <a:pPr indent="0" marL="0">
-              <a:buNone/>
-            </a:pPr>
-            <a:r>
-              <a:rPr lang="en-US" sz="1200" dirty="0">
-                <a:solidFill>
-                  <a:schemeClr val="bg1"/>
-                </a:solidFill>
-                <a:latin typeface="Courier New" pitchFamily="34" charset="0"/>
-                <a:ea typeface="Courier New" pitchFamily="34" charset="-122"/>
-                <a:cs typeface="Courier New" pitchFamily="34" charset="-120"/>
-              </a:rPr>
-              <a:t>z = bz + 1</a:t>
-            </a:r>
-            <a:endParaRPr lang="en-US" sz="1200" dirty="0"/>
-          </a:p>
-        </p:txBody>
-      </p:sp>
-      <p:sp>
-        <p:nvSpPr>
-          <p:cNvPr id="23036" name="Text 34"/>
-          <p:cNvSpPr txBox="1"/>
-          <p:nvPr/>
-        </p:nvSpPr>
-        <p:spPr>
-          <a:xfrm>
-            <a:off x="5138928" y="4928616"/>
-            <a:ext cx="6302959" cy="384048"/>
-          </a:xfrm>
-          <a:prstGeom prst="rect">
-            <a:avLst/>
-          </a:prstGeom>
-          <a:noFill/>
-          <a:ln/>
-        </p:spPr>
-        <p:txBody>
-          <a:bodyPr wrap="square" lIns="0" tIns="0" rIns="0" bIns="0" rtlCol="0" anchor="ctr"/>
-          <a:lstStyle/>
-          <a:p>
-            <a:pPr indent="0" marL="0">
-              <a:buNone/>
-            </a:pPr>
-            <a:r>
-              <a:rPr lang="en-US" sz="1300" dirty="0">
-                <a:solidFill>
-                  <a:schemeClr val="bg1"/>
-                </a:solidFill>
-              </a:rPr>
-              <a:t>fully opaque – faded towards white with a colour filter, at most 50 %</a:t>
-            </a:r>
-            <a:endParaRPr lang="en-US" sz="1300" dirty="0"/>
-          </a:p>
-        </p:txBody>
-      </p:sp>
-      <p:sp>
-        <p:nvSpPr>
-          <p:cNvPr id="23037" name="Lag geocaching.com-kartet"/>
-          <p:cNvSpPr/>
-          <p:nvPr/>
-        </p:nvSpPr>
-        <p:spPr>
-          <a:xfrm>
-            <a:off x="548640" y="5358384"/>
-            <a:ext cx="11094415" cy="384048"/>
-          </a:xfrm>
-          <a:prstGeom prst="roundRect">
-            <a:avLst>
-              <a:gd name="adj" fmla="val 16667"/>
-            </a:avLst>
-          </a:prstGeom>
-          <a:solidFill>
-            <a:schemeClr val="accent5"/>
-          </a:solidFill>
-          <a:ln/>
-        </p:spPr>
-      </p:sp>
-      <p:sp>
-        <p:nvSpPr>
-          <p:cNvPr id="23038" name="Text 36"/>
-          <p:cNvSpPr txBox="1"/>
-          <p:nvPr/>
-        </p:nvSpPr>
-        <p:spPr>
-          <a:xfrm>
-            <a:off x="749808" y="5358384"/>
-            <a:ext cx="2240280" cy="384048"/>
-          </a:xfrm>
-          <a:prstGeom prst="rect">
-            <a:avLst/>
-          </a:prstGeom>
-          <a:noFill/>
-          <a:ln/>
-        </p:spPr>
-        <p:txBody>
-          <a:bodyPr wrap="square" lIns="0" tIns="0" rIns="0" bIns="0" rtlCol="0" anchor="ctr"/>
-          <a:lstStyle/>
-          <a:p>
-            <a:pPr indent="0" marL="0">
-              <a:buNone/>
-            </a:pPr>
-            <a:r>
-              <a:rPr lang="en-US" sz="1400" b="1" dirty="0">
+          <a:bodyPr wrap="square" lIns="0" tIns="0" rIns="0" bIns="0" rtlCol="0" anchor="t"/>
+          <a:lstStyle/>
+          <a:p>
+            <a:pPr marL="228600" indent="-228600">
+              <a:spcAft>
+                <a:spcPts val="800"/>
+              </a:spcAft>
+              <a:buSzPct val="100000"/>
+              <a:buChar char="•"/>
+            </a:pPr>
+            <a:r>
+              <a:rPr lang="en-US" sz="1700" dirty="0">
                 <a:solidFill>
                   <a:schemeClr val="tx1"/>
                 </a:solidFill>
               </a:rPr>
-              <a:t>The geocaching.com map</a:t>
-            </a:r>
-            <a:endParaRPr lang="en-US" sz="1400" dirty="0"/>
-          </a:p>
-        </p:txBody>
-      </p:sp>
-      <p:sp>
-        <p:nvSpPr>
-          <p:cNvPr id="23039" name="Text 37"/>
-          <p:cNvSpPr txBox="1"/>
-          <p:nvPr/>
-        </p:nvSpPr>
-        <p:spPr>
-          <a:xfrm>
-            <a:off x="3264408" y="5358384"/>
-            <a:ext cx="1783080" cy="384048"/>
-          </a:xfrm>
-          <a:prstGeom prst="rect">
-            <a:avLst/>
-          </a:prstGeom>
-          <a:noFill/>
-          <a:ln/>
-        </p:spPr>
-        <p:txBody>
-          <a:bodyPr wrap="square" lIns="0" tIns="0" rIns="0" bIns="0" rtlCol="0" anchor="ctr"/>
-          <a:lstStyle/>
-          <a:p>
-            <a:pPr indent="0" marL="0">
-              <a:buNone/>
-            </a:pPr>
-            <a:r>
-              <a:rPr lang="en-US" sz="1200" dirty="0">
+              <a:t>One click takes you home</a:t>
+            </a:r>
+            <a:endParaRPr lang="en-US" sz="1700" dirty="0"/>
+          </a:p>
+          <a:p>
+            <a:pPr marL="228600" indent="-228600">
+              <a:spcAft>
+                <a:spcPts val="800"/>
+              </a:spcAft>
+              <a:buSzPct val="100000"/>
+              <a:buChar char="•"/>
+            </a:pPr>
+            <a:r>
+              <a:rPr lang="en-US" sz="1700" dirty="0">
                 <a:solidFill>
                   <a:schemeClr val="tx1"/>
                 </a:solidFill>
-                <a:latin typeface="Courier New" pitchFamily="34" charset="0"/>
-                <a:ea typeface="Courier New" pitchFamily="34" charset="-122"/>
-                <a:cs typeface="Courier New" pitchFamily="34" charset="-120"/>
-              </a:rPr>
-              <a:t>z = bz</a:t>
-            </a:r>
-            <a:endParaRPr lang="en-US" sz="1200" dirty="0"/>
-          </a:p>
-        </p:txBody>
-      </p:sp>
-      <p:sp>
-        <p:nvSpPr>
-          <p:cNvPr id="23040" name="Text 38"/>
-          <p:cNvSpPr txBox="1"/>
-          <p:nvPr/>
-        </p:nvSpPr>
-        <p:spPr>
-          <a:xfrm>
-            <a:off x="5138928" y="5358384"/>
-            <a:ext cx="6302959" cy="384048"/>
-          </a:xfrm>
-          <a:prstGeom prst="rect">
-            <a:avLst/>
-          </a:prstGeom>
-          <a:noFill/>
-          <a:ln/>
-        </p:spPr>
-        <p:txBody>
-          <a:bodyPr wrap="square" lIns="0" tIns="0" rIns="0" bIns="0" rtlCol="0" anchor="ctr"/>
-          <a:lstStyle/>
-          <a:p>
-            <a:pPr indent="0" marL="0">
-              <a:buNone/>
-            </a:pPr>
-            <a:r>
-              <a:rPr lang="en-US" sz="1300" dirty="0">
+              </a:rPr>
+              <a:t>The first time you look up the address</a:t>
+            </a:r>
+            <a:endParaRPr lang="en-US" sz="1700" dirty="0"/>
+          </a:p>
+          <a:p>
+            <a:pPr marL="228600" indent="-228600">
+              <a:spcAft>
+                <a:spcPts val="800"/>
+              </a:spcAft>
+              <a:buSzPct val="100000"/>
+              <a:buChar char="•"/>
+            </a:pPr>
+            <a:r>
+              <a:rPr lang="en-US" sz="1700" dirty="0">
                 <a:solidFill>
                   <a:schemeClr val="tx1"/>
                 </a:solidFill>
               </a:rPr>
-              <a:t>the site's background – covered by your map, faded when it is chosen itself</a:t>
-            </a:r>
-            <a:endParaRPr lang="en-US" sz="1300" dirty="0"/>
-          </a:p>
-        </p:txBody>
-      </p:sp>
-      <p:sp>
-        <p:nvSpPr>
-          <p:cNvPr id="23041" name="Text 39"/>
-          <p:cNvSpPr txBox="1"/>
-          <p:nvPr/>
-        </p:nvSpPr>
-        <p:spPr>
-          <a:xfrm>
-            <a:off x="548640" y="5861304"/>
-            <a:ext cx="11094415" cy="457200"/>
-          </a:xfrm>
-          <a:prstGeom prst="rect">
-            <a:avLst/>
-          </a:prstGeom>
-          <a:noFill/>
-          <a:ln/>
-        </p:spPr>
-        <p:txBody>
-          <a:bodyPr wrap="square" lIns="0" tIns="0" rIns="0" bIns="0" rtlCol="0" anchor="t"/>
-          <a:lstStyle/>
-          <a:p>
-            <a:pPr indent="0" marL="0">
-              <a:buNone/>
-            </a:pPr>
-            <a:r>
-              <a:rPr lang="en-US" sz="1150" dirty="0">
-                <a:solidFill>
-                  <a:schemeClr val="accent4"/>
-                </a:solidFill>
-              </a:rPr>
-              <a:t>bz = the z-index of the site's background. On /play/map the site's background is a vector map (WebGL). On /map an invisible cache grid (UTFGrid) is loaded as well, used for the 161 m circles and for snapping the right-click popup to caches.</a:t>
-            </a:r>
-            <a:endParaRPr lang="en-US" sz="1150" dirty="0"/>
-          </a:p>
-        </p:txBody>
-      </p:sp>
-      <p:sp>
-        <p:nvSpPr>
-          <p:cNvPr id="23042" name="Slide Number Placeholder 0"/>
+              <a:t>Stored only in your browser</a:t>
+            </a:r>
+            <a:endParaRPr lang="en-US" sz="1700" dirty="0"/>
+          </a:p>
+        </p:txBody>
+      </p:sp>
+      <p:sp>
+        <p:nvSpPr>
+          <p:cNvPr id="23018" name="Slide Number Placeholder 0"/>
           <p:cNvSpPr>
             <a:spLocks noGrp="1"/>
           </p:cNvSpPr>
@@ -6002,7 +5233,7 @@
                   <a:schemeClr val="tx2"/>
                 </a:solidFill>
               </a:rPr>
-              <a:t>Under the hood</a:t>
+              <a:t>How the map layers are stacked</a:t>
             </a:r>
             <a:endParaRPr lang="en-US" sz="3600" dirty="0"/>
           </a:p>
@@ -6010,17 +5241,889 @@
       </p:sp>
       <p:sp>
         <p:nvSpPr>
-          <p:cNvPr id="24003" name="Ikon layers sirkel"/>
+          <p:cNvPr id="24003" name="Text 1"/>
+          <p:cNvSpPr txBox="1"/>
+          <p:nvPr/>
+        </p:nvSpPr>
+        <p:spPr>
+          <a:xfrm>
+            <a:off x="548640" y="1207008"/>
+            <a:ext cx="11094415" cy="274320"/>
+          </a:xfrm>
+          <a:prstGeom prst="rect">
+            <a:avLst/>
+          </a:prstGeom>
+          <a:noFill/>
+          <a:ln/>
+        </p:spPr>
+        <p:txBody>
+          <a:bodyPr wrap="square" lIns="0" tIns="0" rIns="0" bIns="0" rtlCol="0" anchor="ctr"/>
+          <a:lstStyle/>
+          <a:p>
+            <a:pPr indent="0" marL="0">
+              <a:buNone/>
+            </a:pPr>
+            <a:r>
+              <a:rPr lang="en-US" sz="1100" b="1" spc="100" kern="0" dirty="0">
+                <a:solidFill>
+                  <a:schemeClr val="accent4"/>
+                </a:solidFill>
+              </a:rPr>
+              <a:t>ABOVE THE MAP TILES</a:t>
+            </a:r>
+            <a:endParaRPr lang="en-US" sz="1100" dirty="0"/>
+          </a:p>
+        </p:txBody>
+      </p:sp>
+      <p:sp>
+        <p:nvSpPr>
+          <p:cNvPr id="24004" name="Lag Kontroller"/>
           <p:cNvSpPr/>
           <p:nvPr/>
         </p:nvSpPr>
         <p:spPr>
           <a:xfrm>
-            <a:off x="548640" y="1591056"/>
-            <a:ext cx="512064" cy="512064"/>
-          </a:xfrm>
-          <a:prstGeom prst="ellipse">
-            <a:avLst/>
+            <a:off x="548640" y="1517904"/>
+            <a:ext cx="11094415" cy="384048"/>
+          </a:xfrm>
+          <a:prstGeom prst="roundRect">
+            <a:avLst>
+              <a:gd name="adj" fmla="val 16667"/>
+            </a:avLst>
+          </a:prstGeom>
+          <a:solidFill>
+            <a:schemeClr val="bg2"/>
+          </a:solidFill>
+          <a:ln/>
+        </p:spPr>
+      </p:sp>
+      <p:sp>
+        <p:nvSpPr>
+          <p:cNvPr id="24005" name="Text 3"/>
+          <p:cNvSpPr txBox="1"/>
+          <p:nvPr/>
+        </p:nvSpPr>
+        <p:spPr>
+          <a:xfrm>
+            <a:off x="749808" y="1517904"/>
+            <a:ext cx="2240280" cy="384048"/>
+          </a:xfrm>
+          <a:prstGeom prst="rect">
+            <a:avLst/>
+          </a:prstGeom>
+          <a:noFill/>
+          <a:ln/>
+        </p:spPr>
+        <p:txBody>
+          <a:bodyPr wrap="square" lIns="0" tIns="0" rIns="0" bIns="0" rtlCol="0" anchor="ctr"/>
+          <a:lstStyle/>
+          <a:p>
+            <a:pPr indent="0" marL="0">
+              <a:buNone/>
+            </a:pPr>
+            <a:r>
+              <a:rPr lang="en-US" sz="1400" b="1" dirty="0">
+                <a:solidFill>
+                  <a:schemeClr val="tx1"/>
+                </a:solidFill>
+              </a:rPr>
+              <a:t>Controls</a:t>
+            </a:r>
+            <a:endParaRPr lang="en-US" sz="1400" dirty="0"/>
+          </a:p>
+        </p:txBody>
+      </p:sp>
+      <p:sp>
+        <p:nvSpPr>
+          <p:cNvPr id="24006" name="Text 4"/>
+          <p:cNvSpPr txBox="1"/>
+          <p:nvPr/>
+        </p:nvSpPr>
+        <p:spPr>
+          <a:xfrm>
+            <a:off x="3264408" y="1517904"/>
+            <a:ext cx="1783080" cy="384048"/>
+          </a:xfrm>
+          <a:prstGeom prst="rect">
+            <a:avLst/>
+          </a:prstGeom>
+          <a:noFill/>
+          <a:ln/>
+        </p:spPr>
+        <p:txBody>
+          <a:bodyPr wrap="square" lIns="0" tIns="0" rIns="0" bIns="0" rtlCol="0" anchor="ctr"/>
+          <a:lstStyle/>
+          <a:p>
+            <a:pPr indent="0" marL="0">
+              <a:buNone/>
+            </a:pPr>
+            <a:r>
+              <a:rPr lang="en-US" sz="1200" dirty="0">
+                <a:solidFill>
+                  <a:schemeClr val="tx1"/>
+                </a:solidFill>
+                <a:latin typeface="Courier New" pitchFamily="34" charset="0"/>
+                <a:ea typeface="Courier New" pitchFamily="34" charset="-122"/>
+                <a:cs typeface="Courier New" pitchFamily="34" charset="-120"/>
+              </a:rPr>
+              <a:t>controls · 1000</a:t>
+            </a:r>
+            <a:endParaRPr lang="en-US" sz="1200" dirty="0"/>
+          </a:p>
+        </p:txBody>
+      </p:sp>
+      <p:sp>
+        <p:nvSpPr>
+          <p:cNvPr id="24007" name="Text 5"/>
+          <p:cNvSpPr txBox="1"/>
+          <p:nvPr/>
+        </p:nvSpPr>
+        <p:spPr>
+          <a:xfrm>
+            <a:off x="5138928" y="1517904"/>
+            <a:ext cx="6302959" cy="384048"/>
+          </a:xfrm>
+          <a:prstGeom prst="rect">
+            <a:avLst/>
+          </a:prstGeom>
+          <a:noFill/>
+          <a:ln/>
+        </p:spPr>
+        <p:txBody>
+          <a:bodyPr wrap="square" lIns="0" tIns="0" rIns="0" bIns="0" rtlCol="0" anchor="ctr"/>
+          <a:lstStyle/>
+          <a:p>
+            <a:pPr indent="0" marL="0">
+              <a:buNone/>
+            </a:pPr>
+            <a:r>
+              <a:rPr lang="en-US" sz="1300" dirty="0">
+                <a:solidFill>
+                  <a:schemeClr val="tx1"/>
+                </a:solidFill>
+              </a:rPr>
+              <a:t>the toolbar, the layer panel, the coordinate display and the credits</a:t>
+            </a:r>
+            <a:endParaRPr lang="en-US" sz="1300" dirty="0"/>
+          </a:p>
+        </p:txBody>
+      </p:sp>
+      <p:sp>
+        <p:nvSpPr>
+          <p:cNvPr id="24008" name="Lag Bobler"/>
+          <p:cNvSpPr/>
+          <p:nvPr/>
+        </p:nvSpPr>
+        <p:spPr>
+          <a:xfrm>
+            <a:off x="548640" y="1947672"/>
+            <a:ext cx="11094415" cy="384048"/>
+          </a:xfrm>
+          <a:prstGeom prst="roundRect">
+            <a:avLst>
+              <a:gd name="adj" fmla="val 16667"/>
+            </a:avLst>
+          </a:prstGeom>
+          <a:solidFill>
+            <a:schemeClr val="bg2"/>
+          </a:solidFill>
+          <a:ln/>
+        </p:spPr>
+      </p:sp>
+      <p:sp>
+        <p:nvSpPr>
+          <p:cNvPr id="24009" name="Text 7"/>
+          <p:cNvSpPr txBox="1"/>
+          <p:nvPr/>
+        </p:nvSpPr>
+        <p:spPr>
+          <a:xfrm>
+            <a:off x="749808" y="1947672"/>
+            <a:ext cx="2240280" cy="384048"/>
+          </a:xfrm>
+          <a:prstGeom prst="rect">
+            <a:avLst/>
+          </a:prstGeom>
+          <a:noFill/>
+          <a:ln/>
+        </p:spPr>
+        <p:txBody>
+          <a:bodyPr wrap="square" lIns="0" tIns="0" rIns="0" bIns="0" rtlCol="0" anchor="ctr"/>
+          <a:lstStyle/>
+          <a:p>
+            <a:pPr indent="0" marL="0">
+              <a:buNone/>
+            </a:pPr>
+            <a:r>
+              <a:rPr lang="en-US" sz="1400" b="1" dirty="0">
+                <a:solidFill>
+                  <a:schemeClr val="tx1"/>
+                </a:solidFill>
+              </a:rPr>
+              <a:t>Popups</a:t>
+            </a:r>
+            <a:endParaRPr lang="en-US" sz="1400" dirty="0"/>
+          </a:p>
+        </p:txBody>
+      </p:sp>
+      <p:sp>
+        <p:nvSpPr>
+          <p:cNvPr id="24010" name="Text 8"/>
+          <p:cNvSpPr txBox="1"/>
+          <p:nvPr/>
+        </p:nvSpPr>
+        <p:spPr>
+          <a:xfrm>
+            <a:off x="3264408" y="1947672"/>
+            <a:ext cx="1783080" cy="384048"/>
+          </a:xfrm>
+          <a:prstGeom prst="rect">
+            <a:avLst/>
+          </a:prstGeom>
+          <a:noFill/>
+          <a:ln/>
+        </p:spPr>
+        <p:txBody>
+          <a:bodyPr wrap="square" lIns="0" tIns="0" rIns="0" bIns="0" rtlCol="0" anchor="ctr"/>
+          <a:lstStyle/>
+          <a:p>
+            <a:pPr indent="0" marL="0">
+              <a:buNone/>
+            </a:pPr>
+            <a:r>
+              <a:rPr lang="en-US" sz="1200" dirty="0">
+                <a:solidFill>
+                  <a:schemeClr val="tx1"/>
+                </a:solidFill>
+                <a:latin typeface="Courier New" pitchFamily="34" charset="0"/>
+                <a:ea typeface="Courier New" pitchFamily="34" charset="-122"/>
+                <a:cs typeface="Courier New" pitchFamily="34" charset="-120"/>
+              </a:rPr>
+              <a:t>popupPane · 700</a:t>
+            </a:r>
+            <a:endParaRPr lang="en-US" sz="1200" dirty="0"/>
+          </a:p>
+        </p:txBody>
+      </p:sp>
+      <p:sp>
+        <p:nvSpPr>
+          <p:cNvPr id="24011" name="Text 9"/>
+          <p:cNvSpPr txBox="1"/>
+          <p:nvPr/>
+        </p:nvSpPr>
+        <p:spPr>
+          <a:xfrm>
+            <a:off x="5138928" y="1947672"/>
+            <a:ext cx="6302959" cy="384048"/>
+          </a:xfrm>
+          <a:prstGeom prst="rect">
+            <a:avLst/>
+          </a:prstGeom>
+          <a:noFill/>
+          <a:ln/>
+        </p:spPr>
+        <p:txBody>
+          <a:bodyPr wrap="square" lIns="0" tIns="0" rIns="0" bIns="0" rtlCol="0" anchor="ctr"/>
+          <a:lstStyle/>
+          <a:p>
+            <a:pPr indent="0" marL="0">
+              <a:buNone/>
+            </a:pPr>
+            <a:r>
+              <a:rPr lang="en-US" sz="1300" dirty="0">
+                <a:solidFill>
+                  <a:schemeClr val="tx1"/>
+                </a:solidFill>
+              </a:rPr>
+              <a:t>the right-click popup and other map popups</a:t>
+            </a:r>
+            <a:endParaRPr lang="en-US" sz="1300" dirty="0"/>
+          </a:p>
+        </p:txBody>
+      </p:sp>
+      <p:sp>
+        <p:nvSpPr>
+          <p:cNvPr id="24012" name="Lag Markører"/>
+          <p:cNvSpPr/>
+          <p:nvPr/>
+        </p:nvSpPr>
+        <p:spPr>
+          <a:xfrm>
+            <a:off x="548640" y="2377440"/>
+            <a:ext cx="11094415" cy="384048"/>
+          </a:xfrm>
+          <a:prstGeom prst="roundRect">
+            <a:avLst>
+              <a:gd name="adj" fmla="val 16667"/>
+            </a:avLst>
+          </a:prstGeom>
+          <a:solidFill>
+            <a:schemeClr val="bg2"/>
+          </a:solidFill>
+          <a:ln/>
+        </p:spPr>
+      </p:sp>
+      <p:sp>
+        <p:nvSpPr>
+          <p:cNvPr id="24013" name="Text 11"/>
+          <p:cNvSpPr txBox="1"/>
+          <p:nvPr/>
+        </p:nvSpPr>
+        <p:spPr>
+          <a:xfrm>
+            <a:off x="749808" y="2377440"/>
+            <a:ext cx="2240280" cy="384048"/>
+          </a:xfrm>
+          <a:prstGeom prst="rect">
+            <a:avLst/>
+          </a:prstGeom>
+          <a:noFill/>
+          <a:ln/>
+        </p:spPr>
+        <p:txBody>
+          <a:bodyPr wrap="square" lIns="0" tIns="0" rIns="0" bIns="0" rtlCol="0" anchor="ctr"/>
+          <a:lstStyle/>
+          <a:p>
+            <a:pPr indent="0" marL="0">
+              <a:buNone/>
+            </a:pPr>
+            <a:r>
+              <a:rPr lang="en-US" sz="1400" b="1" dirty="0">
+                <a:solidFill>
+                  <a:schemeClr val="tx1"/>
+                </a:solidFill>
+              </a:rPr>
+              <a:t>Markers</a:t>
+            </a:r>
+            <a:endParaRPr lang="en-US" sz="1400" dirty="0"/>
+          </a:p>
+        </p:txBody>
+      </p:sp>
+      <p:sp>
+        <p:nvSpPr>
+          <p:cNvPr id="24014" name="Text 12"/>
+          <p:cNvSpPr txBox="1"/>
+          <p:nvPr/>
+        </p:nvSpPr>
+        <p:spPr>
+          <a:xfrm>
+            <a:off x="3264408" y="2377440"/>
+            <a:ext cx="1783080" cy="384048"/>
+          </a:xfrm>
+          <a:prstGeom prst="rect">
+            <a:avLst/>
+          </a:prstGeom>
+          <a:noFill/>
+          <a:ln/>
+        </p:spPr>
+        <p:txBody>
+          <a:bodyPr wrap="square" lIns="0" tIns="0" rIns="0" bIns="0" rtlCol="0" anchor="ctr"/>
+          <a:lstStyle/>
+          <a:p>
+            <a:pPr indent="0" marL="0">
+              <a:buNone/>
+            </a:pPr>
+            <a:r>
+              <a:rPr lang="en-US" sz="1200" dirty="0">
+                <a:solidFill>
+                  <a:schemeClr val="tx1"/>
+                </a:solidFill>
+                <a:latin typeface="Courier New" pitchFamily="34" charset="0"/>
+                <a:ea typeface="Courier New" pitchFamily="34" charset="-122"/>
+                <a:cs typeface="Courier New" pitchFamily="34" charset="-120"/>
+              </a:rPr>
+              <a:t>markerPane · 600</a:t>
+            </a:r>
+            <a:endParaRPr lang="en-US" sz="1200" dirty="0"/>
+          </a:p>
+        </p:txBody>
+      </p:sp>
+      <p:sp>
+        <p:nvSpPr>
+          <p:cNvPr id="24015" name="Text 13"/>
+          <p:cNvSpPr txBox="1"/>
+          <p:nvPr/>
+        </p:nvSpPr>
+        <p:spPr>
+          <a:xfrm>
+            <a:off x="5138928" y="2377440"/>
+            <a:ext cx="6302959" cy="384048"/>
+          </a:xfrm>
+          <a:prstGeom prst="rect">
+            <a:avLst/>
+          </a:prstGeom>
+          <a:noFill/>
+          <a:ln/>
+        </p:spPr>
+        <p:txBody>
+          <a:bodyPr wrap="square" lIns="0" tIns="0" rIns="0" bIns="0" rtlCol="0" anchor="ctr"/>
+          <a:lstStyle/>
+          <a:p>
+            <a:pPr indent="0" marL="0">
+              <a:buNone/>
+            </a:pPr>
+            <a:r>
+              <a:rPr lang="en-US" sz="1300" dirty="0">
+                <a:solidFill>
+                  <a:schemeClr val="tx1"/>
+                </a:solidFill>
+              </a:rPr>
+              <a:t>the cache icons on /play/map, pins, labels and your location</a:t>
+            </a:r>
+            <a:endParaRPr lang="en-US" sz="1300" dirty="0"/>
+          </a:p>
+        </p:txBody>
+      </p:sp>
+      <p:sp>
+        <p:nvSpPr>
+          <p:cNvPr id="24016" name="Lag Tegninger"/>
+          <p:cNvSpPr/>
+          <p:nvPr/>
+        </p:nvSpPr>
+        <p:spPr>
+          <a:xfrm>
+            <a:off x="548640" y="2807208"/>
+            <a:ext cx="11094415" cy="384048"/>
+          </a:xfrm>
+          <a:prstGeom prst="roundRect">
+            <a:avLst>
+              <a:gd name="adj" fmla="val 16667"/>
+            </a:avLst>
+          </a:prstGeom>
+          <a:solidFill>
+            <a:schemeClr val="bg2"/>
+          </a:solidFill>
+          <a:ln/>
+        </p:spPr>
+      </p:sp>
+      <p:sp>
+        <p:nvSpPr>
+          <p:cNvPr id="24017" name="Text 15"/>
+          <p:cNvSpPr txBox="1"/>
+          <p:nvPr/>
+        </p:nvSpPr>
+        <p:spPr>
+          <a:xfrm>
+            <a:off x="749808" y="2807208"/>
+            <a:ext cx="2240280" cy="384048"/>
+          </a:xfrm>
+          <a:prstGeom prst="rect">
+            <a:avLst/>
+          </a:prstGeom>
+          <a:noFill/>
+          <a:ln/>
+        </p:spPr>
+        <p:txBody>
+          <a:bodyPr wrap="square" lIns="0" tIns="0" rIns="0" bIns="0" rtlCol="0" anchor="ctr"/>
+          <a:lstStyle/>
+          <a:p>
+            <a:pPr indent="0" marL="0">
+              <a:buNone/>
+            </a:pPr>
+            <a:r>
+              <a:rPr lang="en-US" sz="1400" b="1" dirty="0">
+                <a:solidFill>
+                  <a:schemeClr val="tx1"/>
+                </a:solidFill>
+              </a:rPr>
+              <a:t>Drawings</a:t>
+            </a:r>
+            <a:endParaRPr lang="en-US" sz="1400" dirty="0"/>
+          </a:p>
+        </p:txBody>
+      </p:sp>
+      <p:sp>
+        <p:nvSpPr>
+          <p:cNvPr id="24018" name="Text 16"/>
+          <p:cNvSpPr txBox="1"/>
+          <p:nvPr/>
+        </p:nvSpPr>
+        <p:spPr>
+          <a:xfrm>
+            <a:off x="3264408" y="2807208"/>
+            <a:ext cx="1783080" cy="384048"/>
+          </a:xfrm>
+          <a:prstGeom prst="rect">
+            <a:avLst/>
+          </a:prstGeom>
+          <a:noFill/>
+          <a:ln/>
+        </p:spPr>
+        <p:txBody>
+          <a:bodyPr wrap="square" lIns="0" tIns="0" rIns="0" bIns="0" rtlCol="0" anchor="ctr"/>
+          <a:lstStyle/>
+          <a:p>
+            <a:pPr indent="0" marL="0">
+              <a:buNone/>
+            </a:pPr>
+            <a:r>
+              <a:rPr lang="en-US" sz="1200" dirty="0">
+                <a:solidFill>
+                  <a:schemeClr val="tx1"/>
+                </a:solidFill>
+                <a:latin typeface="Courier New" pitchFamily="34" charset="0"/>
+                <a:ea typeface="Courier New" pitchFamily="34" charset="-122"/>
+                <a:cs typeface="Courier New" pitchFamily="34" charset="-120"/>
+              </a:rPr>
+              <a:t>overlayPane · 400</a:t>
+            </a:r>
+            <a:endParaRPr lang="en-US" sz="1200" dirty="0"/>
+          </a:p>
+        </p:txBody>
+      </p:sp>
+      <p:sp>
+        <p:nvSpPr>
+          <p:cNvPr id="24019" name="Text 17"/>
+          <p:cNvSpPr txBox="1"/>
+          <p:nvPr/>
+        </p:nvSpPr>
+        <p:spPr>
+          <a:xfrm>
+            <a:off x="5138928" y="2807208"/>
+            <a:ext cx="6302959" cy="384048"/>
+          </a:xfrm>
+          <a:prstGeom prst="rect">
+            <a:avLst/>
+          </a:prstGeom>
+          <a:noFill/>
+          <a:ln/>
+        </p:spPr>
+        <p:txBody>
+          <a:bodyPr wrap="square" lIns="0" tIns="0" rIns="0" bIns="0" rtlCol="0" anchor="ctr"/>
+          <a:lstStyle/>
+          <a:p>
+            <a:pPr indent="0" marL="0">
+              <a:buNone/>
+            </a:pPr>
+            <a:r>
+              <a:rPr lang="en-US" sz="1300" dirty="0">
+                <a:solidFill>
+                  <a:schemeClr val="tx1"/>
+                </a:solidFill>
+              </a:rPr>
+              <a:t>161 m circles, measuring lines, projection lines and the accuracy circle</a:t>
+            </a:r>
+            <a:endParaRPr lang="en-US" sz="1300" dirty="0"/>
+          </a:p>
+        </p:txBody>
+      </p:sp>
+      <p:sp>
+        <p:nvSpPr>
+          <p:cNvPr id="24020" name="Text 18"/>
+          <p:cNvSpPr txBox="1"/>
+          <p:nvPr/>
+        </p:nvSpPr>
+        <p:spPr>
+          <a:xfrm>
+            <a:off x="548640" y="3328416"/>
+            <a:ext cx="11094415" cy="274320"/>
+          </a:xfrm>
+          <a:prstGeom prst="rect">
+            <a:avLst/>
+          </a:prstGeom>
+          <a:noFill/>
+          <a:ln/>
+        </p:spPr>
+        <p:txBody>
+          <a:bodyPr wrap="square" lIns="0" tIns="0" rIns="0" bIns="0" rtlCol="0" anchor="ctr"/>
+          <a:lstStyle/>
+          <a:p>
+            <a:pPr indent="0" marL="0">
+              <a:buNone/>
+            </a:pPr>
+            <a:r>
+              <a:rPr lang="en-US" sz="1100" b="1" spc="100" kern="0" dirty="0">
+                <a:solidFill>
+                  <a:schemeClr val="accent4"/>
+                </a:solidFill>
+              </a:rPr>
+              <a:t>THE MAP TILES (TILEPANE · 200) – SORTED BY Z-INDEX</a:t>
+            </a:r>
+            <a:endParaRPr lang="en-US" sz="1100" dirty="0"/>
+          </a:p>
+        </p:txBody>
+      </p:sp>
+      <p:sp>
+        <p:nvSpPr>
+          <p:cNvPr id="24021" name="Lag Nettstedets øvrige fliser"/>
+          <p:cNvSpPr/>
+          <p:nvPr/>
+        </p:nvSpPr>
+        <p:spPr>
+          <a:xfrm>
+            <a:off x="548640" y="3639312"/>
+            <a:ext cx="11094415" cy="384048"/>
+          </a:xfrm>
+          <a:prstGeom prst="roundRect">
+            <a:avLst>
+              <a:gd name="adj" fmla="val 16667"/>
+            </a:avLst>
+          </a:prstGeom>
+          <a:solidFill>
+            <a:schemeClr val="accent2"/>
+          </a:solidFill>
+          <a:ln/>
+        </p:spPr>
+      </p:sp>
+      <p:sp>
+        <p:nvSpPr>
+          <p:cNvPr id="24022" name="Text 20"/>
+          <p:cNvSpPr txBox="1"/>
+          <p:nvPr/>
+        </p:nvSpPr>
+        <p:spPr>
+          <a:xfrm>
+            <a:off x="749808" y="3639312"/>
+            <a:ext cx="2240280" cy="384048"/>
+          </a:xfrm>
+          <a:prstGeom prst="rect">
+            <a:avLst/>
+          </a:prstGeom>
+          <a:noFill/>
+          <a:ln/>
+        </p:spPr>
+        <p:txBody>
+          <a:bodyPr wrap="square" lIns="0" tIns="0" rIns="0" bIns="0" rtlCol="0" anchor="ctr"/>
+          <a:lstStyle/>
+          <a:p>
+            <a:pPr indent="0" marL="0">
+              <a:buNone/>
+            </a:pPr>
+            <a:r>
+              <a:rPr lang="en-US" sz="1400" b="1" dirty="0">
+                <a:solidFill>
+                  <a:schemeClr val="bg1"/>
+                </a:solidFill>
+              </a:rPr>
+              <a:t>The site's other tiles</a:t>
+            </a:r>
+            <a:endParaRPr lang="en-US" sz="1400" dirty="0"/>
+          </a:p>
+        </p:txBody>
+      </p:sp>
+      <p:sp>
+        <p:nvSpPr>
+          <p:cNvPr id="24023" name="Text 21"/>
+          <p:cNvSpPr txBox="1"/>
+          <p:nvPr/>
+        </p:nvSpPr>
+        <p:spPr>
+          <a:xfrm>
+            <a:off x="3264408" y="3639312"/>
+            <a:ext cx="1783080" cy="384048"/>
+          </a:xfrm>
+          <a:prstGeom prst="rect">
+            <a:avLst/>
+          </a:prstGeom>
+          <a:noFill/>
+          <a:ln/>
+        </p:spPr>
+        <p:txBody>
+          <a:bodyPr wrap="square" lIns="0" tIns="0" rIns="0" bIns="0" rtlCol="0" anchor="ctr"/>
+          <a:lstStyle/>
+          <a:p>
+            <a:pPr indent="0" marL="0">
+              <a:buNone/>
+            </a:pPr>
+            <a:r>
+              <a:rPr lang="en-US" sz="1200" dirty="0">
+                <a:solidFill>
+                  <a:schemeClr val="bg1"/>
+                </a:solidFill>
+                <a:latin typeface="Courier New" pitchFamily="34" charset="0"/>
+                <a:ea typeface="Courier New" pitchFamily="34" charset="-122"/>
+                <a:cs typeface="Courier New" pitchFamily="34" charset="-120"/>
+              </a:rPr>
+              <a:t>z = bz + 10</a:t>
+            </a:r>
+            <a:endParaRPr lang="en-US" sz="1200" dirty="0"/>
+          </a:p>
+        </p:txBody>
+      </p:sp>
+      <p:sp>
+        <p:nvSpPr>
+          <p:cNvPr id="24024" name="Text 22"/>
+          <p:cNvSpPr txBox="1"/>
+          <p:nvPr/>
+        </p:nvSpPr>
+        <p:spPr>
+          <a:xfrm>
+            <a:off x="5138928" y="3639312"/>
+            <a:ext cx="6302959" cy="384048"/>
+          </a:xfrm>
+          <a:prstGeom prst="rect">
+            <a:avLst/>
+          </a:prstGeom>
+          <a:noFill/>
+          <a:ln/>
+        </p:spPr>
+        <p:txBody>
+          <a:bodyPr wrap="square" lIns="0" tIns="0" rIns="0" bIns="0" rtlCol="0" anchor="ctr"/>
+          <a:lstStyle/>
+          <a:p>
+            <a:pPr indent="0" marL="0">
+              <a:buNone/>
+            </a:pPr>
+            <a:r>
+              <a:rPr lang="en-US" sz="1300" dirty="0">
+                <a:solidFill>
+                  <a:schemeClr val="bg1"/>
+                </a:solidFill>
+              </a:rPr>
+              <a:t>the cache icons on /map – always lifted above your layers</a:t>
+            </a:r>
+            <a:endParaRPr lang="en-US" sz="1300" dirty="0"/>
+          </a:p>
+        </p:txBody>
+      </p:sp>
+      <p:sp>
+        <p:nvSpPr>
+          <p:cNvPr id="24025" name="Lag Forhåndsvisning"/>
+          <p:cNvSpPr/>
+          <p:nvPr/>
+        </p:nvSpPr>
+        <p:spPr>
+          <a:xfrm>
+            <a:off x="548640" y="4069080"/>
+            <a:ext cx="11094415" cy="384048"/>
+          </a:xfrm>
+          <a:prstGeom prst="roundRect">
+            <a:avLst>
+              <a:gd name="adj" fmla="val 16667"/>
+            </a:avLst>
+          </a:prstGeom>
+          <a:solidFill>
+            <a:schemeClr val="accent3"/>
+          </a:solidFill>
+          <a:ln/>
+        </p:spPr>
+      </p:sp>
+      <p:sp>
+        <p:nvSpPr>
+          <p:cNvPr id="24026" name="Text 24"/>
+          <p:cNvSpPr txBox="1"/>
+          <p:nvPr/>
+        </p:nvSpPr>
+        <p:spPr>
+          <a:xfrm>
+            <a:off x="749808" y="4069080"/>
+            <a:ext cx="2240280" cy="384048"/>
+          </a:xfrm>
+          <a:prstGeom prst="rect">
+            <a:avLst/>
+          </a:prstGeom>
+          <a:noFill/>
+          <a:ln/>
+        </p:spPr>
+        <p:txBody>
+          <a:bodyPr wrap="square" lIns="0" tIns="0" rIns="0" bIns="0" rtlCol="0" anchor="ctr"/>
+          <a:lstStyle/>
+          <a:p>
+            <a:pPr indent="0" marL="0">
+              <a:buNone/>
+            </a:pPr>
+            <a:r>
+              <a:rPr lang="en-US" sz="1400" b="1" dirty="0">
+                <a:solidFill>
+                  <a:schemeClr val="bg1"/>
+                </a:solidFill>
+              </a:rPr>
+              <a:t>Preview</a:t>
+            </a:r>
+            <a:endParaRPr lang="en-US" sz="1400" dirty="0"/>
+          </a:p>
+        </p:txBody>
+      </p:sp>
+      <p:sp>
+        <p:nvSpPr>
+          <p:cNvPr id="24027" name="Text 25"/>
+          <p:cNvSpPr txBox="1"/>
+          <p:nvPr/>
+        </p:nvSpPr>
+        <p:spPr>
+          <a:xfrm>
+            <a:off x="3264408" y="4069080"/>
+            <a:ext cx="1783080" cy="384048"/>
+          </a:xfrm>
+          <a:prstGeom prst="rect">
+            <a:avLst/>
+          </a:prstGeom>
+          <a:noFill/>
+          <a:ln/>
+        </p:spPr>
+        <p:txBody>
+          <a:bodyPr wrap="square" lIns="0" tIns="0" rIns="0" bIns="0" rtlCol="0" anchor="ctr"/>
+          <a:lstStyle/>
+          <a:p>
+            <a:pPr indent="0" marL="0">
+              <a:buNone/>
+            </a:pPr>
+            <a:r>
+              <a:rPr lang="en-US" sz="1200" dirty="0">
+                <a:solidFill>
+                  <a:schemeClr val="bg1"/>
+                </a:solidFill>
+                <a:latin typeface="Courier New" pitchFamily="34" charset="0"/>
+                <a:ea typeface="Courier New" pitchFamily="34" charset="-122"/>
+                <a:cs typeface="Courier New" pitchFamily="34" charset="-120"/>
+              </a:rPr>
+              <a:t>z = bz + 3</a:t>
+            </a:r>
+            <a:endParaRPr lang="en-US" sz="1200" dirty="0"/>
+          </a:p>
+        </p:txBody>
+      </p:sp>
+      <p:sp>
+        <p:nvSpPr>
+          <p:cNvPr id="24028" name="Text 26"/>
+          <p:cNvSpPr txBox="1"/>
+          <p:nvPr/>
+        </p:nvSpPr>
+        <p:spPr>
+          <a:xfrm>
+            <a:off x="5138928" y="4069080"/>
+            <a:ext cx="6302959" cy="384048"/>
+          </a:xfrm>
+          <a:prstGeom prst="rect">
+            <a:avLst/>
+          </a:prstGeom>
+          <a:noFill/>
+          <a:ln/>
+        </p:spPr>
+        <p:txBody>
+          <a:bodyPr wrap="square" lIns="0" tIns="0" rIns="0" bIns="0" rtlCol="0" anchor="ctr"/>
+          <a:lstStyle/>
+          <a:p>
+            <a:pPr indent="0" marL="0">
+              <a:buNone/>
+            </a:pPr>
+            <a:r>
+              <a:rPr lang="en-US" sz="1300" dirty="0">
+                <a:solidFill>
+                  <a:schemeClr val="bg1"/>
+                </a:solidFill>
+              </a:rPr>
+              <a:t>the layer you are trying in the layer editor</a:t>
+            </a:r>
+            <a:endParaRPr lang="en-US" sz="1300" dirty="0"/>
+          </a:p>
+        </p:txBody>
+      </p:sp>
+      <p:sp>
+        <p:nvSpPr>
+          <p:cNvPr id="24029" name="Lag Dine overlegg"/>
+          <p:cNvSpPr/>
+          <p:nvPr/>
+        </p:nvSpPr>
+        <p:spPr>
+          <a:xfrm>
+            <a:off x="548640" y="4498848"/>
+            <a:ext cx="11094415" cy="384048"/>
+          </a:xfrm>
+          <a:prstGeom prst="roundRect">
+            <a:avLst>
+              <a:gd name="adj" fmla="val 16667"/>
+            </a:avLst>
           </a:prstGeom>
           <a:solidFill>
             <a:schemeClr val="accent1"/>
@@ -6028,40 +6131,16 @@
           <a:ln/>
         </p:spPr>
       </p:sp>
-      <p:pic>
-        <p:nvPicPr>
-          <p:cNvPr id="24004" name="Ikon layers" descr="layers">    </p:cNvPr>
-          <p:cNvPicPr>
-            <a:picLocks noChangeAspect="1"/>
-          </p:cNvPicPr>
-          <p:nvPr/>
-        </p:nvPicPr>
-        <p:blipFill>
-          <a:blip r:embed="rId1"/>
-          <a:stretch>
-            <a:fillRect/>
-          </a:stretch>
-        </p:blipFill>
-        <p:spPr>
-          <a:xfrm>
-            <a:off x="661294" y="1703710"/>
-            <a:ext cx="286756" cy="286756"/>
-          </a:xfrm>
-          <a:prstGeom prst="rect">
-            <a:avLst/>
-          </a:prstGeom>
-        </p:spPr>
-      </p:pic>
-      <p:sp>
-        <p:nvSpPr>
-          <p:cNvPr id="24005" name="Text 2"/>
+      <p:sp>
+        <p:nvSpPr>
+          <p:cNvPr id="24030" name="Text 28"/>
           <p:cNvSpPr txBox="1"/>
           <p:nvPr/>
         </p:nvSpPr>
         <p:spPr>
           <a:xfrm>
-            <a:off x="1261872" y="1517904"/>
-            <a:ext cx="4590288" cy="1280160"/>
+            <a:off x="749808" y="4498848"/>
+            <a:ext cx="2240280" cy="384048"/>
           </a:xfrm>
           <a:prstGeom prst="rect">
             <a:avLst/>
@@ -6070,547 +6149,404 @@
           <a:ln/>
         </p:spPr>
         <p:txBody>
+          <a:bodyPr wrap="square" lIns="0" tIns="0" rIns="0" bIns="0" rtlCol="0" anchor="ctr"/>
+          <a:lstStyle/>
+          <a:p>
+            <a:pPr indent="0" marL="0">
+              <a:buNone/>
+            </a:pPr>
+            <a:r>
+              <a:rPr lang="en-US" sz="1400" b="1" dirty="0">
+                <a:solidFill>
+                  <a:schemeClr val="bg1"/>
+                </a:solidFill>
+              </a:rPr>
+              <a:t>Your overlays</a:t>
+            </a:r>
+            <a:endParaRPr lang="en-US" sz="1400" dirty="0"/>
+          </a:p>
+        </p:txBody>
+      </p:sp>
+      <p:sp>
+        <p:nvSpPr>
+          <p:cNvPr id="24031" name="Text 29"/>
+          <p:cNvSpPr txBox="1"/>
+          <p:nvPr/>
+        </p:nvSpPr>
+        <p:spPr>
+          <a:xfrm>
+            <a:off x="3264408" y="4498848"/>
+            <a:ext cx="1783080" cy="384048"/>
+          </a:xfrm>
+          <a:prstGeom prst="rect">
+            <a:avLst/>
+          </a:prstGeom>
+          <a:noFill/>
+          <a:ln/>
+        </p:spPr>
+        <p:txBody>
+          <a:bodyPr wrap="square" lIns="0" tIns="0" rIns="0" bIns="0" rtlCol="0" anchor="ctr"/>
+          <a:lstStyle/>
+          <a:p>
+            <a:pPr indent="0" marL="0">
+              <a:buNone/>
+            </a:pPr>
+            <a:r>
+              <a:rPr lang="en-US" sz="1200" dirty="0">
+                <a:solidFill>
+                  <a:schemeClr val="bg1"/>
+                </a:solidFill>
+                <a:latin typeface="Courier New" pitchFamily="34" charset="0"/>
+                <a:ea typeface="Courier New" pitchFamily="34" charset="-122"/>
+                <a:cs typeface="Courier New" pitchFamily="34" charset="-120"/>
+              </a:rPr>
+              <a:t>z = bz + 2</a:t>
+            </a:r>
+            <a:endParaRPr lang="en-US" sz="1200" dirty="0"/>
+          </a:p>
+        </p:txBody>
+      </p:sp>
+      <p:sp>
+        <p:nvSpPr>
+          <p:cNvPr id="24032" name="Text 30"/>
+          <p:cNvSpPr txBox="1"/>
+          <p:nvPr/>
+        </p:nvSpPr>
+        <p:spPr>
+          <a:xfrm>
+            <a:off x="5138928" y="4498848"/>
+            <a:ext cx="6302959" cy="384048"/>
+          </a:xfrm>
+          <a:prstGeom prst="rect">
+            <a:avLst/>
+          </a:prstGeom>
+          <a:noFill/>
+          <a:ln/>
+        </p:spPr>
+        <p:txBody>
+          <a:bodyPr wrap="square" lIns="0" tIns="0" rIns="0" bIns="0" rtlCol="0" anchor="ctr"/>
+          <a:lstStyle/>
+          <a:p>
+            <a:pPr indent="0" marL="0">
+              <a:buNone/>
+            </a:pPr>
+            <a:r>
+              <a:rPr lang="en-US" sz="1300" dirty="0">
+                <a:solidFill>
+                  <a:schemeClr val="bg1"/>
+                </a:solidFill>
+              </a:rPr>
+              <a:t>hiking routes, property boundaries, hillshade – their own opacity slider</a:t>
+            </a:r>
+            <a:endParaRPr lang="en-US" sz="1300" dirty="0"/>
+          </a:p>
+        </p:txBody>
+      </p:sp>
+      <p:sp>
+        <p:nvSpPr>
+          <p:cNvPr id="24033" name="Lag Ditt bakgrunnskart"/>
+          <p:cNvSpPr/>
+          <p:nvPr/>
+        </p:nvSpPr>
+        <p:spPr>
+          <a:xfrm>
+            <a:off x="548640" y="4928616"/>
+            <a:ext cx="11094415" cy="384048"/>
+          </a:xfrm>
+          <a:prstGeom prst="roundRect">
+            <a:avLst>
+              <a:gd name="adj" fmla="val 16667"/>
+            </a:avLst>
+          </a:prstGeom>
+          <a:solidFill>
+            <a:schemeClr val="tx2"/>
+          </a:solidFill>
+          <a:ln/>
+        </p:spPr>
+      </p:sp>
+      <p:sp>
+        <p:nvSpPr>
+          <p:cNvPr id="24034" name="Text 32"/>
+          <p:cNvSpPr txBox="1"/>
+          <p:nvPr/>
+        </p:nvSpPr>
+        <p:spPr>
+          <a:xfrm>
+            <a:off x="749808" y="4928616"/>
+            <a:ext cx="2240280" cy="384048"/>
+          </a:xfrm>
+          <a:prstGeom prst="rect">
+            <a:avLst/>
+          </a:prstGeom>
+          <a:noFill/>
+          <a:ln/>
+        </p:spPr>
+        <p:txBody>
+          <a:bodyPr wrap="square" lIns="0" tIns="0" rIns="0" bIns="0" rtlCol="0" anchor="ctr"/>
+          <a:lstStyle/>
+          <a:p>
+            <a:pPr indent="0" marL="0">
+              <a:buNone/>
+            </a:pPr>
+            <a:r>
+              <a:rPr lang="en-US" sz="1400" b="1" dirty="0">
+                <a:solidFill>
+                  <a:schemeClr val="bg1"/>
+                </a:solidFill>
+              </a:rPr>
+              <a:t>Your background map</a:t>
+            </a:r>
+            <a:endParaRPr lang="en-US" sz="1400" dirty="0"/>
+          </a:p>
+        </p:txBody>
+      </p:sp>
+      <p:sp>
+        <p:nvSpPr>
+          <p:cNvPr id="24035" name="Text 33"/>
+          <p:cNvSpPr txBox="1"/>
+          <p:nvPr/>
+        </p:nvSpPr>
+        <p:spPr>
+          <a:xfrm>
+            <a:off x="3264408" y="4928616"/>
+            <a:ext cx="1783080" cy="384048"/>
+          </a:xfrm>
+          <a:prstGeom prst="rect">
+            <a:avLst/>
+          </a:prstGeom>
+          <a:noFill/>
+          <a:ln/>
+        </p:spPr>
+        <p:txBody>
+          <a:bodyPr wrap="square" lIns="0" tIns="0" rIns="0" bIns="0" rtlCol="0" anchor="ctr"/>
+          <a:lstStyle/>
+          <a:p>
+            <a:pPr indent="0" marL="0">
+              <a:buNone/>
+            </a:pPr>
+            <a:r>
+              <a:rPr lang="en-US" sz="1200" dirty="0">
+                <a:solidFill>
+                  <a:schemeClr val="bg1"/>
+                </a:solidFill>
+                <a:latin typeface="Courier New" pitchFamily="34" charset="0"/>
+                <a:ea typeface="Courier New" pitchFamily="34" charset="-122"/>
+                <a:cs typeface="Courier New" pitchFamily="34" charset="-120"/>
+              </a:rPr>
+              <a:t>z = bz + 1</a:t>
+            </a:r>
+            <a:endParaRPr lang="en-US" sz="1200" dirty="0"/>
+          </a:p>
+        </p:txBody>
+      </p:sp>
+      <p:sp>
+        <p:nvSpPr>
+          <p:cNvPr id="24036" name="Text 34"/>
+          <p:cNvSpPr txBox="1"/>
+          <p:nvPr/>
+        </p:nvSpPr>
+        <p:spPr>
+          <a:xfrm>
+            <a:off x="5138928" y="4928616"/>
+            <a:ext cx="6302959" cy="384048"/>
+          </a:xfrm>
+          <a:prstGeom prst="rect">
+            <a:avLst/>
+          </a:prstGeom>
+          <a:noFill/>
+          <a:ln/>
+        </p:spPr>
+        <p:txBody>
+          <a:bodyPr wrap="square" lIns="0" tIns="0" rIns="0" bIns="0" rtlCol="0" anchor="ctr"/>
+          <a:lstStyle/>
+          <a:p>
+            <a:pPr indent="0" marL="0">
+              <a:buNone/>
+            </a:pPr>
+            <a:r>
+              <a:rPr lang="en-US" sz="1300" dirty="0">
+                <a:solidFill>
+                  <a:schemeClr val="bg1"/>
+                </a:solidFill>
+              </a:rPr>
+              <a:t>fully opaque – faded towards white with a colour filter, at most 50 %</a:t>
+            </a:r>
+            <a:endParaRPr lang="en-US" sz="1300" dirty="0"/>
+          </a:p>
+        </p:txBody>
+      </p:sp>
+      <p:sp>
+        <p:nvSpPr>
+          <p:cNvPr id="24037" name="Lag geocaching.com-kartet"/>
+          <p:cNvSpPr/>
+          <p:nvPr/>
+        </p:nvSpPr>
+        <p:spPr>
+          <a:xfrm>
+            <a:off x="548640" y="5358384"/>
+            <a:ext cx="11094415" cy="384048"/>
+          </a:xfrm>
+          <a:prstGeom prst="roundRect">
+            <a:avLst>
+              <a:gd name="adj" fmla="val 16667"/>
+            </a:avLst>
+          </a:prstGeom>
+          <a:solidFill>
+            <a:schemeClr val="accent5"/>
+          </a:solidFill>
+          <a:ln/>
+        </p:spPr>
+      </p:sp>
+      <p:sp>
+        <p:nvSpPr>
+          <p:cNvPr id="24038" name="Text 36"/>
+          <p:cNvSpPr txBox="1"/>
+          <p:nvPr/>
+        </p:nvSpPr>
+        <p:spPr>
+          <a:xfrm>
+            <a:off x="749808" y="5358384"/>
+            <a:ext cx="2240280" cy="384048"/>
+          </a:xfrm>
+          <a:prstGeom prst="rect">
+            <a:avLst/>
+          </a:prstGeom>
+          <a:noFill/>
+          <a:ln/>
+        </p:spPr>
+        <p:txBody>
+          <a:bodyPr wrap="square" lIns="0" tIns="0" rIns="0" bIns="0" rtlCol="0" anchor="ctr"/>
+          <a:lstStyle/>
+          <a:p>
+            <a:pPr indent="0" marL="0">
+              <a:buNone/>
+            </a:pPr>
+            <a:r>
+              <a:rPr lang="en-US" sz="1400" b="1" dirty="0">
+                <a:solidFill>
+                  <a:schemeClr val="tx1"/>
+                </a:solidFill>
+              </a:rPr>
+              <a:t>The geocaching.com map</a:t>
+            </a:r>
+            <a:endParaRPr lang="en-US" sz="1400" dirty="0"/>
+          </a:p>
+        </p:txBody>
+      </p:sp>
+      <p:sp>
+        <p:nvSpPr>
+          <p:cNvPr id="24039" name="Text 37"/>
+          <p:cNvSpPr txBox="1"/>
+          <p:nvPr/>
+        </p:nvSpPr>
+        <p:spPr>
+          <a:xfrm>
+            <a:off x="3264408" y="5358384"/>
+            <a:ext cx="1783080" cy="384048"/>
+          </a:xfrm>
+          <a:prstGeom prst="rect">
+            <a:avLst/>
+          </a:prstGeom>
+          <a:noFill/>
+          <a:ln/>
+        </p:spPr>
+        <p:txBody>
+          <a:bodyPr wrap="square" lIns="0" tIns="0" rIns="0" bIns="0" rtlCol="0" anchor="ctr"/>
+          <a:lstStyle/>
+          <a:p>
+            <a:pPr indent="0" marL="0">
+              <a:buNone/>
+            </a:pPr>
+            <a:r>
+              <a:rPr lang="en-US" sz="1200" dirty="0">
+                <a:solidFill>
+                  <a:schemeClr val="tx1"/>
+                </a:solidFill>
+                <a:latin typeface="Courier New" pitchFamily="34" charset="0"/>
+                <a:ea typeface="Courier New" pitchFamily="34" charset="-122"/>
+                <a:cs typeface="Courier New" pitchFamily="34" charset="-120"/>
+              </a:rPr>
+              <a:t>z = bz</a:t>
+            </a:r>
+            <a:endParaRPr lang="en-US" sz="1200" dirty="0"/>
+          </a:p>
+        </p:txBody>
+      </p:sp>
+      <p:sp>
+        <p:nvSpPr>
+          <p:cNvPr id="24040" name="Text 38"/>
+          <p:cNvSpPr txBox="1"/>
+          <p:nvPr/>
+        </p:nvSpPr>
+        <p:spPr>
+          <a:xfrm>
+            <a:off x="5138928" y="5358384"/>
+            <a:ext cx="6302959" cy="384048"/>
+          </a:xfrm>
+          <a:prstGeom prst="rect">
+            <a:avLst/>
+          </a:prstGeom>
+          <a:noFill/>
+          <a:ln/>
+        </p:spPr>
+        <p:txBody>
+          <a:bodyPr wrap="square" lIns="0" tIns="0" rIns="0" bIns="0" rtlCol="0" anchor="ctr"/>
+          <a:lstStyle/>
+          <a:p>
+            <a:pPr indent="0" marL="0">
+              <a:buNone/>
+            </a:pPr>
+            <a:r>
+              <a:rPr lang="en-US" sz="1300" dirty="0">
+                <a:solidFill>
+                  <a:schemeClr val="tx1"/>
+                </a:solidFill>
+              </a:rPr>
+              <a:t>the site's background – covered by your map, faded when it is chosen itself</a:t>
+            </a:r>
+            <a:endParaRPr lang="en-US" sz="1300" dirty="0"/>
+          </a:p>
+        </p:txBody>
+      </p:sp>
+      <p:sp>
+        <p:nvSpPr>
+          <p:cNvPr id="24041" name="Text 39"/>
+          <p:cNvSpPr txBox="1"/>
+          <p:nvPr/>
+        </p:nvSpPr>
+        <p:spPr>
+          <a:xfrm>
+            <a:off x="548640" y="5861304"/>
+            <a:ext cx="11094415" cy="457200"/>
+          </a:xfrm>
+          <a:prstGeom prst="rect">
+            <a:avLst/>
+          </a:prstGeom>
+          <a:noFill/>
+          <a:ln/>
+        </p:spPr>
+        <p:txBody>
           <a:bodyPr wrap="square" lIns="0" tIns="0" rIns="0" bIns="0" rtlCol="0" anchor="t"/>
           <a:lstStyle/>
           <a:p>
             <a:pPr indent="0" marL="0">
-              <a:spcAft>
-                <a:spcPts val="200"/>
-              </a:spcAft>
-              <a:buNone/>
-            </a:pPr>
-            <a:r>
-              <a:rPr lang="en-US" sz="1700" b="1" dirty="0">
-                <a:solidFill>
-                  <a:schemeClr val="tx1"/>
-                </a:solidFill>
-              </a:rPr>
-              <a:t>Never removes the site's layers</a:t>
-            </a:r>
-            <a:endParaRPr lang="en-US" sz="1700" dirty="0"/>
-          </a:p>
-          <a:p>
-            <a:pPr indent="0" marL="0">
-              <a:spcAft>
-                <a:spcPts val="200"/>
-              </a:spcAft>
-              <a:buNone/>
-            </a:pPr>
-            <a:r>
-              <a:rPr lang="en-US" sz="1400" dirty="0">
+              <a:buNone/>
+            </a:pPr>
+            <a:r>
+              <a:rPr lang="en-US" sz="1150" dirty="0">
                 <a:solidFill>
                   <a:schemeClr val="accent4"/>
                 </a:solidFill>
               </a:rPr>
-              <a:t>The script slots its own layers in between, sorted by z-index</a:t>
-            </a:r>
-            <a:endParaRPr lang="en-US" sz="1700" dirty="0"/>
-          </a:p>
-        </p:txBody>
-      </p:sp>
-      <p:sp>
-        <p:nvSpPr>
-          <p:cNvPr id="24006" name="Ikon eraser sirkel"/>
-          <p:cNvSpPr/>
-          <p:nvPr/>
-        </p:nvSpPr>
-        <p:spPr>
-          <a:xfrm>
-            <a:off x="548640" y="2916936"/>
-            <a:ext cx="512064" cy="512064"/>
-          </a:xfrm>
-          <a:prstGeom prst="ellipse">
-            <a:avLst/>
-          </a:prstGeom>
-          <a:solidFill>
-            <a:schemeClr val="accent1"/>
-          </a:solidFill>
-          <a:ln/>
-        </p:spPr>
-      </p:sp>
-      <p:pic>
-        <p:nvPicPr>
-          <p:cNvPr id="24007" name="Ikon eraser" descr="eraser">    </p:cNvPr>
-          <p:cNvPicPr>
-            <a:picLocks noChangeAspect="1"/>
-          </p:cNvPicPr>
-          <p:nvPr/>
-        </p:nvPicPr>
-        <p:blipFill>
-          <a:blip r:embed="rId2"/>
-          <a:stretch>
-            <a:fillRect/>
-          </a:stretch>
-        </p:blipFill>
-        <p:spPr>
-          <a:xfrm>
-            <a:off x="661294" y="3029590"/>
-            <a:ext cx="286756" cy="286756"/>
-          </a:xfrm>
-          <a:prstGeom prst="rect">
-            <a:avLst/>
-          </a:prstGeom>
-        </p:spPr>
-      </p:pic>
-      <p:sp>
-        <p:nvSpPr>
-          <p:cNvPr id="24008" name="Text 4"/>
-          <p:cNvSpPr txBox="1"/>
-          <p:nvPr/>
-        </p:nvSpPr>
-        <p:spPr>
-          <a:xfrm>
-            <a:off x="1261872" y="2843784"/>
-            <a:ext cx="4590288" cy="1280160"/>
-          </a:xfrm>
-          <a:prstGeom prst="rect">
-            <a:avLst/>
-          </a:prstGeom>
-          <a:noFill/>
-          <a:ln/>
-        </p:spPr>
-        <p:txBody>
-          <a:bodyPr wrap="square" lIns="0" tIns="0" rIns="0" bIns="0" rtlCol="0" anchor="t"/>
-          <a:lstStyle/>
-          <a:p>
-            <a:pPr indent="0" marL="0">
-              <a:spcAft>
-                <a:spcPts val="200"/>
-              </a:spcAft>
-              <a:buNone/>
-            </a:pPr>
-            <a:r>
-              <a:rPr lang="en-US" sz="1700" b="1" dirty="0">
-                <a:solidFill>
-                  <a:schemeClr val="tx1"/>
-                </a:solidFill>
-              </a:rPr>
-              <a:t>No seams between the tiles</a:t>
-            </a:r>
-            <a:endParaRPr lang="en-US" sz="1700" dirty="0"/>
-          </a:p>
-          <a:p>
-            <a:pPr indent="0" marL="0">
-              <a:spcAft>
-                <a:spcPts val="200"/>
-              </a:spcAft>
-              <a:buNone/>
-            </a:pPr>
-            <a:r>
-              <a:rPr lang="en-US" sz="1400" dirty="0">
-                <a:solidFill>
-                  <a:schemeClr val="accent4"/>
-                </a:solidFill>
-              </a:rPr>
-              <a:t>Tiles are drawn 1 pixel larger, also at 110 and 125 % display scaling</a:t>
-            </a:r>
-            <a:endParaRPr lang="en-US" sz="1700" dirty="0"/>
-          </a:p>
-        </p:txBody>
-      </p:sp>
-      <p:sp>
-        <p:nvSpPr>
-          <p:cNvPr id="24009" name="Ikon ring sirkel"/>
-          <p:cNvSpPr/>
-          <p:nvPr/>
-        </p:nvSpPr>
-        <p:spPr>
-          <a:xfrm>
-            <a:off x="548640" y="4242816"/>
-            <a:ext cx="512064" cy="512064"/>
-          </a:xfrm>
-          <a:prstGeom prst="ellipse">
-            <a:avLst/>
-          </a:prstGeom>
-          <a:solidFill>
-            <a:schemeClr val="accent1"/>
-          </a:solidFill>
-          <a:ln/>
-        </p:spPr>
-      </p:sp>
-      <p:pic>
-        <p:nvPicPr>
-          <p:cNvPr id="24010" name="Ikon ring" descr="ring">    </p:cNvPr>
-          <p:cNvPicPr>
-            <a:picLocks noChangeAspect="1"/>
-          </p:cNvPicPr>
-          <p:nvPr/>
-        </p:nvPicPr>
-        <p:blipFill>
-          <a:blip r:embed="rId3"/>
-          <a:stretch>
-            <a:fillRect/>
-          </a:stretch>
-        </p:blipFill>
-        <p:spPr>
-          <a:xfrm>
-            <a:off x="661294" y="4355470"/>
-            <a:ext cx="286756" cy="286756"/>
-          </a:xfrm>
-          <a:prstGeom prst="rect">
-            <a:avLst/>
-          </a:prstGeom>
-        </p:spPr>
-      </p:pic>
-      <p:sp>
-        <p:nvSpPr>
-          <p:cNvPr id="24011" name="Text 6"/>
-          <p:cNvSpPr txBox="1"/>
-          <p:nvPr/>
-        </p:nvSpPr>
-        <p:spPr>
-          <a:xfrm>
-            <a:off x="1261872" y="4169664"/>
-            <a:ext cx="4590288" cy="1280160"/>
-          </a:xfrm>
-          <a:prstGeom prst="rect">
-            <a:avLst/>
-          </a:prstGeom>
-          <a:noFill/>
-          <a:ln/>
-        </p:spPr>
-        <p:txBody>
-          <a:bodyPr wrap="square" lIns="0" tIns="0" rIns="0" bIns="0" rtlCol="0" anchor="t"/>
-          <a:lstStyle/>
-          <a:p>
-            <a:pPr indent="0" marL="0">
-              <a:spcAft>
-                <a:spcPts val="200"/>
-              </a:spcAft>
-              <a:buNone/>
-            </a:pPr>
-            <a:r>
-              <a:rPr lang="en-US" sz="1700" b="1" dirty="0">
-                <a:solidFill>
-                  <a:schemeClr val="tx1"/>
-                </a:solidFill>
-              </a:rPr>
-              <a:t>Fading without show-through</a:t>
-            </a:r>
-            <a:endParaRPr lang="en-US" sz="1700" dirty="0"/>
-          </a:p>
-          <a:p>
-            <a:pPr indent="0" marL="0">
-              <a:spcAft>
-                <a:spcPts val="200"/>
-              </a:spcAft>
-              <a:buNone/>
-            </a:pPr>
-            <a:r>
-              <a:rPr lang="en-US" sz="1400" dirty="0">
-                <a:solidFill>
-                  <a:schemeClr val="accent4"/>
-                </a:solidFill>
-              </a:rPr>
-              <a:t>A colour filter bleaches the map towards white – the site's map never shows through</a:t>
-            </a:r>
-            <a:endParaRPr lang="en-US" sz="1700" dirty="0"/>
-          </a:p>
-        </p:txBody>
-      </p:sp>
-      <p:sp>
-        <p:nvSpPr>
-          <p:cNvPr id="24012" name="Ikon locate sirkel"/>
-          <p:cNvSpPr/>
-          <p:nvPr/>
-        </p:nvSpPr>
-        <p:spPr>
-          <a:xfrm>
-            <a:off x="6355080" y="1591056"/>
-            <a:ext cx="512064" cy="512064"/>
-          </a:xfrm>
-          <a:prstGeom prst="ellipse">
-            <a:avLst/>
-          </a:prstGeom>
-          <a:solidFill>
-            <a:schemeClr val="accent1"/>
-          </a:solidFill>
-          <a:ln/>
-        </p:spPr>
-      </p:sp>
-      <p:pic>
-        <p:nvPicPr>
-          <p:cNvPr id="24013" name="Ikon locate" descr="locate">    </p:cNvPr>
-          <p:cNvPicPr>
-            <a:picLocks noChangeAspect="1"/>
-          </p:cNvPicPr>
-          <p:nvPr/>
-        </p:nvPicPr>
-        <p:blipFill>
-          <a:blip r:embed="rId4"/>
-          <a:stretch>
-            <a:fillRect/>
-          </a:stretch>
-        </p:blipFill>
-        <p:spPr>
-          <a:xfrm>
-            <a:off x="6467734" y="1703710"/>
-            <a:ext cx="286756" cy="286756"/>
-          </a:xfrm>
-          <a:prstGeom prst="rect">
-            <a:avLst/>
-          </a:prstGeom>
-        </p:spPr>
-      </p:pic>
-      <p:sp>
-        <p:nvSpPr>
-          <p:cNvPr id="24014" name="Text 8"/>
-          <p:cNvSpPr txBox="1"/>
-          <p:nvPr/>
-        </p:nvSpPr>
-        <p:spPr>
-          <a:xfrm>
-            <a:off x="7068312" y="1517904"/>
-            <a:ext cx="4590288" cy="1280160"/>
-          </a:xfrm>
-          <a:prstGeom prst="rect">
-            <a:avLst/>
-          </a:prstGeom>
-          <a:noFill/>
-          <a:ln/>
-        </p:spPr>
-        <p:txBody>
-          <a:bodyPr wrap="square" lIns="0" tIns="0" rIns="0" bIns="0" rtlCol="0" anchor="t"/>
-          <a:lstStyle/>
-          <a:p>
-            <a:pPr indent="0" marL="0">
-              <a:spcAft>
-                <a:spcPts val="200"/>
-              </a:spcAft>
-              <a:buNone/>
-            </a:pPr>
-            <a:r>
-              <a:rPr lang="en-US" sz="1700" b="1" dirty="0">
-                <a:solidFill>
-                  <a:schemeClr val="tx1"/>
-                </a:solidFill>
-              </a:rPr>
-              <a:t>Finds the map by itself</a:t>
-            </a:r>
-            <a:endParaRPr lang="en-US" sz="1700" dirty="0"/>
-          </a:p>
-          <a:p>
-            <a:pPr indent="0" marL="0">
-              <a:spcAft>
-                <a:spcPts val="200"/>
-              </a:spcAft>
-              <a:buNone/>
-            </a:pPr>
-            <a:r>
-              <a:rPr lang="en-US" sz="1400" dirty="0">
-                <a:solidFill>
-                  <a:schemeClr val="accent4"/>
-                </a:solidFill>
-              </a:rPr>
-              <a:t>Catches Leaflet as the page loads, also on /play/map and the cache pages</a:t>
-            </a:r>
-            <a:endParaRPr lang="en-US" sz="1700" dirty="0"/>
-          </a:p>
-        </p:txBody>
-      </p:sp>
-      <p:sp>
-        <p:nvSpPr>
-          <p:cNvPr id="24015" name="Ikon check sirkel"/>
-          <p:cNvSpPr/>
-          <p:nvPr/>
-        </p:nvSpPr>
-        <p:spPr>
-          <a:xfrm>
-            <a:off x="6355080" y="2916936"/>
-            <a:ext cx="512064" cy="512064"/>
-          </a:xfrm>
-          <a:prstGeom prst="ellipse">
-            <a:avLst/>
-          </a:prstGeom>
-          <a:solidFill>
-            <a:schemeClr val="accent1"/>
-          </a:solidFill>
-          <a:ln/>
-        </p:spPr>
-      </p:sp>
-      <p:pic>
-        <p:nvPicPr>
-          <p:cNvPr id="24016" name="Ikon check" descr="check">    </p:cNvPr>
-          <p:cNvPicPr>
-            <a:picLocks noChangeAspect="1"/>
-          </p:cNvPicPr>
-          <p:nvPr/>
-        </p:nvPicPr>
-        <p:blipFill>
-          <a:blip r:embed="rId5"/>
-          <a:stretch>
-            <a:fillRect/>
-          </a:stretch>
-        </p:blipFill>
-        <p:spPr>
-          <a:xfrm>
-            <a:off x="6467734" y="3029590"/>
-            <a:ext cx="286756" cy="286756"/>
-          </a:xfrm>
-          <a:prstGeom prst="rect">
-            <a:avLst/>
-          </a:prstGeom>
-        </p:spPr>
-      </p:pic>
-      <p:sp>
-        <p:nvSpPr>
-          <p:cNvPr id="24017" name="Text 10"/>
-          <p:cNvSpPr txBox="1"/>
-          <p:nvPr/>
-        </p:nvSpPr>
-        <p:spPr>
-          <a:xfrm>
-            <a:off x="7068312" y="2843784"/>
-            <a:ext cx="4590288" cy="1280160"/>
-          </a:xfrm>
-          <a:prstGeom prst="rect">
-            <a:avLst/>
-          </a:prstGeom>
-          <a:noFill/>
-          <a:ln/>
-        </p:spPr>
-        <p:txBody>
-          <a:bodyPr wrap="square" lIns="0" tIns="0" rIns="0" bIns="0" rtlCol="0" anchor="t"/>
-          <a:lstStyle/>
-          <a:p>
-            <a:pPr indent="0" marL="0">
-              <a:spcAft>
-                <a:spcPts val="200"/>
-              </a:spcAft>
-              <a:buNone/>
-            </a:pPr>
-            <a:r>
-              <a:rPr lang="en-US" sz="1700" b="1" dirty="0">
-                <a:solidFill>
-                  <a:schemeClr val="tx1"/>
-                </a:solidFill>
-              </a:rPr>
-              <a:t>Leaves the form alone</a:t>
-            </a:r>
-            <a:endParaRPr lang="en-US" sz="1700" dirty="0"/>
-          </a:p>
-          <a:p>
-            <a:pPr indent="0" marL="0">
-              <a:spcAft>
-                <a:spcPts val="200"/>
-              </a:spcAft>
-              <a:buNone/>
-            </a:pPr>
-            <a:r>
-              <a:rPr lang="en-US" sz="1400" dirty="0">
-                <a:solidFill>
-                  <a:schemeClr val="accent4"/>
-                </a:solidFill>
-              </a:rPr>
-              <a:t>No button can submit the page's ASP.NET form, so the page never reloads</a:t>
-            </a:r>
-            <a:endParaRPr lang="en-US" sz="1700" dirty="0"/>
-          </a:p>
-        </p:txBody>
-      </p:sp>
-      <p:sp>
-        <p:nvSpPr>
-          <p:cNvPr id="24018" name="Ikon search sirkel"/>
-          <p:cNvSpPr/>
-          <p:nvPr/>
-        </p:nvSpPr>
-        <p:spPr>
-          <a:xfrm>
-            <a:off x="6355080" y="4242816"/>
-            <a:ext cx="512064" cy="512064"/>
-          </a:xfrm>
-          <a:prstGeom prst="ellipse">
-            <a:avLst/>
-          </a:prstGeom>
-          <a:solidFill>
-            <a:schemeClr val="accent1"/>
-          </a:solidFill>
-          <a:ln/>
-        </p:spPr>
-      </p:sp>
-      <p:pic>
-        <p:nvPicPr>
-          <p:cNvPr id="24019" name="Ikon search" descr="search">    </p:cNvPr>
-          <p:cNvPicPr>
-            <a:picLocks noChangeAspect="1"/>
-          </p:cNvPicPr>
-          <p:nvPr/>
-        </p:nvPicPr>
-        <p:blipFill>
-          <a:blip r:embed="rId6"/>
-          <a:stretch>
-            <a:fillRect/>
-          </a:stretch>
-        </p:blipFill>
-        <p:spPr>
-          <a:xfrm>
-            <a:off x="6467734" y="4355470"/>
-            <a:ext cx="286756" cy="286756"/>
-          </a:xfrm>
-          <a:prstGeom prst="rect">
-            <a:avLst/>
-          </a:prstGeom>
-        </p:spPr>
-      </p:pic>
-      <p:sp>
-        <p:nvSpPr>
-          <p:cNvPr id="24020" name="Text 12"/>
-          <p:cNvSpPr txBox="1"/>
-          <p:nvPr/>
-        </p:nvSpPr>
-        <p:spPr>
-          <a:xfrm>
-            <a:off x="7068312" y="4169664"/>
-            <a:ext cx="4590288" cy="1280160"/>
-          </a:xfrm>
-          <a:prstGeom prst="rect">
-            <a:avLst/>
-          </a:prstGeom>
-          <a:noFill/>
-          <a:ln/>
-        </p:spPr>
-        <p:txBody>
-          <a:bodyPr wrap="square" lIns="0" tIns="0" rIns="0" bIns="0" rtlCol="0" anchor="t"/>
-          <a:lstStyle/>
-          <a:p>
-            <a:pPr indent="0" marL="0">
-              <a:spcAft>
-                <a:spcPts val="200"/>
-              </a:spcAft>
-              <a:buNone/>
-            </a:pPr>
-            <a:r>
-              <a:rPr lang="en-US" sz="1700" b="1" dirty="0">
-                <a:solidFill>
-                  <a:schemeClr val="tx1"/>
-                </a:solidFill>
-              </a:rPr>
-              <a:t>Built-in troubleshooting</a:t>
-            </a:r>
-            <a:endParaRPr lang="en-US" sz="1700" dirty="0"/>
-          </a:p>
-          <a:p>
-            <a:pPr indent="0" marL="0">
-              <a:spcAft>
-                <a:spcPts val="200"/>
-              </a:spcAft>
-              <a:buNone/>
-            </a:pPr>
-            <a:r>
-              <a:rPr lang="en-US" sz="1400" dirty="0">
-                <a:solidFill>
-                  <a:schemeClr val="accent4"/>
-                </a:solidFill>
-              </a:rPr>
-              <a:t>gcctReport(), gcctCacheDebug(), gcctStageTest() and gcctSnapTest() in the console give short reports without personal data</a:t>
-            </a:r>
-            <a:endParaRPr lang="en-US" sz="1700" dirty="0"/>
-          </a:p>
-        </p:txBody>
-      </p:sp>
-      <p:sp>
-        <p:nvSpPr>
-          <p:cNvPr id="24021" name="Slide Number Placeholder 0"/>
+              <a:t>bz = the z-index of the site's background. On /play/map the site's background is a vector map (WebGL). On /map an invisible cache grid (UTFGrid) is loaded as well, used for the 161 m circles and for snapping the right-click popup to caches.</a:t>
+            </a:r>
+            <a:endParaRPr lang="en-US" sz="1150" dirty="0"/>
+          </a:p>
+        </p:txBody>
+      </p:sp>
+      <p:sp>
+        <p:nvSpPr>
+          <p:cNvPr id="24042" name="Slide Number Placeholder 0"/>
           <p:cNvSpPr>
             <a:spLocks noGrp="1"/>
           </p:cNvSpPr>
@@ -6710,7 +6646,7 @@
                   <a:schemeClr val="tx2"/>
                 </a:solidFill>
               </a:rPr>
-              <a:t>Get started in three minutes</a:t>
+              <a:t>Under the hood</a:t>
             </a:r>
             <a:endParaRPr lang="en-US" sz="3600" dirty="0"/>
           </a:p>
@@ -6718,14 +6654,14 @@
       </p:sp>
       <p:sp>
         <p:nvSpPr>
-          <p:cNvPr id="25003" name="Steg 1"/>
+          <p:cNvPr id="25003" name="Ikon layers sirkel"/>
           <p:cNvSpPr/>
           <p:nvPr/>
         </p:nvSpPr>
         <p:spPr>
           <a:xfrm>
-            <a:off x="548640" y="1463040"/>
-            <a:ext cx="731520" cy="731520"/>
+            <a:off x="548640" y="1591056"/>
+            <a:ext cx="512064" cy="512064"/>
           </a:xfrm>
           <a:prstGeom prst="ellipse">
             <a:avLst/>
@@ -6736,367 +6672,9 @@
           <a:ln/>
         </p:spPr>
       </p:sp>
-      <p:sp>
-        <p:nvSpPr>
-          <p:cNvPr id="25004" name="Text 2"/>
-          <p:cNvSpPr txBox="1"/>
-          <p:nvPr/>
-        </p:nvSpPr>
-        <p:spPr>
-          <a:xfrm>
-            <a:off x="548640" y="1463040"/>
-            <a:ext cx="731520" cy="731520"/>
-          </a:xfrm>
-          <a:prstGeom prst="rect">
-            <a:avLst/>
-          </a:prstGeom>
-          <a:noFill/>
-          <a:ln/>
-        </p:spPr>
-        <p:txBody>
-          <a:bodyPr wrap="square" lIns="0" tIns="0" rIns="0" bIns="0" rtlCol="0" anchor="ctr"/>
-          <a:lstStyle/>
-          <a:p>
-            <a:pPr algn="ctr" indent="0" marL="0">
-              <a:buNone/>
-            </a:pPr>
-            <a:r>
-              <a:rPr lang="en-US" sz="2600" b="1" dirty="0">
-                <a:solidFill>
-                  <a:schemeClr val="bg1"/>
-                </a:solidFill>
-              </a:rPr>
-              <a:t>1</a:t>
-            </a:r>
-            <a:endParaRPr lang="en-US" sz="2600" dirty="0"/>
-          </a:p>
-        </p:txBody>
-      </p:sp>
-      <p:sp>
-        <p:nvSpPr>
-          <p:cNvPr id="25005" name="Text 3"/>
-          <p:cNvSpPr txBox="1"/>
-          <p:nvPr/>
-        </p:nvSpPr>
-        <p:spPr>
-          <a:xfrm>
-            <a:off x="548640" y="2377440"/>
-            <a:ext cx="3301898" cy="1463040"/>
-          </a:xfrm>
-          <a:prstGeom prst="rect">
-            <a:avLst/>
-          </a:prstGeom>
-          <a:noFill/>
-          <a:ln/>
-        </p:spPr>
-        <p:txBody>
-          <a:bodyPr wrap="square" lIns="0" tIns="0" rIns="0" bIns="0" rtlCol="0" anchor="t"/>
-          <a:lstStyle/>
-          <a:p>
-            <a:pPr indent="0" marL="0">
-              <a:spcAft>
-                <a:spcPts val="400"/>
-              </a:spcAft>
-              <a:buNone/>
-            </a:pPr>
-            <a:r>
-              <a:rPr lang="en-US" sz="1900" b="1" dirty="0">
-                <a:solidFill>
-                  <a:schemeClr val="tx1"/>
-                </a:solidFill>
-              </a:rPr>
-              <a:t>Install a userscript manager</a:t>
-            </a:r>
-            <a:endParaRPr lang="en-US" sz="1900" dirty="0"/>
-          </a:p>
-          <a:p>
-            <a:pPr indent="0" marL="0">
-              <a:spcAft>
-                <a:spcPts val="400"/>
-              </a:spcAft>
-              <a:buNone/>
-            </a:pPr>
-            <a:r>
-              <a:rPr lang="en-US" sz="1400" dirty="0">
-                <a:solidFill>
-                  <a:schemeClr val="accent4"/>
-                </a:solidFill>
-              </a:rPr>
-              <a:t>Tampermonkey or Violentmonkey in Chrome, Edge, Firefox or Safari</a:t>
-            </a:r>
-            <a:endParaRPr lang="en-US" sz="1900" dirty="0"/>
-          </a:p>
-        </p:txBody>
-      </p:sp>
-      <p:sp>
-        <p:nvSpPr>
-          <p:cNvPr id="25006" name="Steg 2"/>
-          <p:cNvSpPr/>
-          <p:nvPr/>
-        </p:nvSpPr>
-        <p:spPr>
-          <a:xfrm>
-            <a:off x="4353458" y="1463040"/>
-            <a:ext cx="731520" cy="731520"/>
-          </a:xfrm>
-          <a:prstGeom prst="ellipse">
-            <a:avLst/>
-          </a:prstGeom>
-          <a:solidFill>
-            <a:schemeClr val="accent1"/>
-          </a:solidFill>
-          <a:ln/>
-        </p:spPr>
-      </p:sp>
-      <p:sp>
-        <p:nvSpPr>
-          <p:cNvPr id="25007" name="Text 5"/>
-          <p:cNvSpPr txBox="1"/>
-          <p:nvPr/>
-        </p:nvSpPr>
-        <p:spPr>
-          <a:xfrm>
-            <a:off x="4353458" y="1463040"/>
-            <a:ext cx="731520" cy="731520"/>
-          </a:xfrm>
-          <a:prstGeom prst="rect">
-            <a:avLst/>
-          </a:prstGeom>
-          <a:noFill/>
-          <a:ln/>
-        </p:spPr>
-        <p:txBody>
-          <a:bodyPr wrap="square" lIns="0" tIns="0" rIns="0" bIns="0" rtlCol="0" anchor="ctr"/>
-          <a:lstStyle/>
-          <a:p>
-            <a:pPr algn="ctr" indent="0" marL="0">
-              <a:buNone/>
-            </a:pPr>
-            <a:r>
-              <a:rPr lang="en-US" sz="2600" b="1" dirty="0">
-                <a:solidFill>
-                  <a:schemeClr val="bg1"/>
-                </a:solidFill>
-              </a:rPr>
-              <a:t>2</a:t>
-            </a:r>
-            <a:endParaRPr lang="en-US" sz="2600" dirty="0"/>
-          </a:p>
-        </p:txBody>
-      </p:sp>
-      <p:sp>
-        <p:nvSpPr>
-          <p:cNvPr id="25008" name="Text 6"/>
-          <p:cNvSpPr txBox="1"/>
-          <p:nvPr/>
-        </p:nvSpPr>
-        <p:spPr>
-          <a:xfrm>
-            <a:off x="4353458" y="2377440"/>
-            <a:ext cx="3301898" cy="1463040"/>
-          </a:xfrm>
-          <a:prstGeom prst="rect">
-            <a:avLst/>
-          </a:prstGeom>
-          <a:noFill/>
-          <a:ln/>
-        </p:spPr>
-        <p:txBody>
-          <a:bodyPr wrap="square" lIns="0" tIns="0" rIns="0" bIns="0" rtlCol="0" anchor="t"/>
-          <a:lstStyle/>
-          <a:p>
-            <a:pPr indent="0" marL="0">
-              <a:spcAft>
-                <a:spcPts val="400"/>
-              </a:spcAft>
-              <a:buNone/>
-            </a:pPr>
-            <a:r>
-              <a:rPr lang="en-US" sz="1900" b="1" dirty="0">
-                <a:solidFill>
-                  <a:schemeClr val="tx1"/>
-                </a:solidFill>
-              </a:rPr>
-              <a:t>Add the script</a:t>
-            </a:r>
-            <a:endParaRPr lang="en-US" sz="1900" dirty="0"/>
-          </a:p>
-          <a:p>
-            <a:pPr indent="0" marL="0">
-              <a:spcAft>
-                <a:spcPts val="400"/>
-              </a:spcAft>
-              <a:buNone/>
-            </a:pPr>
-            <a:r>
-              <a:rPr lang="en-US" sz="1400" dirty="0">
-                <a:solidFill>
-                  <a:schemeClr val="accent4"/>
-                </a:solidFill>
-              </a:rPr>
-              <a:t>Open geocaching-custom-tiles.user.js and save it in the manager</a:t>
-            </a:r>
-            <a:endParaRPr lang="en-US" sz="1900" dirty="0"/>
-          </a:p>
-        </p:txBody>
-      </p:sp>
-      <p:sp>
-        <p:nvSpPr>
-          <p:cNvPr id="25009" name="Steg 3"/>
-          <p:cNvSpPr/>
-          <p:nvPr/>
-        </p:nvSpPr>
-        <p:spPr>
-          <a:xfrm>
-            <a:off x="8158277" y="1463040"/>
-            <a:ext cx="731520" cy="731520"/>
-          </a:xfrm>
-          <a:prstGeom prst="ellipse">
-            <a:avLst/>
-          </a:prstGeom>
-          <a:solidFill>
-            <a:schemeClr val="accent1"/>
-          </a:solidFill>
-          <a:ln/>
-        </p:spPr>
-      </p:sp>
-      <p:sp>
-        <p:nvSpPr>
-          <p:cNvPr id="25010" name="Text 8"/>
-          <p:cNvSpPr txBox="1"/>
-          <p:nvPr/>
-        </p:nvSpPr>
-        <p:spPr>
-          <a:xfrm>
-            <a:off x="8158277" y="1463040"/>
-            <a:ext cx="731520" cy="731520"/>
-          </a:xfrm>
-          <a:prstGeom prst="rect">
-            <a:avLst/>
-          </a:prstGeom>
-          <a:noFill/>
-          <a:ln/>
-        </p:spPr>
-        <p:txBody>
-          <a:bodyPr wrap="square" lIns="0" tIns="0" rIns="0" bIns="0" rtlCol="0" anchor="ctr"/>
-          <a:lstStyle/>
-          <a:p>
-            <a:pPr algn="ctr" indent="0" marL="0">
-              <a:buNone/>
-            </a:pPr>
-            <a:r>
-              <a:rPr lang="en-US" sz="2600" b="1" dirty="0">
-                <a:solidFill>
-                  <a:schemeClr val="bg1"/>
-                </a:solidFill>
-              </a:rPr>
-              <a:t>3</a:t>
-            </a:r>
-            <a:endParaRPr lang="en-US" sz="2600" dirty="0"/>
-          </a:p>
-        </p:txBody>
-      </p:sp>
-      <p:sp>
-        <p:nvSpPr>
-          <p:cNvPr id="25011" name="Text 9"/>
-          <p:cNvSpPr txBox="1"/>
-          <p:nvPr/>
-        </p:nvSpPr>
-        <p:spPr>
-          <a:xfrm>
-            <a:off x="8158277" y="2377440"/>
-            <a:ext cx="3301898" cy="1463040"/>
-          </a:xfrm>
-          <a:prstGeom prst="rect">
-            <a:avLst/>
-          </a:prstGeom>
-          <a:noFill/>
-          <a:ln/>
-        </p:spPr>
-        <p:txBody>
-          <a:bodyPr wrap="square" lIns="0" tIns="0" rIns="0" bIns="0" rtlCol="0" anchor="t"/>
-          <a:lstStyle/>
-          <a:p>
-            <a:pPr indent="0" marL="0">
-              <a:spcAft>
-                <a:spcPts val="400"/>
-              </a:spcAft>
-              <a:buNone/>
-            </a:pPr>
-            <a:r>
-              <a:rPr lang="en-US" sz="1900" b="1" dirty="0">
-                <a:solidFill>
-                  <a:schemeClr val="tx1"/>
-                </a:solidFill>
-              </a:rPr>
-              <a:t>Open a map</a:t>
-            </a:r>
-            <a:endParaRPr lang="en-US" sz="1900" dirty="0"/>
-          </a:p>
-          <a:p>
-            <a:pPr indent="0" marL="0">
-              <a:spcAft>
-                <a:spcPts val="400"/>
-              </a:spcAft>
-              <a:buNone/>
-            </a:pPr>
-            <a:r>
-              <a:rPr lang="en-US" sz="1400" dirty="0">
-                <a:solidFill>
-                  <a:schemeClr val="accent4"/>
-                </a:solidFill>
-              </a:rPr>
-              <a:t>geocaching.com/map or /play/map – the toolbar appears on the right</a:t>
-            </a:r>
-            <a:endParaRPr lang="en-US" sz="1900" dirty="0"/>
-          </a:p>
-        </p:txBody>
-      </p:sp>
-      <p:sp>
-        <p:nvSpPr>
-          <p:cNvPr id="25012" name="Personvern"/>
-          <p:cNvSpPr/>
-          <p:nvPr/>
-        </p:nvSpPr>
-        <p:spPr>
-          <a:xfrm>
-            <a:off x="548640" y="3977640"/>
-            <a:ext cx="11094415" cy="1783080"/>
-          </a:xfrm>
-          <a:prstGeom prst="roundRect">
-            <a:avLst>
-              <a:gd name="adj" fmla="val 6154"/>
-            </a:avLst>
-          </a:prstGeom>
-          <a:solidFill>
-            <a:schemeClr val="bg2"/>
-          </a:solidFill>
-          <a:ln/>
-        </p:spPr>
-      </p:sp>
-      <p:sp>
-        <p:nvSpPr>
-          <p:cNvPr id="25013" name="Ikon check sirkel"/>
-          <p:cNvSpPr/>
-          <p:nvPr/>
-        </p:nvSpPr>
-        <p:spPr>
-          <a:xfrm>
-            <a:off x="868680" y="4251960"/>
-            <a:ext cx="640080" cy="640080"/>
-          </a:xfrm>
-          <a:prstGeom prst="ellipse">
-            <a:avLst/>
-          </a:prstGeom>
-          <a:solidFill>
-            <a:schemeClr val="accent1"/>
-          </a:solidFill>
-          <a:ln/>
-        </p:spPr>
-      </p:sp>
       <p:pic>
         <p:nvPicPr>
-          <p:cNvPr id="25014" name="Ikon check" descr="check">    </p:cNvPr>
+          <p:cNvPr id="25004" name="Ikon layers" descr="layers">    </p:cNvPr>
           <p:cNvPicPr>
             <a:picLocks noChangeAspect="1"/>
           </p:cNvPicPr>
@@ -7110,8 +6688,8 @@
         </p:blipFill>
         <p:spPr>
           <a:xfrm>
-            <a:off x="1009498" y="4392778"/>
-            <a:ext cx="358445" cy="358445"/>
+            <a:off x="661294" y="1703710"/>
+            <a:ext cx="286756" cy="286756"/>
           </a:xfrm>
           <a:prstGeom prst="rect">
             <a:avLst/>
@@ -7120,14 +6698,14 @@
       </p:pic>
       <p:sp>
         <p:nvSpPr>
-          <p:cNvPr id="25015" name="Text 12"/>
+          <p:cNvPr id="25005" name="Text 2"/>
           <p:cNvSpPr txBox="1"/>
           <p:nvPr/>
         </p:nvSpPr>
         <p:spPr>
           <a:xfrm>
-            <a:off x="1737360" y="4206240"/>
-            <a:ext cx="9585655" cy="1417320"/>
+            <a:off x="1261872" y="1517904"/>
+            <a:ext cx="4590288" cy="1280160"/>
           </a:xfrm>
           <a:prstGeom prst="rect">
             <a:avLst/>
@@ -7141,42 +6719,542 @@
           <a:p>
             <a:pPr indent="0" marL="0">
               <a:spcAft>
-                <a:spcPts val="400"/>
+                <a:spcPts val="200"/>
               </a:spcAft>
               <a:buNone/>
             </a:pPr>
             <a:r>
-              <a:rPr lang="en-US" sz="1900" b="1" dirty="0">
+              <a:rPr lang="en-US" sz="1700" b="1" dirty="0">
                 <a:solidFill>
                   <a:schemeClr val="tx1"/>
                 </a:solidFill>
               </a:rPr>
-              <a:t>Privacy</a:t>
-            </a:r>
-            <a:endParaRPr lang="en-US" sz="1900" dirty="0"/>
+              <a:t>Never removes the site's layers</a:t>
+            </a:r>
+            <a:endParaRPr lang="en-US" sz="1700" dirty="0"/>
           </a:p>
           <a:p>
             <a:pPr indent="0" marL="0">
               <a:spcAft>
-                <a:spcPts val="400"/>
+                <a:spcPts val="200"/>
               </a:spcAft>
               <a:buNone/>
             </a:pPr>
             <a:r>
-              <a:rPr lang="en-US" sz="1500" dirty="0">
+              <a:rPr lang="en-US" sz="1400" dirty="0">
+                <a:solidFill>
+                  <a:schemeClr val="accent4"/>
+                </a:solidFill>
+              </a:rPr>
+              <a:t>The script slots its own layers in between, sorted by z-index</a:t>
+            </a:r>
+            <a:endParaRPr lang="en-US" sz="1700" dirty="0"/>
+          </a:p>
+        </p:txBody>
+      </p:sp>
+      <p:sp>
+        <p:nvSpPr>
+          <p:cNvPr id="25006" name="Ikon eraser sirkel"/>
+          <p:cNvSpPr/>
+          <p:nvPr/>
+        </p:nvSpPr>
+        <p:spPr>
+          <a:xfrm>
+            <a:off x="548640" y="2916936"/>
+            <a:ext cx="512064" cy="512064"/>
+          </a:xfrm>
+          <a:prstGeom prst="ellipse">
+            <a:avLst/>
+          </a:prstGeom>
+          <a:solidFill>
+            <a:schemeClr val="accent1"/>
+          </a:solidFill>
+          <a:ln/>
+        </p:spPr>
+      </p:sp>
+      <p:pic>
+        <p:nvPicPr>
+          <p:cNvPr id="25007" name="Ikon eraser" descr="eraser">    </p:cNvPr>
+          <p:cNvPicPr>
+            <a:picLocks noChangeAspect="1"/>
+          </p:cNvPicPr>
+          <p:nvPr/>
+        </p:nvPicPr>
+        <p:blipFill>
+          <a:blip r:embed="rId2"/>
+          <a:stretch>
+            <a:fillRect/>
+          </a:stretch>
+        </p:blipFill>
+        <p:spPr>
+          <a:xfrm>
+            <a:off x="661294" y="3029590"/>
+            <a:ext cx="286756" cy="286756"/>
+          </a:xfrm>
+          <a:prstGeom prst="rect">
+            <a:avLst/>
+          </a:prstGeom>
+        </p:spPr>
+      </p:pic>
+      <p:sp>
+        <p:nvSpPr>
+          <p:cNvPr id="25008" name="Text 4"/>
+          <p:cNvSpPr txBox="1"/>
+          <p:nvPr/>
+        </p:nvSpPr>
+        <p:spPr>
+          <a:xfrm>
+            <a:off x="1261872" y="2843784"/>
+            <a:ext cx="4590288" cy="1280160"/>
+          </a:xfrm>
+          <a:prstGeom prst="rect">
+            <a:avLst/>
+          </a:prstGeom>
+          <a:noFill/>
+          <a:ln/>
+        </p:spPr>
+        <p:txBody>
+          <a:bodyPr wrap="square" lIns="0" tIns="0" rIns="0" bIns="0" rtlCol="0" anchor="t"/>
+          <a:lstStyle/>
+          <a:p>
+            <a:pPr indent="0" marL="0">
+              <a:spcAft>
+                <a:spcPts val="200"/>
+              </a:spcAft>
+              <a:buNone/>
+            </a:pPr>
+            <a:r>
+              <a:rPr lang="en-US" sz="1700" b="1" dirty="0">
                 <a:solidFill>
                   <a:schemeClr val="tx1"/>
                 </a:solidFill>
               </a:rPr>
-              <a:t>The script collects and sends no personal data and has no server of its own. It only contacts the map servers you switch on, Kartverket and Photon when you search, and geocaching.com's own cache search and cache pages when the 161 m circles are on. Your location is only requested when you ask for it. All settings are stored in the browser.</a:t>
-            </a:r>
-            <a:endParaRPr lang="en-US" sz="1900" dirty="0"/>
-          </a:p>
-        </p:txBody>
-      </p:sp>
-      <p:sp>
-        <p:nvSpPr>
-          <p:cNvPr id="25016" name="Slide Number Placeholder 0"/>
+              <a:t>No seams between the tiles</a:t>
+            </a:r>
+            <a:endParaRPr lang="en-US" sz="1700" dirty="0"/>
+          </a:p>
+          <a:p>
+            <a:pPr indent="0" marL="0">
+              <a:spcAft>
+                <a:spcPts val="200"/>
+              </a:spcAft>
+              <a:buNone/>
+            </a:pPr>
+            <a:r>
+              <a:rPr lang="en-US" sz="1400" dirty="0">
+                <a:solidFill>
+                  <a:schemeClr val="accent4"/>
+                </a:solidFill>
+              </a:rPr>
+              <a:t>Tiles are drawn 1 pixel larger, also at 110 and 125 % display scaling</a:t>
+            </a:r>
+            <a:endParaRPr lang="en-US" sz="1700" dirty="0"/>
+          </a:p>
+        </p:txBody>
+      </p:sp>
+      <p:sp>
+        <p:nvSpPr>
+          <p:cNvPr id="25009" name="Ikon ring sirkel"/>
+          <p:cNvSpPr/>
+          <p:nvPr/>
+        </p:nvSpPr>
+        <p:spPr>
+          <a:xfrm>
+            <a:off x="548640" y="4242816"/>
+            <a:ext cx="512064" cy="512064"/>
+          </a:xfrm>
+          <a:prstGeom prst="ellipse">
+            <a:avLst/>
+          </a:prstGeom>
+          <a:solidFill>
+            <a:schemeClr val="accent1"/>
+          </a:solidFill>
+          <a:ln/>
+        </p:spPr>
+      </p:sp>
+      <p:pic>
+        <p:nvPicPr>
+          <p:cNvPr id="25010" name="Ikon ring" descr="ring">    </p:cNvPr>
+          <p:cNvPicPr>
+            <a:picLocks noChangeAspect="1"/>
+          </p:cNvPicPr>
+          <p:nvPr/>
+        </p:nvPicPr>
+        <p:blipFill>
+          <a:blip r:embed="rId3"/>
+          <a:stretch>
+            <a:fillRect/>
+          </a:stretch>
+        </p:blipFill>
+        <p:spPr>
+          <a:xfrm>
+            <a:off x="661294" y="4355470"/>
+            <a:ext cx="286756" cy="286756"/>
+          </a:xfrm>
+          <a:prstGeom prst="rect">
+            <a:avLst/>
+          </a:prstGeom>
+        </p:spPr>
+      </p:pic>
+      <p:sp>
+        <p:nvSpPr>
+          <p:cNvPr id="25011" name="Text 6"/>
+          <p:cNvSpPr txBox="1"/>
+          <p:nvPr/>
+        </p:nvSpPr>
+        <p:spPr>
+          <a:xfrm>
+            <a:off x="1261872" y="4169664"/>
+            <a:ext cx="4590288" cy="1280160"/>
+          </a:xfrm>
+          <a:prstGeom prst="rect">
+            <a:avLst/>
+          </a:prstGeom>
+          <a:noFill/>
+          <a:ln/>
+        </p:spPr>
+        <p:txBody>
+          <a:bodyPr wrap="square" lIns="0" tIns="0" rIns="0" bIns="0" rtlCol="0" anchor="t"/>
+          <a:lstStyle/>
+          <a:p>
+            <a:pPr indent="0" marL="0">
+              <a:spcAft>
+                <a:spcPts val="200"/>
+              </a:spcAft>
+              <a:buNone/>
+            </a:pPr>
+            <a:r>
+              <a:rPr lang="en-US" sz="1700" b="1" dirty="0">
+                <a:solidFill>
+                  <a:schemeClr val="tx1"/>
+                </a:solidFill>
+              </a:rPr>
+              <a:t>Fading without show-through</a:t>
+            </a:r>
+            <a:endParaRPr lang="en-US" sz="1700" dirty="0"/>
+          </a:p>
+          <a:p>
+            <a:pPr indent="0" marL="0">
+              <a:spcAft>
+                <a:spcPts val="200"/>
+              </a:spcAft>
+              <a:buNone/>
+            </a:pPr>
+            <a:r>
+              <a:rPr lang="en-US" sz="1400" dirty="0">
+                <a:solidFill>
+                  <a:schemeClr val="accent4"/>
+                </a:solidFill>
+              </a:rPr>
+              <a:t>A colour filter bleaches the map towards white – the site's map never shows through</a:t>
+            </a:r>
+            <a:endParaRPr lang="en-US" sz="1700" dirty="0"/>
+          </a:p>
+        </p:txBody>
+      </p:sp>
+      <p:sp>
+        <p:nvSpPr>
+          <p:cNvPr id="25012" name="Ikon locate sirkel"/>
+          <p:cNvSpPr/>
+          <p:nvPr/>
+        </p:nvSpPr>
+        <p:spPr>
+          <a:xfrm>
+            <a:off x="6355080" y="1591056"/>
+            <a:ext cx="512064" cy="512064"/>
+          </a:xfrm>
+          <a:prstGeom prst="ellipse">
+            <a:avLst/>
+          </a:prstGeom>
+          <a:solidFill>
+            <a:schemeClr val="accent1"/>
+          </a:solidFill>
+          <a:ln/>
+        </p:spPr>
+      </p:sp>
+      <p:pic>
+        <p:nvPicPr>
+          <p:cNvPr id="25013" name="Ikon locate" descr="locate">    </p:cNvPr>
+          <p:cNvPicPr>
+            <a:picLocks noChangeAspect="1"/>
+          </p:cNvPicPr>
+          <p:nvPr/>
+        </p:nvPicPr>
+        <p:blipFill>
+          <a:blip r:embed="rId4"/>
+          <a:stretch>
+            <a:fillRect/>
+          </a:stretch>
+        </p:blipFill>
+        <p:spPr>
+          <a:xfrm>
+            <a:off x="6467734" y="1703710"/>
+            <a:ext cx="286756" cy="286756"/>
+          </a:xfrm>
+          <a:prstGeom prst="rect">
+            <a:avLst/>
+          </a:prstGeom>
+        </p:spPr>
+      </p:pic>
+      <p:sp>
+        <p:nvSpPr>
+          <p:cNvPr id="25014" name="Text 8"/>
+          <p:cNvSpPr txBox="1"/>
+          <p:nvPr/>
+        </p:nvSpPr>
+        <p:spPr>
+          <a:xfrm>
+            <a:off x="7068312" y="1517904"/>
+            <a:ext cx="4590288" cy="1280160"/>
+          </a:xfrm>
+          <a:prstGeom prst="rect">
+            <a:avLst/>
+          </a:prstGeom>
+          <a:noFill/>
+          <a:ln/>
+        </p:spPr>
+        <p:txBody>
+          <a:bodyPr wrap="square" lIns="0" tIns="0" rIns="0" bIns="0" rtlCol="0" anchor="t"/>
+          <a:lstStyle/>
+          <a:p>
+            <a:pPr indent="0" marL="0">
+              <a:spcAft>
+                <a:spcPts val="200"/>
+              </a:spcAft>
+              <a:buNone/>
+            </a:pPr>
+            <a:r>
+              <a:rPr lang="en-US" sz="1700" b="1" dirty="0">
+                <a:solidFill>
+                  <a:schemeClr val="tx1"/>
+                </a:solidFill>
+              </a:rPr>
+              <a:t>Finds the map by itself</a:t>
+            </a:r>
+            <a:endParaRPr lang="en-US" sz="1700" dirty="0"/>
+          </a:p>
+          <a:p>
+            <a:pPr indent="0" marL="0">
+              <a:spcAft>
+                <a:spcPts val="200"/>
+              </a:spcAft>
+              <a:buNone/>
+            </a:pPr>
+            <a:r>
+              <a:rPr lang="en-US" sz="1400" dirty="0">
+                <a:solidFill>
+                  <a:schemeClr val="accent4"/>
+                </a:solidFill>
+              </a:rPr>
+              <a:t>Catches Leaflet as the page loads, also on /play/map and the cache pages</a:t>
+            </a:r>
+            <a:endParaRPr lang="en-US" sz="1700" dirty="0"/>
+          </a:p>
+        </p:txBody>
+      </p:sp>
+      <p:sp>
+        <p:nvSpPr>
+          <p:cNvPr id="25015" name="Ikon check sirkel"/>
+          <p:cNvSpPr/>
+          <p:nvPr/>
+        </p:nvSpPr>
+        <p:spPr>
+          <a:xfrm>
+            <a:off x="6355080" y="2916936"/>
+            <a:ext cx="512064" cy="512064"/>
+          </a:xfrm>
+          <a:prstGeom prst="ellipse">
+            <a:avLst/>
+          </a:prstGeom>
+          <a:solidFill>
+            <a:schemeClr val="accent1"/>
+          </a:solidFill>
+          <a:ln/>
+        </p:spPr>
+      </p:sp>
+      <p:pic>
+        <p:nvPicPr>
+          <p:cNvPr id="25016" name="Ikon check" descr="check">    </p:cNvPr>
+          <p:cNvPicPr>
+            <a:picLocks noChangeAspect="1"/>
+          </p:cNvPicPr>
+          <p:nvPr/>
+        </p:nvPicPr>
+        <p:blipFill>
+          <a:blip r:embed="rId5"/>
+          <a:stretch>
+            <a:fillRect/>
+          </a:stretch>
+        </p:blipFill>
+        <p:spPr>
+          <a:xfrm>
+            <a:off x="6467734" y="3029590"/>
+            <a:ext cx="286756" cy="286756"/>
+          </a:xfrm>
+          <a:prstGeom prst="rect">
+            <a:avLst/>
+          </a:prstGeom>
+        </p:spPr>
+      </p:pic>
+      <p:sp>
+        <p:nvSpPr>
+          <p:cNvPr id="25017" name="Text 10"/>
+          <p:cNvSpPr txBox="1"/>
+          <p:nvPr/>
+        </p:nvSpPr>
+        <p:spPr>
+          <a:xfrm>
+            <a:off x="7068312" y="2843784"/>
+            <a:ext cx="4590288" cy="1280160"/>
+          </a:xfrm>
+          <a:prstGeom prst="rect">
+            <a:avLst/>
+          </a:prstGeom>
+          <a:noFill/>
+          <a:ln/>
+        </p:spPr>
+        <p:txBody>
+          <a:bodyPr wrap="square" lIns="0" tIns="0" rIns="0" bIns="0" rtlCol="0" anchor="t"/>
+          <a:lstStyle/>
+          <a:p>
+            <a:pPr indent="0" marL="0">
+              <a:spcAft>
+                <a:spcPts val="200"/>
+              </a:spcAft>
+              <a:buNone/>
+            </a:pPr>
+            <a:r>
+              <a:rPr lang="en-US" sz="1700" b="1" dirty="0">
+                <a:solidFill>
+                  <a:schemeClr val="tx1"/>
+                </a:solidFill>
+              </a:rPr>
+              <a:t>Leaves the form alone</a:t>
+            </a:r>
+            <a:endParaRPr lang="en-US" sz="1700" dirty="0"/>
+          </a:p>
+          <a:p>
+            <a:pPr indent="0" marL="0">
+              <a:spcAft>
+                <a:spcPts val="200"/>
+              </a:spcAft>
+              <a:buNone/>
+            </a:pPr>
+            <a:r>
+              <a:rPr lang="en-US" sz="1400" dirty="0">
+                <a:solidFill>
+                  <a:schemeClr val="accent4"/>
+                </a:solidFill>
+              </a:rPr>
+              <a:t>No button can submit the page's ASP.NET form, so the page never reloads</a:t>
+            </a:r>
+            <a:endParaRPr lang="en-US" sz="1700" dirty="0"/>
+          </a:p>
+        </p:txBody>
+      </p:sp>
+      <p:sp>
+        <p:nvSpPr>
+          <p:cNvPr id="25018" name="Ikon search sirkel"/>
+          <p:cNvSpPr/>
+          <p:nvPr/>
+        </p:nvSpPr>
+        <p:spPr>
+          <a:xfrm>
+            <a:off x="6355080" y="4242816"/>
+            <a:ext cx="512064" cy="512064"/>
+          </a:xfrm>
+          <a:prstGeom prst="ellipse">
+            <a:avLst/>
+          </a:prstGeom>
+          <a:solidFill>
+            <a:schemeClr val="accent1"/>
+          </a:solidFill>
+          <a:ln/>
+        </p:spPr>
+      </p:sp>
+      <p:pic>
+        <p:nvPicPr>
+          <p:cNvPr id="25019" name="Ikon search" descr="search">    </p:cNvPr>
+          <p:cNvPicPr>
+            <a:picLocks noChangeAspect="1"/>
+          </p:cNvPicPr>
+          <p:nvPr/>
+        </p:nvPicPr>
+        <p:blipFill>
+          <a:blip r:embed="rId6"/>
+          <a:stretch>
+            <a:fillRect/>
+          </a:stretch>
+        </p:blipFill>
+        <p:spPr>
+          <a:xfrm>
+            <a:off x="6467734" y="4355470"/>
+            <a:ext cx="286756" cy="286756"/>
+          </a:xfrm>
+          <a:prstGeom prst="rect">
+            <a:avLst/>
+          </a:prstGeom>
+        </p:spPr>
+      </p:pic>
+      <p:sp>
+        <p:nvSpPr>
+          <p:cNvPr id="25020" name="Text 12"/>
+          <p:cNvSpPr txBox="1"/>
+          <p:nvPr/>
+        </p:nvSpPr>
+        <p:spPr>
+          <a:xfrm>
+            <a:off x="7068312" y="4169664"/>
+            <a:ext cx="4590288" cy="1280160"/>
+          </a:xfrm>
+          <a:prstGeom prst="rect">
+            <a:avLst/>
+          </a:prstGeom>
+          <a:noFill/>
+          <a:ln/>
+        </p:spPr>
+        <p:txBody>
+          <a:bodyPr wrap="square" lIns="0" tIns="0" rIns="0" bIns="0" rtlCol="0" anchor="t"/>
+          <a:lstStyle/>
+          <a:p>
+            <a:pPr indent="0" marL="0">
+              <a:spcAft>
+                <a:spcPts val="200"/>
+              </a:spcAft>
+              <a:buNone/>
+            </a:pPr>
+            <a:r>
+              <a:rPr lang="en-US" sz="1700" b="1" dirty="0">
+                <a:solidFill>
+                  <a:schemeClr val="tx1"/>
+                </a:solidFill>
+              </a:rPr>
+              <a:t>Built-in troubleshooting</a:t>
+            </a:r>
+            <a:endParaRPr lang="en-US" sz="1700" dirty="0"/>
+          </a:p>
+          <a:p>
+            <a:pPr indent="0" marL="0">
+              <a:spcAft>
+                <a:spcPts val="200"/>
+              </a:spcAft>
+              <a:buNone/>
+            </a:pPr>
+            <a:r>
+              <a:rPr lang="en-US" sz="1400" dirty="0">
+                <a:solidFill>
+                  <a:schemeClr val="accent4"/>
+                </a:solidFill>
+              </a:rPr>
+              <a:t>gcctReport(), gcctCacheDebug(), gcctStageTest() and gcctSnapTest() in the console give short reports without personal data</a:t>
+            </a:r>
+            <a:endParaRPr lang="en-US" sz="1700" dirty="0"/>
+          </a:p>
+        </p:txBody>
+      </p:sp>
+      <p:sp>
+        <p:nvSpPr>
+          <p:cNvPr id="25021" name="Slide Number Placeholder 0"/>
           <p:cNvSpPr>
             <a:spLocks noGrp="1"/>
           </p:cNvSpPr>
@@ -7254,8 +7332,8 @@
         </p:nvSpPr>
         <p:spPr>
           <a:xfrm>
-            <a:off x="548640" y="1828800"/>
-            <a:ext cx="6035040" cy="1737360"/>
+            <a:off x="548640" y="384048"/>
+            <a:ext cx="11094415" cy="777240"/>
           </a:xfrm>
           <a:prstGeom prst="rect">
             <a:avLst/>
@@ -7264,50 +7342,278 @@
           <a:ln/>
         </p:spPr>
         <p:txBody>
-          <a:bodyPr wrap="square" lIns="0" tIns="0" rIns="0" bIns="0" rtlCol="0" anchor="b"/>
+          <a:bodyPr wrap="square" lIns="0" tIns="0" rIns="0" bIns="0" rtlCol="0" anchor="ctr"/>
           <a:lstStyle/>
           <a:p>
             <a:pPr algn="l" indent="0" marL="0">
               <a:buNone/>
             </a:pPr>
             <a:r>
-              <a:rPr lang="en-US" sz="4400" b="1" dirty="0">
+              <a:rPr lang="en-US" sz="3600" b="1" dirty="0">
+                <a:solidFill>
+                  <a:schemeClr val="tx2"/>
+                </a:solidFill>
+              </a:rPr>
+              <a:t>Get started in three minutes</a:t>
+            </a:r>
+            <a:endParaRPr lang="en-US" sz="3600" dirty="0"/>
+          </a:p>
+        </p:txBody>
+      </p:sp>
+      <p:sp>
+        <p:nvSpPr>
+          <p:cNvPr id="26003" name="Steg 1"/>
+          <p:cNvSpPr/>
+          <p:nvPr/>
+        </p:nvSpPr>
+        <p:spPr>
+          <a:xfrm>
+            <a:off x="548640" y="1463040"/>
+            <a:ext cx="731520" cy="731520"/>
+          </a:xfrm>
+          <a:prstGeom prst="ellipse">
+            <a:avLst/>
+          </a:prstGeom>
+          <a:solidFill>
+            <a:schemeClr val="accent1"/>
+          </a:solidFill>
+          <a:ln/>
+        </p:spPr>
+      </p:sp>
+      <p:sp>
+        <p:nvSpPr>
+          <p:cNvPr id="26004" name="Text 2"/>
+          <p:cNvSpPr txBox="1"/>
+          <p:nvPr/>
+        </p:nvSpPr>
+        <p:spPr>
+          <a:xfrm>
+            <a:off x="548640" y="1463040"/>
+            <a:ext cx="731520" cy="731520"/>
+          </a:xfrm>
+          <a:prstGeom prst="rect">
+            <a:avLst/>
+          </a:prstGeom>
+          <a:noFill/>
+          <a:ln/>
+        </p:spPr>
+        <p:txBody>
+          <a:bodyPr wrap="square" lIns="0" tIns="0" rIns="0" bIns="0" rtlCol="0" anchor="ctr"/>
+          <a:lstStyle/>
+          <a:p>
+            <a:pPr algn="ctr" indent="0" marL="0">
+              <a:buNone/>
+            </a:pPr>
+            <a:r>
+              <a:rPr lang="en-US" sz="2600" b="1" dirty="0">
                 <a:solidFill>
                   <a:schemeClr val="bg1"/>
                 </a:solidFill>
               </a:rPr>
-              <a:t>Better maps for</a:t>
-            </a:r>
-            <a:endParaRPr lang="en-US" sz="4400" dirty="0"/>
-          </a:p>
-          <a:p>
-            <a:pPr algn="l" indent="0" marL="0">
-              <a:buNone/>
-            </a:pPr>
-            <a:r>
-              <a:rPr lang="en-US" sz="4400" b="1" dirty="0">
+              <a:t>1</a:t>
+            </a:r>
+            <a:endParaRPr lang="en-US" sz="2600" dirty="0"/>
+          </a:p>
+        </p:txBody>
+      </p:sp>
+      <p:sp>
+        <p:nvSpPr>
+          <p:cNvPr id="26005" name="Text 3"/>
+          <p:cNvSpPr txBox="1"/>
+          <p:nvPr/>
+        </p:nvSpPr>
+        <p:spPr>
+          <a:xfrm>
+            <a:off x="548640" y="2377440"/>
+            <a:ext cx="3301898" cy="1463040"/>
+          </a:xfrm>
+          <a:prstGeom prst="rect">
+            <a:avLst/>
+          </a:prstGeom>
+          <a:noFill/>
+          <a:ln/>
+        </p:spPr>
+        <p:txBody>
+          <a:bodyPr wrap="square" lIns="0" tIns="0" rIns="0" bIns="0" rtlCol="0" anchor="t"/>
+          <a:lstStyle/>
+          <a:p>
+            <a:pPr indent="0" marL="0">
+              <a:spcAft>
+                <a:spcPts val="400"/>
+              </a:spcAft>
+              <a:buNone/>
+            </a:pPr>
+            <a:r>
+              <a:rPr lang="en-US" sz="1900" b="1" dirty="0">
+                <a:solidFill>
+                  <a:schemeClr val="tx1"/>
+                </a:solidFill>
+              </a:rPr>
+              <a:t>Install a userscript manager</a:t>
+            </a:r>
+            <a:endParaRPr lang="en-US" sz="1900" dirty="0"/>
+          </a:p>
+          <a:p>
+            <a:pPr indent="0" marL="0">
+              <a:spcAft>
+                <a:spcPts val="400"/>
+              </a:spcAft>
+              <a:buNone/>
+            </a:pPr>
+            <a:r>
+              <a:rPr lang="en-US" sz="1400" dirty="0">
+                <a:solidFill>
+                  <a:schemeClr val="accent4"/>
+                </a:solidFill>
+              </a:rPr>
+              <a:t>Tampermonkey or Violentmonkey in Chrome, Edge, Firefox or Safari</a:t>
+            </a:r>
+            <a:endParaRPr lang="en-US" sz="1900" dirty="0"/>
+          </a:p>
+        </p:txBody>
+      </p:sp>
+      <p:sp>
+        <p:nvSpPr>
+          <p:cNvPr id="26006" name="Steg 2"/>
+          <p:cNvSpPr/>
+          <p:nvPr/>
+        </p:nvSpPr>
+        <p:spPr>
+          <a:xfrm>
+            <a:off x="4353458" y="1463040"/>
+            <a:ext cx="731520" cy="731520"/>
+          </a:xfrm>
+          <a:prstGeom prst="ellipse">
+            <a:avLst/>
+          </a:prstGeom>
+          <a:solidFill>
+            <a:schemeClr val="accent1"/>
+          </a:solidFill>
+          <a:ln/>
+        </p:spPr>
+      </p:sp>
+      <p:sp>
+        <p:nvSpPr>
+          <p:cNvPr id="26007" name="Text 5"/>
+          <p:cNvSpPr txBox="1"/>
+          <p:nvPr/>
+        </p:nvSpPr>
+        <p:spPr>
+          <a:xfrm>
+            <a:off x="4353458" y="1463040"/>
+            <a:ext cx="731520" cy="731520"/>
+          </a:xfrm>
+          <a:prstGeom prst="rect">
+            <a:avLst/>
+          </a:prstGeom>
+          <a:noFill/>
+          <a:ln/>
+        </p:spPr>
+        <p:txBody>
+          <a:bodyPr wrap="square" lIns="0" tIns="0" rIns="0" bIns="0" rtlCol="0" anchor="ctr"/>
+          <a:lstStyle/>
+          <a:p>
+            <a:pPr algn="ctr" indent="0" marL="0">
+              <a:buNone/>
+            </a:pPr>
+            <a:r>
+              <a:rPr lang="en-US" sz="2600" b="1" dirty="0">
                 <a:solidFill>
                   <a:schemeClr val="bg1"/>
                 </a:solidFill>
               </a:rPr>
-              <a:t>better trips</a:t>
-            </a:r>
-            <a:endParaRPr lang="en-US" sz="4400" dirty="0"/>
-          </a:p>
-        </p:txBody>
-      </p:sp>
-      <p:sp>
-        <p:nvSpPr>
-          <p:cNvPr id="26003" name="Text 0"/>
+              <a:t>2</a:t>
+            </a:r>
+            <a:endParaRPr lang="en-US" sz="2600" dirty="0"/>
+          </a:p>
+        </p:txBody>
+      </p:sp>
+      <p:sp>
+        <p:nvSpPr>
+          <p:cNvPr id="26008" name="Text 6"/>
+          <p:cNvSpPr txBox="1"/>
+          <p:nvPr/>
+        </p:nvSpPr>
+        <p:spPr>
+          <a:xfrm>
+            <a:off x="4353458" y="2377440"/>
+            <a:ext cx="3301898" cy="1463040"/>
+          </a:xfrm>
+          <a:prstGeom prst="rect">
+            <a:avLst/>
+          </a:prstGeom>
+          <a:noFill/>
+          <a:ln/>
+        </p:spPr>
+        <p:txBody>
+          <a:bodyPr wrap="square" lIns="0" tIns="0" rIns="0" bIns="0" rtlCol="0" anchor="t"/>
+          <a:lstStyle/>
+          <a:p>
+            <a:pPr indent="0" marL="0">
+              <a:spcAft>
+                <a:spcPts val="400"/>
+              </a:spcAft>
+              <a:buNone/>
+            </a:pPr>
+            <a:r>
+              <a:rPr lang="en-US" sz="1900" b="1" dirty="0">
+                <a:solidFill>
+                  <a:schemeClr val="tx1"/>
+                </a:solidFill>
+              </a:rPr>
+              <a:t>Add the script</a:t>
+            </a:r>
+            <a:endParaRPr lang="en-US" sz="1900" dirty="0"/>
+          </a:p>
+          <a:p>
+            <a:pPr indent="0" marL="0">
+              <a:spcAft>
+                <a:spcPts val="400"/>
+              </a:spcAft>
+              <a:buNone/>
+            </a:pPr>
+            <a:r>
+              <a:rPr lang="en-US" sz="1400" dirty="0">
+                <a:solidFill>
+                  <a:schemeClr val="accent4"/>
+                </a:solidFill>
+              </a:rPr>
+              <a:t>Open geocaching-custom-tiles.user.js and save it in the manager</a:t>
+            </a:r>
+            <a:endParaRPr lang="en-US" sz="1900" dirty="0"/>
+          </a:p>
+        </p:txBody>
+      </p:sp>
+      <p:sp>
+        <p:nvSpPr>
+          <p:cNvPr id="26009" name="Steg 3"/>
           <p:cNvSpPr/>
-          <p:nvPr>
-            <p:ph idx="101" type="body" hasCustomPrompt="1"/>
-          </p:nvPr>
-        </p:nvSpPr>
-        <p:spPr>
-          <a:xfrm>
-            <a:off x="548640" y="3703320"/>
-            <a:ext cx="5852160" cy="1188720"/>
+          <p:nvPr/>
+        </p:nvSpPr>
+        <p:spPr>
+          <a:xfrm>
+            <a:off x="8158277" y="1463040"/>
+            <a:ext cx="731520" cy="731520"/>
+          </a:xfrm>
+          <a:prstGeom prst="ellipse">
+            <a:avLst/>
+          </a:prstGeom>
+          <a:solidFill>
+            <a:schemeClr val="accent1"/>
+          </a:solidFill>
+          <a:ln/>
+        </p:spPr>
+      </p:sp>
+      <p:sp>
+        <p:nvSpPr>
+          <p:cNvPr id="26010" name="Text 8"/>
+          <p:cNvSpPr txBox="1"/>
+          <p:nvPr/>
+        </p:nvSpPr>
+        <p:spPr>
+          <a:xfrm>
+            <a:off x="8158277" y="1463040"/>
+            <a:ext cx="731520" cy="731520"/>
           </a:xfrm>
           <a:prstGeom prst="rect">
             <a:avLst/>
@@ -7316,27 +7622,125 @@
           <a:ln/>
         </p:spPr>
         <p:txBody>
+          <a:bodyPr wrap="square" lIns="0" tIns="0" rIns="0" bIns="0" rtlCol="0" anchor="ctr"/>
+          <a:lstStyle/>
+          <a:p>
+            <a:pPr algn="ctr" indent="0" marL="0">
+              <a:buNone/>
+            </a:pPr>
+            <a:r>
+              <a:rPr lang="en-US" sz="2600" b="1" dirty="0">
+                <a:solidFill>
+                  <a:schemeClr val="bg1"/>
+                </a:solidFill>
+              </a:rPr>
+              <a:t>3</a:t>
+            </a:r>
+            <a:endParaRPr lang="en-US" sz="2600" dirty="0"/>
+          </a:p>
+        </p:txBody>
+      </p:sp>
+      <p:sp>
+        <p:nvSpPr>
+          <p:cNvPr id="26011" name="Text 9"/>
+          <p:cNvSpPr txBox="1"/>
+          <p:nvPr/>
+        </p:nvSpPr>
+        <p:spPr>
+          <a:xfrm>
+            <a:off x="8158277" y="2377440"/>
+            <a:ext cx="3301898" cy="1463040"/>
+          </a:xfrm>
+          <a:prstGeom prst="rect">
+            <a:avLst/>
+          </a:prstGeom>
+          <a:noFill/>
+          <a:ln/>
+        </p:spPr>
+        <p:txBody>
           <a:bodyPr wrap="square" lIns="0" tIns="0" rIns="0" bIns="0" rtlCol="0" anchor="t"/>
           <a:lstStyle/>
           <a:p>
-            <a:pPr algn="l" indent="0" marL="0">
-              <a:buNone/>
-            </a:pPr>
-            <a:r>
-              <a:rPr lang="en-US" sz="1800" dirty="0">
-                <a:solidFill>
-                  <a:schemeClr val="accent5"/>
-                </a:solidFill>
-              </a:rPr>
-              <a:t>User guides in English and Norwegian are included. Use gcctReport() in the browser console if something doesn't work.</a:t>
-            </a:r>
-            <a:endParaRPr lang="en-US" sz="1800" dirty="0"/>
-          </a:p>
-        </p:txBody>
+            <a:pPr indent="0" marL="0">
+              <a:spcAft>
+                <a:spcPts val="400"/>
+              </a:spcAft>
+              <a:buNone/>
+            </a:pPr>
+            <a:r>
+              <a:rPr lang="en-US" sz="1900" b="1" dirty="0">
+                <a:solidFill>
+                  <a:schemeClr val="tx1"/>
+                </a:solidFill>
+              </a:rPr>
+              <a:t>Open a map</a:t>
+            </a:r>
+            <a:endParaRPr lang="en-US" sz="1900" dirty="0"/>
+          </a:p>
+          <a:p>
+            <a:pPr indent="0" marL="0">
+              <a:spcAft>
+                <a:spcPts val="400"/>
+              </a:spcAft>
+              <a:buNone/>
+            </a:pPr>
+            <a:r>
+              <a:rPr lang="en-US" sz="1400" dirty="0">
+                <a:solidFill>
+                  <a:schemeClr val="accent4"/>
+                </a:solidFill>
+              </a:rPr>
+              <a:t>geocaching.com/map or /play/map – the toolbar appears on the right</a:t>
+            </a:r>
+            <a:endParaRPr lang="en-US" sz="1900" dirty="0"/>
+          </a:p>
+        </p:txBody>
+      </p:sp>
+      <p:sp>
+        <p:nvSpPr>
+          <p:cNvPr id="26012" name="Personvern"/>
+          <p:cNvSpPr/>
+          <p:nvPr/>
+        </p:nvSpPr>
+        <p:spPr>
+          <a:xfrm>
+            <a:off x="548640" y="3977640"/>
+            <a:ext cx="11094415" cy="1783080"/>
+          </a:xfrm>
+          <a:prstGeom prst="roundRect">
+            <a:avLst>
+              <a:gd name="adj" fmla="val 6154"/>
+            </a:avLst>
+          </a:prstGeom>
+          <a:solidFill>
+            <a:schemeClr val="bg2"/>
+          </a:solidFill>
+          <a:ln/>
+        </p:spPr>
+      </p:sp>
+      <p:sp>
+        <p:nvSpPr>
+          <p:cNvPr id="26013" name="Ikon check sirkel"/>
+          <p:cNvSpPr/>
+          <p:nvPr/>
+        </p:nvSpPr>
+        <p:spPr>
+          <a:xfrm>
+            <a:off x="868680" y="4251960"/>
+            <a:ext cx="640080" cy="640080"/>
+          </a:xfrm>
+          <a:prstGeom prst="ellipse">
+            <a:avLst/>
+          </a:prstGeom>
+          <a:solidFill>
+            <a:schemeClr val="accent1"/>
+          </a:solidFill>
+          <a:ln/>
+        </p:spPr>
       </p:sp>
       <p:pic>
         <p:nvPicPr>
-          <p:cNvPr id="26004" name="Høyreklikkboblen" descr="The right-click popup">    </p:cNvPr>
+          <p:cNvPr id="26014" name="Ikon check" descr="check">    </p:cNvPr>
           <p:cNvPicPr>
             <a:picLocks noChangeAspect="1"/>
           </p:cNvPicPr>
@@ -7350,6 +7754,246 @@
         </p:blipFill>
         <p:spPr>
           <a:xfrm>
+            <a:off x="1009498" y="4392778"/>
+            <a:ext cx="358445" cy="358445"/>
+          </a:xfrm>
+          <a:prstGeom prst="rect">
+            <a:avLst/>
+          </a:prstGeom>
+        </p:spPr>
+      </p:pic>
+      <p:sp>
+        <p:nvSpPr>
+          <p:cNvPr id="26015" name="Text 12"/>
+          <p:cNvSpPr txBox="1"/>
+          <p:nvPr/>
+        </p:nvSpPr>
+        <p:spPr>
+          <a:xfrm>
+            <a:off x="1737360" y="4206240"/>
+            <a:ext cx="9585655" cy="1417320"/>
+          </a:xfrm>
+          <a:prstGeom prst="rect">
+            <a:avLst/>
+          </a:prstGeom>
+          <a:noFill/>
+          <a:ln/>
+        </p:spPr>
+        <p:txBody>
+          <a:bodyPr wrap="square" lIns="0" tIns="0" rIns="0" bIns="0" rtlCol="0" anchor="t"/>
+          <a:lstStyle/>
+          <a:p>
+            <a:pPr indent="0" marL="0">
+              <a:spcAft>
+                <a:spcPts val="400"/>
+              </a:spcAft>
+              <a:buNone/>
+            </a:pPr>
+            <a:r>
+              <a:rPr lang="en-US" sz="1900" b="1" dirty="0">
+                <a:solidFill>
+                  <a:schemeClr val="tx1"/>
+                </a:solidFill>
+              </a:rPr>
+              <a:t>Privacy</a:t>
+            </a:r>
+            <a:endParaRPr lang="en-US" sz="1900" dirty="0"/>
+          </a:p>
+          <a:p>
+            <a:pPr indent="0" marL="0">
+              <a:spcAft>
+                <a:spcPts val="400"/>
+              </a:spcAft>
+              <a:buNone/>
+            </a:pPr>
+            <a:r>
+              <a:rPr lang="en-US" sz="1500" dirty="0">
+                <a:solidFill>
+                  <a:schemeClr val="tx1"/>
+                </a:solidFill>
+              </a:rPr>
+              <a:t>The script collects and sends no personal data and has no server of its own. It only contacts the map servers you switch on, Kartverket and Photon when you search, and geocaching.com's own cache search and cache pages when the 161 m circles are on. Your location is only requested when you ask for it. All settings are stored in the browser.</a:t>
+            </a:r>
+            <a:endParaRPr lang="en-US" sz="1900" dirty="0"/>
+          </a:p>
+        </p:txBody>
+      </p:sp>
+      <p:sp>
+        <p:nvSpPr>
+          <p:cNvPr id="26016" name="Slide Number Placeholder 0"/>
+          <p:cNvSpPr>
+            <a:spLocks noGrp="1"/>
+          </p:cNvSpPr>
+          <p:nvPr>
+            <p:ph type="sldNum" sz="quarter" idx="4294967295"/>
+          </p:nvPr>
+        </p:nvSpPr>
+        <p:spPr>
+          <a:xfrm>
+            <a:off x="11094415" y="6446520"/>
+            <a:ext cx="548640" cy="274320"/>
+          </a:xfrm>
+          <a:prstGeom prst="rect">
+            <a:avLst/>
+          </a:prstGeom>
+          <a:extLst>
+            <a:ext uri="{C572A759-6A51-4108-AA02-DFA0A04FC94B}">
+              <ma14:wrappingTextBoxFlag xmlns:ma14="http://schemas.microsoft.com/office/mac/drawingml/2011/main" val="0"/>
+            </a:ext>
+          </a:extLst>
+        </p:spPr>
+        <p:txBody>
+          <a:bodyPr/>
+          <a:lstStyle>
+            <a:lvl1pPr>
+              <a:defRPr sz="1000">
+                <a:solidFill>
+                  <a:srgbClr val="6B7F75"/>
+                </a:solidFill>
+              </a:defRPr>
+            </a:lvl1pPr>
+          </a:lstStyle>
+          <a:p>
+            <a:pPr algn="r"/>
+            <a:fld id="{F7021451-1387-4CA6-816F-3879F97B5CBC}" type="slidenum">
+              <a:rPr b="0" lang="en-US"/>
+              <a:t>16</a:t>
+            </a:fld>
+            <a:endParaRPr lang="en-US"/>
+          </a:p>
+        </p:txBody>
+      </p:sp>
+    </p:spTree>
+  </p:cSld>
+  <p:clrMapOvr>
+    <a:masterClrMapping/>
+  </p:clrMapOvr>
+</p:sld>
+</file>
+
+<file path=ppt/slides/slide17.xml><?xml version="1.0" encoding="utf-8"?>
+<p:sld xmlns:a="http://schemas.openxmlformats.org/drawingml/2006/main" xmlns:r="http://schemas.openxmlformats.org/officeDocument/2006/relationships" xmlns:p="http://schemas.openxmlformats.org/presentationml/2006/main">
+  <p:cSld name="Slide 17">
+    <p:spTree>
+      <p:nvGrpSpPr>
+        <p:cNvPr id="27001" name=""/>
+        <p:cNvGrpSpPr/>
+        <p:nvPr/>
+      </p:nvGrpSpPr>
+      <p:grpSpPr>
+        <a:xfrm>
+          <a:off x="0" y="0"/>
+          <a:ext cx="0" cy="0"/>
+          <a:chOff x="0" y="0"/>
+          <a:chExt cx="0" cy="0"/>
+        </a:xfrm>
+      </p:grpSpPr>
+      <p:sp>
+        <p:nvSpPr>
+          <p:cNvPr id="27002" name="Text 0"/>
+          <p:cNvSpPr/>
+          <p:nvPr>
+            <p:ph idx="100" type="title" hasCustomPrompt="1"/>
+          </p:nvPr>
+        </p:nvSpPr>
+        <p:spPr>
+          <a:xfrm>
+            <a:off x="548640" y="1828800"/>
+            <a:ext cx="6035040" cy="1737360"/>
+          </a:xfrm>
+          <a:prstGeom prst="rect">
+            <a:avLst/>
+          </a:prstGeom>
+          <a:noFill/>
+          <a:ln/>
+        </p:spPr>
+        <p:txBody>
+          <a:bodyPr wrap="square" lIns="0" tIns="0" rIns="0" bIns="0" rtlCol="0" anchor="b"/>
+          <a:lstStyle/>
+          <a:p>
+            <a:pPr algn="l" indent="0" marL="0">
+              <a:buNone/>
+            </a:pPr>
+            <a:r>
+              <a:rPr lang="en-US" sz="4400" b="1" dirty="0">
+                <a:solidFill>
+                  <a:schemeClr val="bg1"/>
+                </a:solidFill>
+              </a:rPr>
+              <a:t>Better maps for</a:t>
+            </a:r>
+            <a:endParaRPr lang="en-US" sz="4400" dirty="0"/>
+          </a:p>
+          <a:p>
+            <a:pPr algn="l" indent="0" marL="0">
+              <a:buNone/>
+            </a:pPr>
+            <a:r>
+              <a:rPr lang="en-US" sz="4400" b="1" dirty="0">
+                <a:solidFill>
+                  <a:schemeClr val="bg1"/>
+                </a:solidFill>
+              </a:rPr>
+              <a:t>better trips</a:t>
+            </a:r>
+            <a:endParaRPr lang="en-US" sz="4400" dirty="0"/>
+          </a:p>
+        </p:txBody>
+      </p:sp>
+      <p:sp>
+        <p:nvSpPr>
+          <p:cNvPr id="27003" name="Text 0"/>
+          <p:cNvSpPr/>
+          <p:nvPr>
+            <p:ph idx="101" type="body" hasCustomPrompt="1"/>
+          </p:nvPr>
+        </p:nvSpPr>
+        <p:spPr>
+          <a:xfrm>
+            <a:off x="548640" y="3703320"/>
+            <a:ext cx="5852160" cy="1188720"/>
+          </a:xfrm>
+          <a:prstGeom prst="rect">
+            <a:avLst/>
+          </a:prstGeom>
+          <a:noFill/>
+          <a:ln/>
+        </p:spPr>
+        <p:txBody>
+          <a:bodyPr wrap="square" lIns="0" tIns="0" rIns="0" bIns="0" rtlCol="0" anchor="t"/>
+          <a:lstStyle/>
+          <a:p>
+            <a:pPr algn="l" indent="0" marL="0">
+              <a:buNone/>
+            </a:pPr>
+            <a:r>
+              <a:rPr lang="en-US" sz="1800" dirty="0">
+                <a:solidFill>
+                  <a:schemeClr val="accent5"/>
+                </a:solidFill>
+              </a:rPr>
+              <a:t>User guides in English and Norwegian are included. Use gcctReport() in the browser console if something doesn't work.</a:t>
+            </a:r>
+            <a:endParaRPr lang="en-US" sz="1800" dirty="0"/>
+          </a:p>
+        </p:txBody>
+      </p:sp>
+      <p:pic>
+        <p:nvPicPr>
+          <p:cNvPr id="27004" name="Høyreklikkboblen" descr="The right-click popup">    </p:cNvPr>
+          <p:cNvPicPr>
+            <a:picLocks noChangeAspect="1"/>
+          </p:cNvPicPr>
+          <p:nvPr/>
+        </p:nvPicPr>
+        <p:blipFill>
+          <a:blip r:embed="rId1"/>
+          <a:stretch>
+            <a:fillRect/>
+          </a:stretch>
+        </p:blipFill>
+        <p:spPr>
+          <a:xfrm>
             <a:off x="6705295" y="1371600"/>
             <a:ext cx="4754880" cy="2300748"/>
           </a:xfrm>
@@ -7367,7 +8011,7 @@
       </p:pic>
       <p:pic>
         <p:nvPicPr>
-          <p:cNvPr id="26005" name="Bekreftelsesdialog" descr="Confirmation dialog">    </p:cNvPr>
+          <p:cNvPr id="27005" name="Bekreftelsesdialog" descr="Confirmation dialog">    </p:cNvPr>
           <p:cNvPicPr>
             <a:picLocks noChangeAspect="1"/>
           </p:cNvPicPr>
@@ -8337,8 +8981,8 @@
         </p:blipFill>
         <p:spPr>
           <a:xfrm>
-            <a:off x="1106004" y="1572768"/>
-            <a:ext cx="348312" cy="4443984"/>
+            <a:off x="1115568" y="1572768"/>
+            <a:ext cx="329184" cy="4443984"/>
           </a:xfrm>
           <a:prstGeom prst="rect">
             <a:avLst/>
@@ -8353,7 +8997,7 @@
         </p:nvSpPr>
         <p:spPr>
           <a:xfrm>
-            <a:off x="2514600" y="1453896"/>
+            <a:off x="2514600" y="1408176"/>
             <a:ext cx="512064" cy="512064"/>
           </a:xfrm>
           <a:prstGeom prst="ellipse">
@@ -8381,7 +9025,7 @@
         </p:blipFill>
         <p:spPr>
           <a:xfrm>
-            <a:off x="2627254" y="1566550"/>
+            <a:off x="2627254" y="1520830"/>
             <a:ext cx="286756" cy="286756"/>
           </a:xfrm>
           <a:prstGeom prst="rect">
@@ -8397,8 +9041,8 @@
         </p:nvSpPr>
         <p:spPr>
           <a:xfrm>
-            <a:off x="3227832" y="1380744"/>
-            <a:ext cx="3493008" cy="667512"/>
+            <a:off x="3227832" y="1335024"/>
+            <a:ext cx="3493008" cy="576072"/>
           </a:xfrm>
           <a:prstGeom prst="rect">
             <a:avLst/>
@@ -8453,7 +9097,7 @@
         </p:nvSpPr>
         <p:spPr>
           <a:xfrm>
-            <a:off x="2514600" y="2167128"/>
+            <a:off x="2514600" y="2029968"/>
             <a:ext cx="512064" cy="512064"/>
           </a:xfrm>
           <a:prstGeom prst="ellipse">
@@ -8481,7 +9125,7 @@
         </p:blipFill>
         <p:spPr>
           <a:xfrm>
-            <a:off x="2627254" y="2279782"/>
+            <a:off x="2627254" y="2142622"/>
             <a:ext cx="286756" cy="286756"/>
           </a:xfrm>
           <a:prstGeom prst="rect">
@@ -8497,8 +9141,8 @@
         </p:nvSpPr>
         <p:spPr>
           <a:xfrm>
-            <a:off x="3227832" y="2093976"/>
-            <a:ext cx="3493008" cy="667512"/>
+            <a:off x="3227832" y="1956816"/>
+            <a:ext cx="3493008" cy="576072"/>
           </a:xfrm>
           <a:prstGeom prst="rect">
             <a:avLst/>
@@ -8553,7 +9197,7 @@
         </p:nvSpPr>
         <p:spPr>
           <a:xfrm>
-            <a:off x="2514600" y="2880360"/>
+            <a:off x="2514600" y="2651760"/>
             <a:ext cx="512064" cy="512064"/>
           </a:xfrm>
           <a:prstGeom prst="ellipse">
@@ -8581,7 +9225,7 @@
         </p:blipFill>
         <p:spPr>
           <a:xfrm>
-            <a:off x="2627254" y="2993014"/>
+            <a:off x="2627254" y="2764414"/>
             <a:ext cx="286756" cy="286756"/>
           </a:xfrm>
           <a:prstGeom prst="rect">
@@ -8597,8 +9241,8 @@
         </p:nvSpPr>
         <p:spPr>
           <a:xfrm>
-            <a:off x="3227832" y="2807208"/>
-            <a:ext cx="3493008" cy="667512"/>
+            <a:off x="3227832" y="2578608"/>
+            <a:ext cx="3493008" cy="576072"/>
           </a:xfrm>
           <a:prstGeom prst="rect">
             <a:avLst/>
@@ -8653,7 +9297,7 @@
         </p:nvSpPr>
         <p:spPr>
           <a:xfrm>
-            <a:off x="2514600" y="3593592"/>
+            <a:off x="2514600" y="3273552"/>
             <a:ext cx="512064" cy="512064"/>
           </a:xfrm>
           <a:prstGeom prst="ellipse">
@@ -8681,7 +9325,7 @@
         </p:blipFill>
         <p:spPr>
           <a:xfrm>
-            <a:off x="2627254" y="3706246"/>
+            <a:off x="2627254" y="3386206"/>
             <a:ext cx="286756" cy="286756"/>
           </a:xfrm>
           <a:prstGeom prst="rect">
@@ -8697,8 +9341,8 @@
         </p:nvSpPr>
         <p:spPr>
           <a:xfrm>
-            <a:off x="3227832" y="3520440"/>
-            <a:ext cx="3493008" cy="667512"/>
+            <a:off x="3227832" y="3200400"/>
+            <a:ext cx="3493008" cy="576072"/>
           </a:xfrm>
           <a:prstGeom prst="rect">
             <a:avLst/>
@@ -8747,13 +9391,13 @@
       </p:sp>
       <p:sp>
         <p:nvSpPr>
-          <p:cNvPr id="13017" name="Ikon circles sirkel"/>
+          <p:cNvPr id="13017" name="Ikon list sirkel"/>
           <p:cNvSpPr/>
           <p:nvPr/>
         </p:nvSpPr>
         <p:spPr>
           <a:xfrm>
-            <a:off x="2514600" y="4306824"/>
+            <a:off x="2514600" y="3895344"/>
             <a:ext cx="512064" cy="512064"/>
           </a:xfrm>
           <a:prstGeom prst="ellipse">
@@ -8767,7 +9411,7 @@
       </p:sp>
       <p:pic>
         <p:nvPicPr>
-          <p:cNvPr id="13018" name="Ikon circles" descr="circles">    </p:cNvPr>
+          <p:cNvPr id="13018" name="Ikon list" descr="list">    </p:cNvPr>
           <p:cNvPicPr>
             <a:picLocks noChangeAspect="1"/>
           </p:cNvPicPr>
@@ -8781,7 +9425,7 @@
         </p:blipFill>
         <p:spPr>
           <a:xfrm>
-            <a:off x="2627254" y="4419478"/>
+            <a:off x="2627254" y="4007998"/>
             <a:ext cx="286756" cy="286756"/>
           </a:xfrm>
           <a:prstGeom prst="rect">
@@ -8797,8 +9441,8 @@
         </p:nvSpPr>
         <p:spPr>
           <a:xfrm>
-            <a:off x="3227832" y="4233672"/>
-            <a:ext cx="3493008" cy="667512"/>
+            <a:off x="3227832" y="3822192"/>
+            <a:ext cx="3493008" cy="576072"/>
           </a:xfrm>
           <a:prstGeom prst="rect">
             <a:avLst/>
@@ -8822,7 +9466,7 @@
                   <a:schemeClr val="tx1"/>
                 </a:solidFill>
               </a:rPr>
-              <a:t>161 m circles</a:t>
+              <a:t>Geocaches on the map</a:t>
             </a:r>
             <a:endParaRPr lang="en-US" sz="1700" dirty="0"/>
           </a:p>
@@ -8839,7 +9483,7 @@
                   <a:schemeClr val="accent4"/>
                 </a:solidFill>
               </a:rPr>
-              <a:t>Where something is placed – from zoom 15</a:t>
+              <a:t>A list that follows the map (old map)</a:t>
             </a:r>
             <a:endParaRPr lang="en-US" sz="1700" dirty="0"/>
           </a:p>
@@ -8847,13 +9491,13 @@
       </p:sp>
       <p:sp>
         <p:nvSpPr>
-          <p:cNvPr id="13020" name="Ikon solved sirkel"/>
+          <p:cNvPr id="13020" name="Ikon circles sirkel"/>
           <p:cNvSpPr/>
           <p:nvPr/>
         </p:nvSpPr>
         <p:spPr>
           <a:xfrm>
-            <a:off x="2514600" y="5020056"/>
+            <a:off x="2514600" y="4517136"/>
             <a:ext cx="512064" cy="512064"/>
           </a:xfrm>
           <a:prstGeom prst="ellipse">
@@ -8867,7 +9511,7 @@
       </p:sp>
       <p:pic>
         <p:nvPicPr>
-          <p:cNvPr id="13021" name="Ikon solved" descr="solved">    </p:cNvPr>
+          <p:cNvPr id="13021" name="Ikon circles" descr="circles">    </p:cNvPr>
           <p:cNvPicPr>
             <a:picLocks noChangeAspect="1"/>
           </p:cNvPicPr>
@@ -8881,7 +9525,7 @@
         </p:blipFill>
         <p:spPr>
           <a:xfrm>
-            <a:off x="2627254" y="5132710"/>
+            <a:off x="2627254" y="4629790"/>
             <a:ext cx="286756" cy="286756"/>
           </a:xfrm>
           <a:prstGeom prst="rect">
@@ -8897,8 +9541,8 @@
         </p:nvSpPr>
         <p:spPr>
           <a:xfrm>
-            <a:off x="3227832" y="4946904"/>
-            <a:ext cx="3493008" cy="667512"/>
+            <a:off x="3227832" y="4443984"/>
+            <a:ext cx="3493008" cy="576072"/>
           </a:xfrm>
           <a:prstGeom prst="rect">
             <a:avLst/>
@@ -8922,7 +9566,7 @@
                   <a:schemeClr val="tx1"/>
                 </a:solidFill>
               </a:rPr>
-              <a:t>Marks</a:t>
+              <a:t>161 m circles</a:t>
             </a:r>
             <a:endParaRPr lang="en-US" sz="1700" dirty="0"/>
           </a:p>
@@ -8939,7 +9583,7 @@
                   <a:schemeClr val="accent4"/>
                 </a:solidFill>
               </a:rPr>
-              <a:t>Solved caches, also without circles</a:t>
+              <a:t>Where something is placed – from zoom 15</a:t>
             </a:r>
             <a:endParaRPr lang="en-US" sz="1700" dirty="0"/>
           </a:p>
@@ -8947,13 +9591,13 @@
       </p:sp>
       <p:sp>
         <p:nvSpPr>
-          <p:cNvPr id="13023" name="Ikon heart sirkel"/>
+          <p:cNvPr id="13023" name="Ikon solved sirkel"/>
           <p:cNvSpPr/>
           <p:nvPr/>
         </p:nvSpPr>
         <p:spPr>
           <a:xfrm>
-            <a:off x="2514600" y="5733288"/>
+            <a:off x="2514600" y="5138928"/>
             <a:ext cx="512064" cy="512064"/>
           </a:xfrm>
           <a:prstGeom prst="ellipse">
@@ -8967,7 +9611,7 @@
       </p:sp>
       <p:pic>
         <p:nvPicPr>
-          <p:cNvPr id="13024" name="Ikon heart" descr="heart">    </p:cNvPr>
+          <p:cNvPr id="13024" name="Ikon solved" descr="solved">    </p:cNvPr>
           <p:cNvPicPr>
             <a:picLocks noChangeAspect="1"/>
           </p:cNvPicPr>
@@ -8981,7 +9625,7 @@
         </p:blipFill>
         <p:spPr>
           <a:xfrm>
-            <a:off x="2627254" y="5845942"/>
+            <a:off x="2627254" y="5251582"/>
             <a:ext cx="286756" cy="286756"/>
           </a:xfrm>
           <a:prstGeom prst="rect">
@@ -8997,8 +9641,8 @@
         </p:nvSpPr>
         <p:spPr>
           <a:xfrm>
-            <a:off x="3227832" y="5660136"/>
-            <a:ext cx="3493008" cy="667512"/>
+            <a:off x="3227832" y="5065776"/>
+            <a:ext cx="3493008" cy="576072"/>
           </a:xfrm>
           <a:prstGeom prst="rect">
             <a:avLst/>
@@ -9022,7 +9666,7 @@
                   <a:schemeClr val="tx1"/>
                 </a:solidFill>
               </a:rPr>
-              <a:t>Favourite points</a:t>
+              <a:t>Marks</a:t>
             </a:r>
             <a:endParaRPr lang="en-US" sz="1700" dirty="0"/>
           </a:p>
@@ -9039,7 +9683,7 @@
                   <a:schemeClr val="accent4"/>
                 </a:solidFill>
               </a:rPr>
-              <a:t>♥ and the count above the caches – on/off</a:t>
+              <a:t>Solved caches, also without circles</a:t>
             </a:r>
             <a:endParaRPr lang="en-US" sz="1700" dirty="0"/>
           </a:p>
@@ -9047,13 +9691,13 @@
       </p:sp>
       <p:sp>
         <p:nvSpPr>
-          <p:cNvPr id="13026" name="Ikon dt sirkel"/>
+          <p:cNvPr id="13026" name="Ikon heart sirkel"/>
           <p:cNvSpPr/>
           <p:nvPr/>
         </p:nvSpPr>
         <p:spPr>
           <a:xfrm>
-            <a:off x="7086600" y="1453896"/>
+            <a:off x="2514600" y="5760720"/>
             <a:ext cx="512064" cy="512064"/>
           </a:xfrm>
           <a:prstGeom prst="ellipse">
@@ -9067,7 +9711,7 @@
       </p:sp>
       <p:pic>
         <p:nvPicPr>
-          <p:cNvPr id="13027" name="Ikon dt" descr="dt">    </p:cNvPr>
+          <p:cNvPr id="13027" name="Ikon heart" descr="heart">    </p:cNvPr>
           <p:cNvPicPr>
             <a:picLocks noChangeAspect="1"/>
           </p:cNvPicPr>
@@ -9081,7 +9725,7 @@
         </p:blipFill>
         <p:spPr>
           <a:xfrm>
-            <a:off x="7199254" y="1566550"/>
+            <a:off x="2627254" y="5873374"/>
             <a:ext cx="286756" cy="286756"/>
           </a:xfrm>
           <a:prstGeom prst="rect">
@@ -9097,8 +9741,8 @@
         </p:nvSpPr>
         <p:spPr>
           <a:xfrm>
-            <a:off x="7799832" y="1380744"/>
-            <a:ext cx="3767328" cy="667512"/>
+            <a:off x="3227832" y="5687568"/>
+            <a:ext cx="3493008" cy="576072"/>
           </a:xfrm>
           <a:prstGeom prst="rect">
             <a:avLst/>
@@ -9122,7 +9766,7 @@
                   <a:schemeClr val="tx1"/>
                 </a:solidFill>
               </a:rPr>
-              <a:t>D/T</a:t>
+              <a:t>Favourite points</a:t>
             </a:r>
             <a:endParaRPr lang="en-US" sz="1700" dirty="0"/>
           </a:p>
@@ -9139,7 +9783,7 @@
                   <a:schemeClr val="accent4"/>
                 </a:solidFill>
               </a:rPr>
-              <a:t>Difficulty/terrain below the caches – on/off</a:t>
+              <a:t>♥ and the count above the caches – on/off</a:t>
             </a:r>
             <a:endParaRPr lang="en-US" sz="1700" dirty="0"/>
           </a:p>
@@ -9147,13 +9791,13 @@
       </p:sp>
       <p:sp>
         <p:nvSpPr>
-          <p:cNvPr id="13029" name="Ikon eyeoff sirkel"/>
+          <p:cNvPr id="13029" name="Ikon dt sirkel"/>
           <p:cNvSpPr/>
           <p:nvPr/>
         </p:nvSpPr>
         <p:spPr>
           <a:xfrm>
-            <a:off x="7086600" y="2167128"/>
+            <a:off x="7086600" y="1408176"/>
             <a:ext cx="512064" cy="512064"/>
           </a:xfrm>
           <a:prstGeom prst="ellipse">
@@ -9167,7 +9811,7 @@
       </p:sp>
       <p:pic>
         <p:nvPicPr>
-          <p:cNvPr id="13030" name="Ikon eyeoff" descr="eyeoff">    </p:cNvPr>
+          <p:cNvPr id="13030" name="Ikon dt" descr="dt">    </p:cNvPr>
           <p:cNvPicPr>
             <a:picLocks noChangeAspect="1"/>
           </p:cNvPicPr>
@@ -9181,7 +9825,7 @@
         </p:blipFill>
         <p:spPr>
           <a:xfrm>
-            <a:off x="7199254" y="2279782"/>
+            <a:off x="7199254" y="1520830"/>
             <a:ext cx="286756" cy="286756"/>
           </a:xfrm>
           <a:prstGeom prst="rect">
@@ -9197,8 +9841,8 @@
         </p:nvSpPr>
         <p:spPr>
           <a:xfrm>
-            <a:off x="7799832" y="2093976"/>
-            <a:ext cx="3767328" cy="667512"/>
+            <a:off x="7799832" y="1335024"/>
+            <a:ext cx="3767328" cy="576072"/>
           </a:xfrm>
           <a:prstGeom prst="rect">
             <a:avLst/>
@@ -9222,7 +9866,7 @@
                   <a:schemeClr val="tx1"/>
                 </a:solidFill>
               </a:rPr>
-              <a:t>Hide geocaches</a:t>
+              <a:t>D/T</a:t>
             </a:r>
             <a:endParaRPr lang="en-US" sz="1700" dirty="0"/>
           </a:p>
@@ -9239,7 +9883,7 @@
                   <a:schemeClr val="accent4"/>
                 </a:solidFill>
               </a:rPr>
-              <a:t>A clean map – click again to show them</a:t>
+              <a:t>Difficulty/terrain below the caches – on/off</a:t>
             </a:r>
             <a:endParaRPr lang="en-US" sz="1700" dirty="0"/>
           </a:p>
@@ -9247,13 +9891,13 @@
       </p:sp>
       <p:sp>
         <p:nvSpPr>
-          <p:cNvPr id="13032" name="Ikon locate sirkel"/>
+          <p:cNvPr id="13032" name="Ikon eyeoff sirkel"/>
           <p:cNvSpPr/>
           <p:nvPr/>
         </p:nvSpPr>
         <p:spPr>
           <a:xfrm>
-            <a:off x="7086600" y="2880360"/>
+            <a:off x="7086600" y="2029968"/>
             <a:ext cx="512064" cy="512064"/>
           </a:xfrm>
           <a:prstGeom prst="ellipse">
@@ -9267,7 +9911,7 @@
       </p:sp>
       <p:pic>
         <p:nvPicPr>
-          <p:cNvPr id="13033" name="Ikon locate" descr="locate">    </p:cNvPr>
+          <p:cNvPr id="13033" name="Ikon eyeoff" descr="eyeoff">    </p:cNvPr>
           <p:cNvPicPr>
             <a:picLocks noChangeAspect="1"/>
           </p:cNvPicPr>
@@ -9281,7 +9925,7 @@
         </p:blipFill>
         <p:spPr>
           <a:xfrm>
-            <a:off x="7199254" y="2993014"/>
+            <a:off x="7199254" y="2142622"/>
             <a:ext cx="286756" cy="286756"/>
           </a:xfrm>
           <a:prstGeom prst="rect">
@@ -9297,8 +9941,8 @@
         </p:nvSpPr>
         <p:spPr>
           <a:xfrm>
-            <a:off x="7799832" y="2807208"/>
-            <a:ext cx="3767328" cy="667512"/>
+            <a:off x="7799832" y="1956816"/>
+            <a:ext cx="3767328" cy="576072"/>
           </a:xfrm>
           <a:prstGeom prst="rect">
             <a:avLst/>
@@ -9322,7 +9966,7 @@
                   <a:schemeClr val="tx1"/>
                 </a:solidFill>
               </a:rPr>
-              <a:t>My location</a:t>
+              <a:t>Hide geocaches</a:t>
             </a:r>
             <a:endParaRPr lang="en-US" sz="1700" dirty="0"/>
           </a:p>
@@ -9339,7 +9983,7 @@
                   <a:schemeClr val="accent4"/>
                 </a:solidFill>
               </a:rPr>
-              <a:t>With an accuracy circle</a:t>
+              <a:t>A clean map – click again to show them</a:t>
             </a:r>
             <a:endParaRPr lang="en-US" sz="1700" dirty="0"/>
           </a:p>
@@ -9347,13 +9991,13 @@
       </p:sp>
       <p:sp>
         <p:nvSpPr>
-          <p:cNvPr id="13035" name="Ikon home sirkel"/>
+          <p:cNvPr id="13035" name="Ikon locate sirkel"/>
           <p:cNvSpPr/>
           <p:nvPr/>
         </p:nvSpPr>
         <p:spPr>
           <a:xfrm>
-            <a:off x="7086600" y="3593592"/>
+            <a:off x="7086600" y="2651760"/>
             <a:ext cx="512064" cy="512064"/>
           </a:xfrm>
           <a:prstGeom prst="ellipse">
@@ -9367,7 +10011,7 @@
       </p:sp>
       <p:pic>
         <p:nvPicPr>
-          <p:cNvPr id="13036" name="Ikon home" descr="home">    </p:cNvPr>
+          <p:cNvPr id="13036" name="Ikon locate" descr="locate">    </p:cNvPr>
           <p:cNvPicPr>
             <a:picLocks noChangeAspect="1"/>
           </p:cNvPicPr>
@@ -9381,7 +10025,7 @@
         </p:blipFill>
         <p:spPr>
           <a:xfrm>
-            <a:off x="7199254" y="3706246"/>
+            <a:off x="7199254" y="2764414"/>
             <a:ext cx="286756" cy="286756"/>
           </a:xfrm>
           <a:prstGeom prst="rect">
@@ -9397,8 +10041,8 @@
         </p:nvSpPr>
         <p:spPr>
           <a:xfrm>
-            <a:off x="7799832" y="3520440"/>
-            <a:ext cx="3767328" cy="667512"/>
+            <a:off x="7799832" y="2578608"/>
+            <a:ext cx="3767328" cy="576072"/>
           </a:xfrm>
           <a:prstGeom prst="rect">
             <a:avLst/>
@@ -9422,7 +10066,7 @@
                   <a:schemeClr val="tx1"/>
                 </a:solidFill>
               </a:rPr>
-              <a:t>Home</a:t>
+              <a:t>My location</a:t>
             </a:r>
             <a:endParaRPr lang="en-US" sz="1700" dirty="0"/>
           </a:p>
@@ -9439,7 +10083,7 @@
                   <a:schemeClr val="accent4"/>
                 </a:solidFill>
               </a:rPr>
-              <a:t>Right-click to change the address</a:t>
+              <a:t>With an accuracy circle</a:t>
             </a:r>
             <a:endParaRPr lang="en-US" sz="1700" dirty="0"/>
           </a:p>
@@ -9447,13 +10091,13 @@
       </p:sp>
       <p:sp>
         <p:nvSpPr>
-          <p:cNvPr id="13038" name="Ikon expand sirkel"/>
+          <p:cNvPr id="13038" name="Ikon home sirkel"/>
           <p:cNvSpPr/>
           <p:nvPr/>
         </p:nvSpPr>
         <p:spPr>
           <a:xfrm>
-            <a:off x="7086600" y="4306824"/>
+            <a:off x="7086600" y="3273552"/>
             <a:ext cx="512064" cy="512064"/>
           </a:xfrm>
           <a:prstGeom prst="ellipse">
@@ -9467,7 +10111,7 @@
       </p:sp>
       <p:pic>
         <p:nvPicPr>
-          <p:cNvPr id="13039" name="Ikon expand" descr="expand">    </p:cNvPr>
+          <p:cNvPr id="13039" name="Ikon home" descr="home">    </p:cNvPr>
           <p:cNvPicPr>
             <a:picLocks noChangeAspect="1"/>
           </p:cNvPicPr>
@@ -9481,7 +10125,7 @@
         </p:blipFill>
         <p:spPr>
           <a:xfrm>
-            <a:off x="7199254" y="4419478"/>
+            <a:off x="7199254" y="3386206"/>
             <a:ext cx="286756" cy="286756"/>
           </a:xfrm>
           <a:prstGeom prst="rect">
@@ -9497,8 +10141,8 @@
         </p:nvSpPr>
         <p:spPr>
           <a:xfrm>
-            <a:off x="7799832" y="4233672"/>
-            <a:ext cx="3767328" cy="667512"/>
+            <a:off x="7799832" y="3200400"/>
+            <a:ext cx="3767328" cy="576072"/>
           </a:xfrm>
           <a:prstGeom prst="rect">
             <a:avLst/>
@@ -9522,7 +10166,7 @@
                   <a:schemeClr val="tx1"/>
                 </a:solidFill>
               </a:rPr>
-              <a:t>Fullscreen</a:t>
+              <a:t>Home</a:t>
             </a:r>
             <a:endParaRPr lang="en-US" sz="1700" dirty="0"/>
           </a:p>
@@ -9539,7 +10183,7 @@
                   <a:schemeClr val="accent4"/>
                 </a:solidFill>
               </a:rPr>
-              <a:t>The map fills the whole screen</a:t>
+              <a:t>Right-click to change the address</a:t>
             </a:r>
             <a:endParaRPr lang="en-US" sz="1700" dirty="0"/>
           </a:p>
@@ -9547,13 +10191,13 @@
       </p:sp>
       <p:sp>
         <p:nvSpPr>
-          <p:cNvPr id="13041" name="Ikon eraser sirkel"/>
+          <p:cNvPr id="13041" name="Ikon expand sirkel"/>
           <p:cNvSpPr/>
           <p:nvPr/>
         </p:nvSpPr>
         <p:spPr>
           <a:xfrm>
-            <a:off x="7086600" y="5020056"/>
+            <a:off x="7086600" y="3895344"/>
             <a:ext cx="512064" cy="512064"/>
           </a:xfrm>
           <a:prstGeom prst="ellipse">
@@ -9567,7 +10211,7 @@
       </p:sp>
       <p:pic>
         <p:nvPicPr>
-          <p:cNvPr id="13042" name="Ikon eraser" descr="eraser">    </p:cNvPr>
+          <p:cNvPr id="13042" name="Ikon expand" descr="expand">    </p:cNvPr>
           <p:cNvPicPr>
             <a:picLocks noChangeAspect="1"/>
           </p:cNvPicPr>
@@ -9581,7 +10225,7 @@
         </p:blipFill>
         <p:spPr>
           <a:xfrm>
-            <a:off x="7199254" y="5132710"/>
+            <a:off x="7199254" y="4007998"/>
             <a:ext cx="286756" cy="286756"/>
           </a:xfrm>
           <a:prstGeom prst="rect">
@@ -9597,8 +10241,8 @@
         </p:nvSpPr>
         <p:spPr>
           <a:xfrm>
-            <a:off x="7799832" y="4946904"/>
-            <a:ext cx="3767328" cy="667512"/>
+            <a:off x="7799832" y="3822192"/>
+            <a:ext cx="3767328" cy="576072"/>
           </a:xfrm>
           <a:prstGeom prst="rect">
             <a:avLst/>
@@ -9622,7 +10266,7 @@
                   <a:schemeClr val="tx1"/>
                 </a:solidFill>
               </a:rPr>
-              <a:t>Clear drawings</a:t>
+              <a:t>Fullscreen</a:t>
             </a:r>
             <a:endParaRPr lang="en-US" sz="1700" dirty="0"/>
           </a:p>
@@ -9639,7 +10283,7 @@
                   <a:schemeClr val="accent4"/>
                 </a:solidFill>
               </a:rPr>
-              <a:t>Marks, measurements and circles</a:t>
+              <a:t>The map fills the whole screen</a:t>
             </a:r>
             <a:endParaRPr lang="en-US" sz="1700" dirty="0"/>
           </a:p>
@@ -9647,13 +10291,13 @@
       </p:sp>
       <p:sp>
         <p:nvSpPr>
-          <p:cNvPr id="13044" name="Ikon gear sirkel"/>
+          <p:cNvPr id="13044" name="Ikon eraser sirkel"/>
           <p:cNvSpPr/>
           <p:nvPr/>
         </p:nvSpPr>
         <p:spPr>
           <a:xfrm>
-            <a:off x="7086600" y="5733288"/>
+            <a:off x="7086600" y="4517136"/>
             <a:ext cx="512064" cy="512064"/>
           </a:xfrm>
           <a:prstGeom prst="ellipse">
@@ -9667,7 +10311,7 @@
       </p:sp>
       <p:pic>
         <p:nvPicPr>
-          <p:cNvPr id="13045" name="Ikon gear" descr="gear">    </p:cNvPr>
+          <p:cNvPr id="13045" name="Ikon eraser" descr="eraser">    </p:cNvPr>
           <p:cNvPicPr>
             <a:picLocks noChangeAspect="1"/>
           </p:cNvPicPr>
@@ -9681,7 +10325,7 @@
         </p:blipFill>
         <p:spPr>
           <a:xfrm>
-            <a:off x="7199254" y="5845942"/>
+            <a:off x="7199254" y="4629790"/>
             <a:ext cx="286756" cy="286756"/>
           </a:xfrm>
           <a:prstGeom prst="rect">
@@ -9697,8 +10341,8 @@
         </p:nvSpPr>
         <p:spPr>
           <a:xfrm>
-            <a:off x="7799832" y="5660136"/>
-            <a:ext cx="3767328" cy="667512"/>
+            <a:off x="7799832" y="4443984"/>
+            <a:ext cx="3767328" cy="576072"/>
           </a:xfrm>
           <a:prstGeom prst="rect">
             <a:avLst/>
@@ -9722,7 +10366,7 @@
                   <a:schemeClr val="tx1"/>
                 </a:solidFill>
               </a:rPr>
-              <a:t>Settings</a:t>
+              <a:t>Clear drawings</a:t>
             </a:r>
             <a:endParaRPr lang="en-US" sz="1700" dirty="0"/>
           </a:p>
@@ -9739,6 +10383,106 @@
                   <a:schemeClr val="accent4"/>
                 </a:solidFill>
               </a:rPr>
+              <a:t>Marks, measurements and circles</a:t>
+            </a:r>
+            <a:endParaRPr lang="en-US" sz="1700" dirty="0"/>
+          </a:p>
+        </p:txBody>
+      </p:sp>
+      <p:sp>
+        <p:nvSpPr>
+          <p:cNvPr id="13047" name="Ikon gear sirkel"/>
+          <p:cNvSpPr/>
+          <p:nvPr/>
+        </p:nvSpPr>
+        <p:spPr>
+          <a:xfrm>
+            <a:off x="7086600" y="5138928"/>
+            <a:ext cx="512064" cy="512064"/>
+          </a:xfrm>
+          <a:prstGeom prst="ellipse">
+            <a:avLst/>
+          </a:prstGeom>
+          <a:solidFill>
+            <a:schemeClr val="accent1"/>
+          </a:solidFill>
+          <a:ln/>
+        </p:spPr>
+      </p:sp>
+      <p:pic>
+        <p:nvPicPr>
+          <p:cNvPr id="13048" name="Ikon gear" descr="gear">    </p:cNvPr>
+          <p:cNvPicPr>
+            <a:picLocks noChangeAspect="1"/>
+          </p:cNvPicPr>
+          <p:nvPr/>
+        </p:nvPicPr>
+        <p:blipFill>
+          <a:blip r:embed="rId16"/>
+          <a:stretch>
+            <a:fillRect/>
+          </a:stretch>
+        </p:blipFill>
+        <p:spPr>
+          <a:xfrm>
+            <a:off x="7199254" y="5251582"/>
+            <a:ext cx="286756" cy="286756"/>
+          </a:xfrm>
+          <a:prstGeom prst="rect">
+            <a:avLst/>
+          </a:prstGeom>
+        </p:spPr>
+      </p:pic>
+      <p:sp>
+        <p:nvSpPr>
+          <p:cNvPr id="13049" name="Text 31"/>
+          <p:cNvSpPr txBox="1"/>
+          <p:nvPr/>
+        </p:nvSpPr>
+        <p:spPr>
+          <a:xfrm>
+            <a:off x="7799832" y="5065776"/>
+            <a:ext cx="3767328" cy="576072"/>
+          </a:xfrm>
+          <a:prstGeom prst="rect">
+            <a:avLst/>
+          </a:prstGeom>
+          <a:noFill/>
+          <a:ln/>
+        </p:spPr>
+        <p:txBody>
+          <a:bodyPr wrap="square" lIns="0" tIns="0" rIns="0" bIns="0" rtlCol="0" anchor="t"/>
+          <a:lstStyle/>
+          <a:p>
+            <a:pPr indent="0" marL="0">
+              <a:spcAft>
+                <a:spcPts val="200"/>
+              </a:spcAft>
+              <a:buNone/>
+            </a:pPr>
+            <a:r>
+              <a:rPr lang="en-US" sz="1700" b="1" dirty="0">
+                <a:solidFill>
+                  <a:schemeClr val="tx1"/>
+                </a:solidFill>
+              </a:rPr>
+              <a:t>Settings</a:t>
+            </a:r>
+            <a:endParaRPr lang="en-US" sz="1700" dirty="0"/>
+          </a:p>
+          <a:p>
+            <a:pPr indent="0" marL="0">
+              <a:spcAft>
+                <a:spcPts val="200"/>
+              </a:spcAft>
+              <a:buNone/>
+            </a:pPr>
+            <a:r>
+              <a:rPr lang="en-US" sz="1400" dirty="0">
+                <a:solidFill>
+                  <a:schemeClr val="accent4"/>
+                </a:solidFill>
+              </a:rPr>
               <a:t>Position, language and the site's buttons</a:t>
             </a:r>
             <a:endParaRPr lang="en-US" sz="1700" dirty="0"/>
@@ -9747,7 +10491,7 @@
       </p:sp>
       <p:sp>
         <p:nvSpPr>
-          <p:cNvPr id="13047" name="Slide Number Placeholder 0"/>
+          <p:cNvPr id="13050" name="Slide Number Placeholder 0"/>
           <p:cNvSpPr>
             <a:spLocks noGrp="1"/>
           </p:cNvSpPr>
@@ -9891,8 +10635,8 @@
         </p:blipFill>
         <p:spPr>
           <a:xfrm>
-            <a:off x="8599496" y="1527048"/>
-            <a:ext cx="2063758" cy="4581144"/>
+            <a:off x="8623621" y="1527048"/>
+            <a:ext cx="2015509" cy="4581144"/>
           </a:xfrm>
           <a:prstGeom prst="rect">
             <a:avLst/>

--- a/docs/Geocaching-Map-Custom-Tile-Layers-Presentation.pptx
+++ b/docs/Geocaching-Map-Custom-Tile-Layers-Presentation.pptx
@@ -123,13 +123,13 @@
   <p:extLst>
     <p:ext uri="{521415D9-36F7-43E2-AB2F-B90AF26B5E84}">
       <p14:sectionLst xmlns:p14="http://schemas.microsoft.com/office/powerpoint/2010/main">
-        <p14:section name="Introduction" id="{c703c21a-5ec2-d8d1-6b35-488ecb1e7cfe}">
+        <p14:section name="Introduction" id="{b561172a-468c-7212-99c3-6881f0083193}">
           <p14:sldIdLst>
             <p14:sldId id="256"/>
             <p14:sldId id="257"/>
           </p14:sldIdLst>
         </p14:section>
-        <p14:section name="Features" id="{8774f726-00a5-0fdb-391c-b05d5342a077}">
+        <p14:section name="Features" id="{f2197339-5de3-8757-f0d0-4db0fa8b1716}">
           <p14:sldIdLst>
             <p14:sldId id="258"/>
             <p14:sldId id="259"/>
@@ -144,14 +144,14 @@
             <p14:sldId id="268"/>
           </p14:sldIdLst>
         </p14:section>
-        <p14:section name="Technical" id="{9dcee35f-c4aa-f21b-859d-86e88d9ccf80}">
+        <p14:section name="Technical" id="{64251560-4595-3f2b-753b-d02ed6798843}">
           <p14:sldIdLst>
             <p14:sldId id="269"/>
             <p14:sldId id="270"/>
             <p14:sldId id="271"/>
           </p14:sldIdLst>
         </p14:section>
-        <p14:section name="Wrap-up" id="{99335f9a-9c57-1e65-4cf5-b1ed72eccaf4}">
+        <p14:section name="Wrap-up" id="{49e29b36-4702-9f93-a9c0-31f195bdba8c}">
           <p14:sldIdLst>
             <p14:sldId id="272"/>
           </p14:sldIdLst>
@@ -736,7 +736,7 @@
           <a:p>
             <a:r>
               <a:rPr lang="en-US" dirty="0"/>
-              <a:t>The cache list is on the old map (/map); the new map has a list of its own. The list and the route window sit at the top right or left of the map (Settings), clear of the site's side panel, and the two buttons switch between them.</a:t>
+              <a:t>The cache list is on /map; /play/map has a list of its own. The list and the route window sit at the top right or left of the map (Settings), clear of the site's side panel, and the two buttons switch between them.</a:t>
             </a:r>
             <a:endParaRPr lang="en-US" dirty="0"/>
           </a:p>
@@ -912,7 +912,7 @@
           <a:p>
             <a:r>
               <a:rPr lang="en-US" dirty="0"/>
-              <a:t>161 m is the minimum distance between caches in the guidelines. On the old map the script finds the positions from a hidden grid the site loads; on the new maps the exact positions are used.</a:t>
+              <a:t>161 m is the minimum distance between caches in the guidelines. On /map the script finds the positions from a hidden grid the site loads; on /play/map the exact positions are used.</a:t>
             </a:r>
             <a:endParaRPr lang="en-US" dirty="0"/>
           </a:p>
@@ -1000,7 +1000,7 @@
           <a:p>
             <a:r>
               <a:rPr lang="en-US" dirty="0"/>
-              <a:t>The browser draws Leaflet's controls on top, then the popups, markers and drawings, and the map tiles at the bottom. Among the tiles the script sorts by z-index: the site's background at the bottom, then your background map, the overlays and the preview, and on top the site's other tiles – on the old map those are the cache icons. The site's background is found from the site's layer switcher, otherwise as the lowest tile layer. The dialogs sit outside the map, attached to the page, so the side panel doesn't cover them.</a:t>
+              <a:t>The browser draws Leaflet's controls on top, then the popups, markers and drawings, and the map tiles at the bottom. Among the tiles the script sorts by z-index: the site's background at the bottom, then your background map, the overlays and the preview, and on top the site's other tiles – on /map those are the cache icons. The site's background is found from the site's layer switcher, otherwise as the lowest tile layer. The dialogs sit outside the map, attached to the page, so the side panel doesn't cover them.</a:t>
             </a:r>
             <a:endParaRPr lang="en-US" dirty="0"/>
           </a:p>
@@ -9483,7 +9483,7 @@
                   <a:schemeClr val="accent4"/>
                 </a:solidFill>
               </a:rPr>
-              <a:t>A list that follows the map (old map)</a:t>
+              <a:t>A list that follows the map (/map)</a:t>
             </a:r>
             <a:endParaRPr lang="en-US" sz="1700" dirty="0"/>
           </a:p>
@@ -13870,7 +13870,7 @@
                   <a:schemeClr val="accent4"/>
                 </a:solidFill>
               </a:rPr>
-              <a:t>Exact coordinates from geocaching.com's cache search – also on the old map. Only before the search has answered is the position worked out from the icon (≈).</a:t>
+              <a:t>Exact coordinates from geocaching.com's cache search – also on /map. Only before the search has answered is the position worked out from the icon (≈).</a:t>
             </a:r>
             <a:endParaRPr lang="en-US" sz="1500" dirty="0"/>
           </a:p>

--- a/docs/Geocaching-Map-Custom-Tile-Layers-Presentation.pptx
+++ b/docs/Geocaching-Map-Custom-Tile-Layers-Presentation.pptx
@@ -123,13 +123,13 @@
   <p:extLst>
     <p:ext uri="{521415D9-36F7-43E2-AB2F-B90AF26B5E84}">
       <p14:sectionLst xmlns:p14="http://schemas.microsoft.com/office/powerpoint/2010/main">
-        <p14:section name="Introduction" id="{b561172a-468c-7212-99c3-6881f0083193}">
+        <p14:section name="Introduction" id="{86cc74e2-2bcf-35e9-0a22-7617cd0cb408}">
           <p14:sldIdLst>
             <p14:sldId id="256"/>
             <p14:sldId id="257"/>
           </p14:sldIdLst>
         </p14:section>
-        <p14:section name="Features" id="{f2197339-5de3-8757-f0d0-4db0fa8b1716}">
+        <p14:section name="Features" id="{3776307e-6915-9b77-0b7a-f37935214c8e}">
           <p14:sldIdLst>
             <p14:sldId id="258"/>
             <p14:sldId id="259"/>
@@ -144,14 +144,14 @@
             <p14:sldId id="268"/>
           </p14:sldIdLst>
         </p14:section>
-        <p14:section name="Technical" id="{64251560-4595-3f2b-753b-d02ed6798843}">
+        <p14:section name="Technical" id="{bc575a4a-da07-5243-c426-14bb3e11b17f}">
           <p14:sldIdLst>
             <p14:sldId id="269"/>
             <p14:sldId id="270"/>
             <p14:sldId id="271"/>
           </p14:sldIdLst>
         </p14:section>
-        <p14:section name="Wrap-up" id="{49e29b36-4702-9f93-a9c0-31f195bdba8c}">
+        <p14:section name="Wrap-up" id="{e1ce5832-9e27-461d-012e-1e4b7f3178ea}">
           <p14:sldIdLst>
             <p14:sldId id="272"/>
           </p14:sldIdLst>
@@ -2243,7 +2243,7 @@
                   <a:schemeClr val="accent4"/>
                 </a:solidFill>
               </a:rPr>
-              <a:t>Geocaching Map – Custom Tile Layers · v1.53.0</a:t>
+              <a:t>Geocaching Map – Custom Tile Layers · v1.53.11</a:t>
             </a:r>
             <a:endParaRPr lang="en-US" sz="1000" dirty="0"/>
           </a:p>
@@ -2763,7 +2763,7 @@
                   <a:schemeClr val="accent5"/>
                 </a:solidFill>
               </a:rPr>
-              <a:t>Userscript · version 1.53.0 · English and Norwegian</a:t>
+              <a:t>Userscript · version 1.53.11 · English and Norwegian</a:t>
             </a:r>
             <a:endParaRPr lang="en-US" sz="1400" dirty="0"/>
           </a:p>

--- a/docs/Geocaching-Map-Custom-Tile-Layers-Presentation.pptx
+++ b/docs/Geocaching-Map-Custom-Tile-Layers-Presentation.pptx
@@ -123,13 +123,13 @@
   <p:extLst>
     <p:ext uri="{521415D9-36F7-43E2-AB2F-B90AF26B5E84}">
       <p14:sectionLst xmlns:p14="http://schemas.microsoft.com/office/powerpoint/2010/main">
-        <p14:section name="Introduction" id="{86cc74e2-2bcf-35e9-0a22-7617cd0cb408}">
+        <p14:section name="Introduction" id="{85dffdb3-939c-517e-3def-ddcdec79030f}">
           <p14:sldIdLst>
             <p14:sldId id="256"/>
             <p14:sldId id="257"/>
           </p14:sldIdLst>
         </p14:section>
-        <p14:section name="Features" id="{3776307e-6915-9b77-0b7a-f37935214c8e}">
+        <p14:section name="Features" id="{8163015b-bac2-164b-eaf1-98ea007a0990}">
           <p14:sldIdLst>
             <p14:sldId id="258"/>
             <p14:sldId id="259"/>
@@ -144,14 +144,14 @@
             <p14:sldId id="268"/>
           </p14:sldIdLst>
         </p14:section>
-        <p14:section name="Technical" id="{bc575a4a-da07-5243-c426-14bb3e11b17f}">
+        <p14:section name="Technical" id="{3a3c0e3e-5e3c-4878-a7c2-52ba7533449b}">
           <p14:sldIdLst>
             <p14:sldId id="269"/>
             <p14:sldId id="270"/>
             <p14:sldId id="271"/>
           </p14:sldIdLst>
         </p14:section>
-        <p14:section name="Wrap-up" id="{e1ce5832-9e27-461d-012e-1e4b7f3178ea}">
+        <p14:section name="Wrap-up" id="{982cbc9b-ede8-5089-5afa-bab48e540103}">
           <p14:sldIdLst>
             <p14:sldId id="272"/>
           </p14:sldIdLst>
@@ -2243,7 +2243,7 @@
                   <a:schemeClr val="accent4"/>
                 </a:solidFill>
               </a:rPr>
-              <a:t>Geocaching Map – Custom Tile Layers · v1.53.11</a:t>
+              <a:t>Geocaching Map – Custom Tile Layers · v1.54.19</a:t>
             </a:r>
             <a:endParaRPr lang="en-US" sz="1000" dirty="0"/>
           </a:p>
@@ -2763,7 +2763,7 @@
                   <a:schemeClr val="accent5"/>
                 </a:solidFill>
               </a:rPr>
-              <a:t>Userscript · version 1.53.11 · English and Norwegian</a:t>
+              <a:t>Userscript · version 1.54.19 · English and Norwegian</a:t>
             </a:r>
             <a:endParaRPr lang="en-US" sz="1400" dirty="0"/>
           </a:p>

--- a/docs/Geocaching-Map-Custom-Tile-Layers-Presentation.pptx
+++ b/docs/Geocaching-Map-Custom-Tile-Layers-Presentation.pptx
@@ -123,13 +123,13 @@
   <p:extLst>
     <p:ext uri="{521415D9-36F7-43E2-AB2F-B90AF26B5E84}">
       <p14:sectionLst xmlns:p14="http://schemas.microsoft.com/office/powerpoint/2010/main">
-        <p14:section name="Introduction" id="{85dffdb3-939c-517e-3def-ddcdec79030f}">
+        <p14:section name="Introduction" id="{01671299-b3f1-7946-ba5c-7a741388dec4}">
           <p14:sldIdLst>
             <p14:sldId id="256"/>
             <p14:sldId id="257"/>
           </p14:sldIdLst>
         </p14:section>
-        <p14:section name="Features" id="{8163015b-bac2-164b-eaf1-98ea007a0990}">
+        <p14:section name="Features" id="{da18c83f-349b-9382-ade9-7a6d1c9b6db4}">
           <p14:sldIdLst>
             <p14:sldId id="258"/>
             <p14:sldId id="259"/>
@@ -144,14 +144,14 @@
             <p14:sldId id="268"/>
           </p14:sldIdLst>
         </p14:section>
-        <p14:section name="Technical" id="{3a3c0e3e-5e3c-4878-a7c2-52ba7533449b}">
+        <p14:section name="Technical" id="{b52b80d9-9626-5df1-0e83-3067af45da3c}">
           <p14:sldIdLst>
             <p14:sldId id="269"/>
             <p14:sldId id="270"/>
             <p14:sldId id="271"/>
           </p14:sldIdLst>
         </p14:section>
-        <p14:section name="Wrap-up" id="{982cbc9b-ede8-5089-5afa-bab48e540103}">
+        <p14:section name="Wrap-up" id="{9bdd398c-f6e0-d5de-2732-936b9c88d206}">
           <p14:sldIdLst>
             <p14:sldId id="272"/>
           </p14:sldIdLst>
@@ -2243,7 +2243,7 @@
                   <a:schemeClr val="accent4"/>
                 </a:solidFill>
               </a:rPr>
-              <a:t>Geocaching Map – Custom Tile Layers · v1.54.19</a:t>
+              <a:t>Geocaching Map – Custom Tile Layers · v1.54.26</a:t>
             </a:r>
             <a:endParaRPr lang="en-US" sz="1000" dirty="0"/>
           </a:p>
@@ -2763,7 +2763,7 @@
                   <a:schemeClr val="accent5"/>
                 </a:solidFill>
               </a:rPr>
-              <a:t>Userscript · version 1.54.19 · English and Norwegian</a:t>
+              <a:t>Userscript · version 1.54.26 · English and Norwegian</a:t>
             </a:r>
             <a:endParaRPr lang="en-US" sz="1400" dirty="0"/>
           </a:p>

--- a/docs/Geocaching-Map-Custom-Tile-Layers-Presentation.pptx
+++ b/docs/Geocaching-Map-Custom-Tile-Layers-Presentation.pptx
@@ -123,13 +123,13 @@
   <p:extLst>
     <p:ext uri="{521415D9-36F7-43E2-AB2F-B90AF26B5E84}">
       <p14:sectionLst xmlns:p14="http://schemas.microsoft.com/office/powerpoint/2010/main">
-        <p14:section name="Introduction" id="{01671299-b3f1-7946-ba5c-7a741388dec4}">
+        <p14:section name="Introduction" id="{b3d19c72-84f5-6a26-43c5-401ca4930eb8}">
           <p14:sldIdLst>
             <p14:sldId id="256"/>
             <p14:sldId id="257"/>
           </p14:sldIdLst>
         </p14:section>
-        <p14:section name="Features" id="{da18c83f-349b-9382-ade9-7a6d1c9b6db4}">
+        <p14:section name="Features" id="{14352c71-d5b1-cd8a-ace7-6798ab4f7bf2}">
           <p14:sldIdLst>
             <p14:sldId id="258"/>
             <p14:sldId id="259"/>
@@ -144,14 +144,14 @@
             <p14:sldId id="268"/>
           </p14:sldIdLst>
         </p14:section>
-        <p14:section name="Technical" id="{b52b80d9-9626-5df1-0e83-3067af45da3c}">
+        <p14:section name="Technical" id="{c3b23677-c3b7-8e32-f9b3-8cb8bf206f26}">
           <p14:sldIdLst>
             <p14:sldId id="269"/>
             <p14:sldId id="270"/>
             <p14:sldId id="271"/>
           </p14:sldIdLst>
         </p14:section>
-        <p14:section name="Wrap-up" id="{9bdd398c-f6e0-d5de-2732-936b9c88d206}">
+        <p14:section name="Wrap-up" id="{af25b316-6380-396a-0f9c-1298bccd0512}">
           <p14:sldIdLst>
             <p14:sldId id="272"/>
           </p14:sldIdLst>
@@ -824,7 +824,7 @@
           <a:p>
             <a:r>
               <a:rPr lang="en-US" dirty="0"/>
-              <a:t>The circles show from zoom level 15. The cache types, the exact coordinates and your solved coordinates come from geocaching.com's own cache search. Physical stages are read from the list of additional waypoints on the cache page – only those the owner has made visible. Blue mark with a question mark and a green tick: a solved cache you have found. Small blue dot: physical stage. Small green dot: final location. Your own caches, which the cache search leaves out, are read from the cache pages; there the site's icon and popup are kept, but the hover text becomes “Final location”.</a:t>
+              <a:t>The circles show from zoom level 15. The cache types, the exact coordinates and your solved coordinates come from geocaching.com's own cache search. Physical stages are read from the list of additional waypoints on the cache page – only those the owner has made visible. Blue mark with a question mark and a green tick: a solved cache you have found. Small blue dot: physical stage. Small green dot: final location. Your own caches, which the cache search leaves out, are read from the cache pages; there the site's icon and popup are kept, but the hover text becomes “Final location”. Solved caches you haven't found get a small type icon at the bottom right of the site's “solved” icon, since it doesn't show the cache type. The map layers panel, search and settings open where you last dragged them.</a:t>
             </a:r>
             <a:endParaRPr lang="en-US" dirty="0"/>
           </a:p>
@@ -2243,7 +2243,7 @@
                   <a:schemeClr val="accent4"/>
                 </a:solidFill>
               </a:rPr>
-              <a:t>Geocaching Map – Custom Tile Layers · v1.54.26</a:t>
+              <a:t>Geocaching Map – Custom Tile Layers · v1.54.47</a:t>
             </a:r>
             <a:endParaRPr lang="en-US" sz="1000" dirty="0"/>
           </a:p>
@@ -2763,7 +2763,7 @@
                   <a:schemeClr val="accent5"/>
                 </a:solidFill>
               </a:rPr>
-              <a:t>Userscript · version 1.54.26 · English and Norwegian</a:t>
+              <a:t>Userscript · version 1.54.47 · English and Norwegian</a:t>
             </a:r>
             <a:endParaRPr lang="en-US" sz="1400" dirty="0"/>
           </a:p>
@@ -2785,8 +2785,8 @@
         </p:blipFill>
         <p:spPr>
           <a:xfrm>
-            <a:off x="8742823" y="548640"/>
-            <a:ext cx="2534472" cy="5760720"/>
+            <a:off x="8763083" y="548640"/>
+            <a:ext cx="2514213" cy="5760720"/>
           </a:xfrm>
           <a:prstGeom prst="rect">
             <a:avLst/>
@@ -4165,7 +4165,7 @@
                   <a:schemeClr val="accent4"/>
                 </a:solidFill>
               </a:rPr>
-              <a:t>At your corrected coordinates – also when the icon has moved back after a find</a:t>
+              <a:t>At your corrected coordinates – also when the icon has moved back after a find; a small type icon shows the cache type</a:t>
             </a:r>
             <a:endParaRPr lang="en-US" sz="1700" dirty="0"/>
           </a:p>
@@ -10635,8 +10635,8 @@
         </p:blipFill>
         <p:spPr>
           <a:xfrm>
-            <a:off x="8623621" y="1527048"/>
-            <a:ext cx="2015509" cy="4581144"/>
+            <a:off x="8631676" y="1527048"/>
+            <a:ext cx="1999398" cy="4581144"/>
           </a:xfrm>
           <a:prstGeom prst="rect">
             <a:avLst/>

--- a/docs/Geocaching-Map-Custom-Tile-Layers-Presentation.pptx
+++ b/docs/Geocaching-Map-Custom-Tile-Layers-Presentation.pptx
@@ -123,13 +123,13 @@
   <p:extLst>
     <p:ext uri="{521415D9-36F7-43E2-AB2F-B90AF26B5E84}">
       <p14:sectionLst xmlns:p14="http://schemas.microsoft.com/office/powerpoint/2010/main">
-        <p14:section name="Introduction" id="{b3d19c72-84f5-6a26-43c5-401ca4930eb8}">
+        <p14:section name="Introduction" id="{27dd2e5e-58a4-eae3-4118-1250f95533c0}">
           <p14:sldIdLst>
             <p14:sldId id="256"/>
             <p14:sldId id="257"/>
           </p14:sldIdLst>
         </p14:section>
-        <p14:section name="Features" id="{14352c71-d5b1-cd8a-ace7-6798ab4f7bf2}">
+        <p14:section name="Features" id="{bc4e6a6b-ff85-d1dc-5009-1898b2986fc9}">
           <p14:sldIdLst>
             <p14:sldId id="258"/>
             <p14:sldId id="259"/>
@@ -144,14 +144,14 @@
             <p14:sldId id="268"/>
           </p14:sldIdLst>
         </p14:section>
-        <p14:section name="Technical" id="{c3b23677-c3b7-8e32-f9b3-8cb8bf206f26}">
+        <p14:section name="Technical" id="{30af841d-4b23-c3e2-1a96-e03bd5eb2e53}">
           <p14:sldIdLst>
             <p14:sldId id="269"/>
             <p14:sldId id="270"/>
             <p14:sldId id="271"/>
           </p14:sldIdLst>
         </p14:section>
-        <p14:section name="Wrap-up" id="{af25b316-6380-396a-0f9c-1298bccd0512}">
+        <p14:section name="Wrap-up" id="{8af574eb-38c0-5fee-d997-5f95f5613cb0}">
           <p14:sldIdLst>
             <p14:sldId id="272"/>
           </p14:sldIdLst>
@@ -824,7 +824,7 @@
           <a:p>
             <a:r>
               <a:rPr lang="en-US" dirty="0"/>
-              <a:t>The circles show from zoom level 15. The cache types, the exact coordinates and your solved coordinates come from geocaching.com's own cache search. Physical stages are read from the list of additional waypoints on the cache page – only those the owner has made visible. Blue mark with a question mark and a green tick: a solved cache you have found. Small blue dot: physical stage. Small green dot: final location. Your own caches, which the cache search leaves out, are read from the cache pages; there the site's icon and popup are kept, but the hover text becomes “Final location”. Solved caches you haven't found get a small type icon at the bottom right of the site's “solved” icon, since it doesn't show the cache type. The map layers panel, search and settings open where you last dragged them.</a:t>
+              <a:t>The circles show from zoom level 15. The cache types, the exact coordinates and your solved coordinates come from geocaching.com's own cache search. Physical stages are read from the list of additional waypoints on the cache page – only those the owner has made visible. Blue mark with a question mark and a green tick: a solved cache you have found. Small blue dot: physical stage. Small green dot: final location. Your own caches, which the cache search leaves out, are read from the cache pages; there the site's icon and popup are kept, but the hover text becomes “Final location”. A small type icon can be shown at the bottom right of solved caches – on the site's “solved” icon and on our marks – since the “solved” icon doesn't show the cache type (Settings, off by default). The map layers panel, search and settings open where you last dragged them.</a:t>
             </a:r>
             <a:endParaRPr lang="en-US" dirty="0"/>
           </a:p>
@@ -2243,7 +2243,7 @@
                   <a:schemeClr val="accent4"/>
                 </a:solidFill>
               </a:rPr>
-              <a:t>Geocaching Map – Custom Tile Layers · v1.54.47</a:t>
+              <a:t>Geocaching Map – Custom Tile Layers · v1.54.50</a:t>
             </a:r>
             <a:endParaRPr lang="en-US" sz="1000" dirty="0"/>
           </a:p>
@@ -2763,7 +2763,7 @@
                   <a:schemeClr val="accent5"/>
                 </a:solidFill>
               </a:rPr>
-              <a:t>Userscript · version 1.54.47 · English and Norwegian</a:t>
+              <a:t>Userscript · version 1.54.50 · English and Norwegian</a:t>
             </a:r>
             <a:endParaRPr lang="en-US" sz="1400" dirty="0"/>
           </a:p>
@@ -4165,7 +4165,7 @@
                   <a:schemeClr val="accent4"/>
                 </a:solidFill>
               </a:rPr>
-              <a:t>At your corrected coordinates – also when the icon has moved back after a find; a small type icon shows the cache type</a:t>
+              <a:t>At your corrected coordinates – also when the icon has moved back after a find; a small type icon can show the cache type</a:t>
             </a:r>
             <a:endParaRPr lang="en-US" sz="1700" dirty="0"/>
           </a:p>

--- a/docs/Geocaching-Map-Custom-Tile-Layers-Presentation.pptx
+++ b/docs/Geocaching-Map-Custom-Tile-Layers-Presentation.pptx
@@ -123,13 +123,13 @@
   <p:extLst>
     <p:ext uri="{521415D9-36F7-43E2-AB2F-B90AF26B5E84}">
       <p14:sectionLst xmlns:p14="http://schemas.microsoft.com/office/powerpoint/2010/main">
-        <p14:section name="Introduction" id="{27dd2e5e-58a4-eae3-4118-1250f95533c0}">
+        <p14:section name="Introduction" id="{3b6f0689-3ace-0d1b-b399-a6b2362fd8c9}">
           <p14:sldIdLst>
             <p14:sldId id="256"/>
             <p14:sldId id="257"/>
           </p14:sldIdLst>
         </p14:section>
-        <p14:section name="Features" id="{bc4e6a6b-ff85-d1dc-5009-1898b2986fc9}">
+        <p14:section name="Features" id="{d6879827-29e5-8f71-3d58-34d616af3a9e}">
           <p14:sldIdLst>
             <p14:sldId id="258"/>
             <p14:sldId id="259"/>
@@ -144,14 +144,14 @@
             <p14:sldId id="268"/>
           </p14:sldIdLst>
         </p14:section>
-        <p14:section name="Technical" id="{30af841d-4b23-c3e2-1a96-e03bd5eb2e53}">
+        <p14:section name="Technical" id="{4e6d8048-600a-6927-139b-24e58843878a}">
           <p14:sldIdLst>
             <p14:sldId id="269"/>
             <p14:sldId id="270"/>
             <p14:sldId id="271"/>
           </p14:sldIdLst>
         </p14:section>
-        <p14:section name="Wrap-up" id="{8af574eb-38c0-5fee-d997-5f95f5613cb0}">
+        <p14:section name="Wrap-up" id="{b31db0d9-21a3-0516-32cb-d3bc04048ab1}">
           <p14:sldIdLst>
             <p14:sldId id="272"/>
           </p14:sldIdLst>
@@ -824,7 +824,7 @@
           <a:p>
             <a:r>
               <a:rPr lang="en-US" dirty="0"/>
-              <a:t>The circles show from zoom level 15. The cache types, the exact coordinates and your solved coordinates come from geocaching.com's own cache search. Physical stages are read from the list of additional waypoints on the cache page – only those the owner has made visible. Blue mark with a question mark and a green tick: a solved cache you have found. Small blue dot: physical stage. Small green dot: final location. Your own caches, which the cache search leaves out, are read from the cache pages; there the site's icon and popup are kept, but the hover text becomes “Final location”. A small type icon can be shown at the bottom right of solved caches – on the site's “solved” icon and on our marks – since the “solved” icon doesn't show the cache type (Settings, off by default). The map layers panel, search and settings open where you last dragged them.</a:t>
+              <a:t>The circles show from zoom level 15. The cache types, the exact coordinates and your solved coordinates come from geocaching.com's own cache search. Physical stages are read from the list of additional waypoints on the cache page – only those the owner has made visible. Yellow smiley with a green tick: a solved cache you have found. Blue mark with a question mark: a solved cache whose icon is not on the map. Small blue dot: physical stage. Small green dot: final location. Your own caches, which the cache search leaves out, are read from the cache pages; there the site's icon and popup are kept, but the hover text becomes “Final location”. A small type icon can be shown at the bottom right of solved caches – on the site's “solved” icon and on our marks – since the “solved” icon doesn't show the cache type (Settings, off by default). The map layers panel, search and settings open where you last dragged them.</a:t>
             </a:r>
             <a:endParaRPr lang="en-US" dirty="0"/>
           </a:p>
@@ -2243,7 +2243,7 @@
                   <a:schemeClr val="accent4"/>
                 </a:solidFill>
               </a:rPr>
-              <a:t>Geocaching Map – Custom Tile Layers · v1.54.50</a:t>
+              <a:t>Geocaching Map – Custom Tile Layers · v1.54.53</a:t>
             </a:r>
             <a:endParaRPr lang="en-US" sz="1000" dirty="0"/>
           </a:p>
@@ -2763,7 +2763,7 @@
                   <a:schemeClr val="accent5"/>
                 </a:solidFill>
               </a:rPr>
-              <a:t>Userscript · version 1.54.50 · English and Norwegian</a:t>
+              <a:t>Userscript · version 1.54.53 · English and Norwegian</a:t>
             </a:r>
             <a:endParaRPr lang="en-US" sz="1400" dirty="0"/>
           </a:p>
